--- a/docs/MES-HuongDanSuDung.pptx
+++ b/docs/MES-HuongDanSuDung.pptx
@@ -5,23 +5,23 @@
     <p:sldMasterId id="2147483648" r:id="rId1"/>
   </p:sldMasterIdLst>
   <p:sldIdLst>
-    <p:sldId id="256" r:id="rId2"/>
-    <p:sldId id="257" r:id="rId3"/>
-    <p:sldId id="258" r:id="rId4"/>
-    <p:sldId id="259" r:id="rId5"/>
-    <p:sldId id="260" r:id="rId6"/>
-    <p:sldId id="261" r:id="rId7"/>
-    <p:sldId id="262" r:id="rId8"/>
-    <p:sldId id="263" r:id="rId9"/>
-    <p:sldId id="264" r:id="rId10"/>
-    <p:sldId id="265" r:id="rId11"/>
-    <p:sldId id="266" r:id="rId12"/>
-    <p:sldId id="267" r:id="rId13"/>
-    <p:sldId id="268" r:id="rId14"/>
-    <p:sldId id="269" r:id="rId15"/>
-    <p:sldId id="270" r:id="rId16"/>
+    <p:sldId id="256" r:id="rId7"/>
+    <p:sldId id="257" r:id="rId8"/>
+    <p:sldId id="258" r:id="rId9"/>
+    <p:sldId id="259" r:id="rId10"/>
+    <p:sldId id="260" r:id="rId11"/>
+    <p:sldId id="261" r:id="rId12"/>
+    <p:sldId id="262" r:id="rId13"/>
+    <p:sldId id="263" r:id="rId14"/>
+    <p:sldId id="264" r:id="rId15"/>
+    <p:sldId id="265" r:id="rId16"/>
+    <p:sldId id="266" r:id="rId17"/>
+    <p:sldId id="267" r:id="rId18"/>
+    <p:sldId id="268" r:id="rId19"/>
+    <p:sldId id="269" r:id="rId20"/>
+    <p:sldId id="270" r:id="rId21"/>
   </p:sldIdLst>
-  <p:sldSz cx="12192000" cy="6858000"/>
+  <p:sldSz cx="12191695" cy="6858000" type="screen4x3"/>
   <p:notesSz cx="6858000" cy="9144000"/>
   <p:defaultTextStyle>
     <a:defPPr>
@@ -118,22 +118,6 @@
       </a:defRPr>
     </a:lvl9pPr>
   </p:defaultTextStyle>
-  <p:extLst>
-    <p:ext uri="{EFAFB233-063F-42B5-8137-9DF3F51BA10A}">
-      <p15:sldGuideLst xmlns:p15="http://schemas.microsoft.com/office/powerpoint/2012/main">
-        <p15:guide id="1" orient="horz" pos="2160">
-          <p15:clr>
-            <a:srgbClr val="A4A3A4"/>
-          </p15:clr>
-        </p15:guide>
-        <p15:guide id="2" pos="2880">
-          <p15:clr>
-            <a:srgbClr val="A4A3A4"/>
-          </p15:clr>
-        </p15:guide>
-      </p15:sldGuideLst>
-    </p:ext>
-  </p:extLst>
 </p:presentation>
 </file>
 
@@ -175,9 +159,10 @@
           <a:lstStyle/>
           <a:p>
             <a:r>
-              <a:rPr lang="en-US"/>
+              <a:rPr lang="en-US" smtClean="0"/>
               <a:t>Click to edit Master title style</a:t>
             </a:r>
+            <a:endParaRPr lang="en-US"/>
           </a:p>
         </p:txBody>
       </p:sp>
@@ -293,9 +278,10 @@
           </a:lstStyle>
           <a:p>
             <a:r>
-              <a:rPr lang="en-US"/>
+              <a:rPr lang="en-US" smtClean="0"/>
               <a:t>Click to edit Master subtitle style</a:t>
             </a:r>
+            <a:endParaRPr lang="en-US"/>
           </a:p>
         </p:txBody>
       </p:sp>
@@ -316,7 +302,7 @@
           <a:p>
             <a:fld id="{5BCAD085-E8A6-8845-BD4E-CB4CCA059FC4}" type="datetimeFigureOut">
               <a:rPr lang="en-US" smtClean="0"/>
-              <a:t>6/23/26</a:t>
+              <a:t>1/27/13</a:t>
             </a:fld>
             <a:endParaRPr lang="en-US"/>
           </a:p>
@@ -410,9 +396,10 @@
           <a:lstStyle/>
           <a:p>
             <a:r>
-              <a:rPr lang="en-US"/>
+              <a:rPr lang="en-US" smtClean="0"/>
               <a:t>Click to edit Master title style</a:t>
             </a:r>
+            <a:endParaRPr lang="en-US"/>
           </a:p>
         </p:txBody>
       </p:sp>
@@ -433,37 +420,38 @@
           <a:p>
             <a:pPr lvl="0"/>
             <a:r>
-              <a:rPr lang="en-US"/>
+              <a:rPr lang="en-US" smtClean="0"/>
               <a:t>Click to edit Master text styles</a:t>
             </a:r>
           </a:p>
           <a:p>
             <a:pPr lvl="1"/>
             <a:r>
-              <a:rPr lang="en-US"/>
+              <a:rPr lang="en-US" smtClean="0"/>
               <a:t>Second level</a:t>
             </a:r>
           </a:p>
           <a:p>
             <a:pPr lvl="2"/>
             <a:r>
-              <a:rPr lang="en-US"/>
+              <a:rPr lang="en-US" smtClean="0"/>
               <a:t>Third level</a:t>
             </a:r>
           </a:p>
           <a:p>
             <a:pPr lvl="3"/>
             <a:r>
-              <a:rPr lang="en-US"/>
+              <a:rPr lang="en-US" smtClean="0"/>
               <a:t>Fourth level</a:t>
             </a:r>
           </a:p>
           <a:p>
             <a:pPr lvl="4"/>
             <a:r>
-              <a:rPr lang="en-US"/>
+              <a:rPr lang="en-US" smtClean="0"/>
               <a:t>Fifth level</a:t>
             </a:r>
+            <a:endParaRPr lang="en-US"/>
           </a:p>
         </p:txBody>
       </p:sp>
@@ -484,7 +472,7 @@
           <a:p>
             <a:fld id="{5BCAD085-E8A6-8845-BD4E-CB4CCA059FC4}" type="datetimeFigureOut">
               <a:rPr lang="en-US" smtClean="0"/>
-              <a:t>6/23/26</a:t>
+              <a:t>1/27/13</a:t>
             </a:fld>
             <a:endParaRPr lang="en-US"/>
           </a:p>
@@ -583,9 +571,10 @@
           <a:lstStyle/>
           <a:p>
             <a:r>
-              <a:rPr lang="en-US"/>
+              <a:rPr lang="en-US" smtClean="0"/>
               <a:t>Click to edit Master title style</a:t>
             </a:r>
+            <a:endParaRPr lang="en-US"/>
           </a:p>
         </p:txBody>
       </p:sp>
@@ -611,37 +600,38 @@
           <a:p>
             <a:pPr lvl="0"/>
             <a:r>
-              <a:rPr lang="en-US"/>
+              <a:rPr lang="en-US" smtClean="0"/>
               <a:t>Click to edit Master text styles</a:t>
             </a:r>
           </a:p>
           <a:p>
             <a:pPr lvl="1"/>
             <a:r>
-              <a:rPr lang="en-US"/>
+              <a:rPr lang="en-US" smtClean="0"/>
               <a:t>Second level</a:t>
             </a:r>
           </a:p>
           <a:p>
             <a:pPr lvl="2"/>
             <a:r>
-              <a:rPr lang="en-US"/>
+              <a:rPr lang="en-US" smtClean="0"/>
               <a:t>Third level</a:t>
             </a:r>
           </a:p>
           <a:p>
             <a:pPr lvl="3"/>
             <a:r>
-              <a:rPr lang="en-US"/>
+              <a:rPr lang="en-US" smtClean="0"/>
               <a:t>Fourth level</a:t>
             </a:r>
           </a:p>
           <a:p>
             <a:pPr lvl="4"/>
             <a:r>
-              <a:rPr lang="en-US"/>
+              <a:rPr lang="en-US" smtClean="0"/>
               <a:t>Fifth level</a:t>
             </a:r>
+            <a:endParaRPr lang="en-US"/>
           </a:p>
         </p:txBody>
       </p:sp>
@@ -662,7 +652,7 @@
           <a:p>
             <a:fld id="{5BCAD085-E8A6-8845-BD4E-CB4CCA059FC4}" type="datetimeFigureOut">
               <a:rPr lang="en-US" smtClean="0"/>
-              <a:t>6/23/26</a:t>
+              <a:t>1/27/13</a:t>
             </a:fld>
             <a:endParaRPr lang="en-US"/>
           </a:p>
@@ -756,9 +746,10 @@
           <a:lstStyle/>
           <a:p>
             <a:r>
-              <a:rPr lang="en-US"/>
+              <a:rPr lang="en-US" smtClean="0"/>
               <a:t>Click to edit Master title style</a:t>
             </a:r>
+            <a:endParaRPr lang="en-US"/>
           </a:p>
         </p:txBody>
       </p:sp>
@@ -779,37 +770,38 @@
           <a:p>
             <a:pPr lvl="0"/>
             <a:r>
-              <a:rPr lang="en-US"/>
+              <a:rPr lang="en-US" smtClean="0"/>
               <a:t>Click to edit Master text styles</a:t>
             </a:r>
           </a:p>
           <a:p>
             <a:pPr lvl="1"/>
             <a:r>
-              <a:rPr lang="en-US"/>
+              <a:rPr lang="en-US" smtClean="0"/>
               <a:t>Second level</a:t>
             </a:r>
           </a:p>
           <a:p>
             <a:pPr lvl="2"/>
             <a:r>
-              <a:rPr lang="en-US"/>
+              <a:rPr lang="en-US" smtClean="0"/>
               <a:t>Third level</a:t>
             </a:r>
           </a:p>
           <a:p>
             <a:pPr lvl="3"/>
             <a:r>
-              <a:rPr lang="en-US"/>
+              <a:rPr lang="en-US" smtClean="0"/>
               <a:t>Fourth level</a:t>
             </a:r>
           </a:p>
           <a:p>
             <a:pPr lvl="4"/>
             <a:r>
-              <a:rPr lang="en-US"/>
+              <a:rPr lang="en-US" smtClean="0"/>
               <a:t>Fifth level</a:t>
             </a:r>
+            <a:endParaRPr lang="en-US"/>
           </a:p>
         </p:txBody>
       </p:sp>
@@ -830,7 +822,7 @@
           <a:p>
             <a:fld id="{5BCAD085-E8A6-8845-BD4E-CB4CCA059FC4}" type="datetimeFigureOut">
               <a:rPr lang="en-US" smtClean="0"/>
-              <a:t>6/23/26</a:t>
+              <a:t>1/27/13</a:t>
             </a:fld>
             <a:endParaRPr lang="en-US"/>
           </a:p>
@@ -933,9 +925,10 @@
           </a:lstStyle>
           <a:p>
             <a:r>
-              <a:rPr lang="en-US"/>
+              <a:rPr lang="en-US" smtClean="0"/>
               <a:t>Click to edit Master title style</a:t>
             </a:r>
+            <a:endParaRPr lang="en-US"/>
           </a:p>
         </p:txBody>
       </p:sp>
@@ -1052,7 +1045,7 @@
           <a:p>
             <a:pPr lvl="0"/>
             <a:r>
-              <a:rPr lang="en-US"/>
+              <a:rPr lang="en-US" smtClean="0"/>
               <a:t>Click to edit Master text styles</a:t>
             </a:r>
           </a:p>
@@ -1075,7 +1068,7 @@
           <a:p>
             <a:fld id="{5BCAD085-E8A6-8845-BD4E-CB4CCA059FC4}" type="datetimeFigureOut">
               <a:rPr lang="en-US" smtClean="0"/>
-              <a:t>6/23/26</a:t>
+              <a:t>1/27/13</a:t>
             </a:fld>
             <a:endParaRPr lang="en-US"/>
           </a:p>
@@ -1169,9 +1162,10 @@
           <a:lstStyle/>
           <a:p>
             <a:r>
-              <a:rPr lang="en-US"/>
+              <a:rPr lang="en-US" smtClean="0"/>
               <a:t>Click to edit Master title style</a:t>
             </a:r>
+            <a:endParaRPr lang="en-US"/>
           </a:p>
         </p:txBody>
       </p:sp>
@@ -1225,37 +1219,38 @@
           <a:p>
             <a:pPr lvl="0"/>
             <a:r>
-              <a:rPr lang="en-US"/>
+              <a:rPr lang="en-US" smtClean="0"/>
               <a:t>Click to edit Master text styles</a:t>
             </a:r>
           </a:p>
           <a:p>
             <a:pPr lvl="1"/>
             <a:r>
-              <a:rPr lang="en-US"/>
+              <a:rPr lang="en-US" smtClean="0"/>
               <a:t>Second level</a:t>
             </a:r>
           </a:p>
           <a:p>
             <a:pPr lvl="2"/>
             <a:r>
-              <a:rPr lang="en-US"/>
+              <a:rPr lang="en-US" smtClean="0"/>
               <a:t>Third level</a:t>
             </a:r>
           </a:p>
           <a:p>
             <a:pPr lvl="3"/>
             <a:r>
-              <a:rPr lang="en-US"/>
+              <a:rPr lang="en-US" smtClean="0"/>
               <a:t>Fourth level</a:t>
             </a:r>
           </a:p>
           <a:p>
             <a:pPr lvl="4"/>
             <a:r>
-              <a:rPr lang="en-US"/>
+              <a:rPr lang="en-US" smtClean="0"/>
               <a:t>Fifth level</a:t>
             </a:r>
+            <a:endParaRPr lang="en-US"/>
           </a:p>
         </p:txBody>
       </p:sp>
@@ -1309,37 +1304,38 @@
           <a:p>
             <a:pPr lvl="0"/>
             <a:r>
-              <a:rPr lang="en-US"/>
+              <a:rPr lang="en-US" smtClean="0"/>
               <a:t>Click to edit Master text styles</a:t>
             </a:r>
           </a:p>
           <a:p>
             <a:pPr lvl="1"/>
             <a:r>
-              <a:rPr lang="en-US"/>
+              <a:rPr lang="en-US" smtClean="0"/>
               <a:t>Second level</a:t>
             </a:r>
           </a:p>
           <a:p>
             <a:pPr lvl="2"/>
             <a:r>
-              <a:rPr lang="en-US"/>
+              <a:rPr lang="en-US" smtClean="0"/>
               <a:t>Third level</a:t>
             </a:r>
           </a:p>
           <a:p>
             <a:pPr lvl="3"/>
             <a:r>
-              <a:rPr lang="en-US"/>
+              <a:rPr lang="en-US" smtClean="0"/>
               <a:t>Fourth level</a:t>
             </a:r>
           </a:p>
           <a:p>
             <a:pPr lvl="4"/>
             <a:r>
-              <a:rPr lang="en-US"/>
+              <a:rPr lang="en-US" smtClean="0"/>
               <a:t>Fifth level</a:t>
             </a:r>
+            <a:endParaRPr lang="en-US"/>
           </a:p>
         </p:txBody>
       </p:sp>
@@ -1360,7 +1356,7 @@
           <a:p>
             <a:fld id="{5BCAD085-E8A6-8845-BD4E-CB4CCA059FC4}" type="datetimeFigureOut">
               <a:rPr lang="en-US" smtClean="0"/>
-              <a:t>6/23/26</a:t>
+              <a:t>1/27/13</a:t>
             </a:fld>
             <a:endParaRPr lang="en-US"/>
           </a:p>
@@ -1458,9 +1454,10 @@
           </a:lstStyle>
           <a:p>
             <a:r>
-              <a:rPr lang="en-US"/>
+              <a:rPr lang="en-US" smtClean="0"/>
               <a:t>Click to edit Master title style</a:t>
             </a:r>
+            <a:endParaRPr lang="en-US"/>
           </a:p>
         </p:txBody>
       </p:sp>
@@ -1523,7 +1520,7 @@
           <a:p>
             <a:pPr lvl="0"/>
             <a:r>
-              <a:rPr lang="en-US"/>
+              <a:rPr lang="en-US" smtClean="0"/>
               <a:t>Click to edit Master text styles</a:t>
             </a:r>
           </a:p>
@@ -1579,37 +1576,38 @@
           <a:p>
             <a:pPr lvl="0"/>
             <a:r>
-              <a:rPr lang="en-US"/>
+              <a:rPr lang="en-US" smtClean="0"/>
               <a:t>Click to edit Master text styles</a:t>
             </a:r>
           </a:p>
           <a:p>
             <a:pPr lvl="1"/>
             <a:r>
-              <a:rPr lang="en-US"/>
+              <a:rPr lang="en-US" smtClean="0"/>
               <a:t>Second level</a:t>
             </a:r>
           </a:p>
           <a:p>
             <a:pPr lvl="2"/>
             <a:r>
-              <a:rPr lang="en-US"/>
+              <a:rPr lang="en-US" smtClean="0"/>
               <a:t>Third level</a:t>
             </a:r>
           </a:p>
           <a:p>
             <a:pPr lvl="3"/>
             <a:r>
-              <a:rPr lang="en-US"/>
+              <a:rPr lang="en-US" smtClean="0"/>
               <a:t>Fourth level</a:t>
             </a:r>
           </a:p>
           <a:p>
             <a:pPr lvl="4"/>
             <a:r>
-              <a:rPr lang="en-US"/>
+              <a:rPr lang="en-US" smtClean="0"/>
               <a:t>Fifth level</a:t>
             </a:r>
+            <a:endParaRPr lang="en-US"/>
           </a:p>
         </p:txBody>
       </p:sp>
@@ -1672,7 +1670,7 @@
           <a:p>
             <a:pPr lvl="0"/>
             <a:r>
-              <a:rPr lang="en-US"/>
+              <a:rPr lang="en-US" smtClean="0"/>
               <a:t>Click to edit Master text styles</a:t>
             </a:r>
           </a:p>
@@ -1728,37 +1726,38 @@
           <a:p>
             <a:pPr lvl="0"/>
             <a:r>
-              <a:rPr lang="en-US"/>
+              <a:rPr lang="en-US" smtClean="0"/>
               <a:t>Click to edit Master text styles</a:t>
             </a:r>
           </a:p>
           <a:p>
             <a:pPr lvl="1"/>
             <a:r>
-              <a:rPr lang="en-US"/>
+              <a:rPr lang="en-US" smtClean="0"/>
               <a:t>Second level</a:t>
             </a:r>
           </a:p>
           <a:p>
             <a:pPr lvl="2"/>
             <a:r>
-              <a:rPr lang="en-US"/>
+              <a:rPr lang="en-US" smtClean="0"/>
               <a:t>Third level</a:t>
             </a:r>
           </a:p>
           <a:p>
             <a:pPr lvl="3"/>
             <a:r>
-              <a:rPr lang="en-US"/>
+              <a:rPr lang="en-US" smtClean="0"/>
               <a:t>Fourth level</a:t>
             </a:r>
           </a:p>
           <a:p>
             <a:pPr lvl="4"/>
             <a:r>
-              <a:rPr lang="en-US"/>
+              <a:rPr lang="en-US" smtClean="0"/>
               <a:t>Fifth level</a:t>
             </a:r>
+            <a:endParaRPr lang="en-US"/>
           </a:p>
         </p:txBody>
       </p:sp>
@@ -1779,7 +1778,7 @@
           <a:p>
             <a:fld id="{5BCAD085-E8A6-8845-BD4E-CB4CCA059FC4}" type="datetimeFigureOut">
               <a:rPr lang="en-US" smtClean="0"/>
-              <a:t>6/23/26</a:t>
+              <a:t>1/27/13</a:t>
             </a:fld>
             <a:endParaRPr lang="en-US"/>
           </a:p>
@@ -1873,9 +1872,10 @@
           <a:lstStyle/>
           <a:p>
             <a:r>
-              <a:rPr lang="en-US"/>
+              <a:rPr lang="en-US" smtClean="0"/>
               <a:t>Click to edit Master title style</a:t>
             </a:r>
+            <a:endParaRPr lang="en-US"/>
           </a:p>
         </p:txBody>
       </p:sp>
@@ -1896,7 +1896,7 @@
           <a:p>
             <a:fld id="{5BCAD085-E8A6-8845-BD4E-CB4CCA059FC4}" type="datetimeFigureOut">
               <a:rPr lang="en-US" smtClean="0"/>
-              <a:t>6/23/26</a:t>
+              <a:t>1/27/13</a:t>
             </a:fld>
             <a:endParaRPr lang="en-US"/>
           </a:p>
@@ -1991,7 +1991,7 @@
           <a:p>
             <a:fld id="{5BCAD085-E8A6-8845-BD4E-CB4CCA059FC4}" type="datetimeFigureOut">
               <a:rPr lang="en-US" smtClean="0"/>
-              <a:t>6/23/26</a:t>
+              <a:t>1/27/13</a:t>
             </a:fld>
             <a:endParaRPr lang="en-US"/>
           </a:p>
@@ -2094,9 +2094,10 @@
           </a:lstStyle>
           <a:p>
             <a:r>
-              <a:rPr lang="en-US"/>
+              <a:rPr lang="en-US" smtClean="0"/>
               <a:t>Click to edit Master title style</a:t>
             </a:r>
+            <a:endParaRPr lang="en-US"/>
           </a:p>
         </p:txBody>
       </p:sp>
@@ -2150,37 +2151,38 @@
           <a:p>
             <a:pPr lvl="0"/>
             <a:r>
-              <a:rPr lang="en-US"/>
+              <a:rPr lang="en-US" smtClean="0"/>
               <a:t>Click to edit Master text styles</a:t>
             </a:r>
           </a:p>
           <a:p>
             <a:pPr lvl="1"/>
             <a:r>
-              <a:rPr lang="en-US"/>
+              <a:rPr lang="en-US" smtClean="0"/>
               <a:t>Second level</a:t>
             </a:r>
           </a:p>
           <a:p>
             <a:pPr lvl="2"/>
             <a:r>
-              <a:rPr lang="en-US"/>
+              <a:rPr lang="en-US" smtClean="0"/>
               <a:t>Third level</a:t>
             </a:r>
           </a:p>
           <a:p>
             <a:pPr lvl="3"/>
             <a:r>
-              <a:rPr lang="en-US"/>
+              <a:rPr lang="en-US" smtClean="0"/>
               <a:t>Fourth level</a:t>
             </a:r>
           </a:p>
           <a:p>
             <a:pPr lvl="4"/>
             <a:r>
-              <a:rPr lang="en-US"/>
+              <a:rPr lang="en-US" smtClean="0"/>
               <a:t>Fifth level</a:t>
             </a:r>
+            <a:endParaRPr lang="en-US"/>
           </a:p>
         </p:txBody>
       </p:sp>
@@ -2243,7 +2245,7 @@
           <a:p>
             <a:pPr lvl="0"/>
             <a:r>
-              <a:rPr lang="en-US"/>
+              <a:rPr lang="en-US" smtClean="0"/>
               <a:t>Click to edit Master text styles</a:t>
             </a:r>
           </a:p>
@@ -2266,7 +2268,7 @@
           <a:p>
             <a:fld id="{5BCAD085-E8A6-8845-BD4E-CB4CCA059FC4}" type="datetimeFigureOut">
               <a:rPr lang="en-US" smtClean="0"/>
-              <a:t>6/23/26</a:t>
+              <a:t>1/27/13</a:t>
             </a:fld>
             <a:endParaRPr lang="en-US"/>
           </a:p>
@@ -2369,9 +2371,10 @@
           </a:lstStyle>
           <a:p>
             <a:r>
-              <a:rPr lang="en-US"/>
+              <a:rPr lang="en-US" smtClean="0"/>
               <a:t>Click to edit Master title style</a:t>
             </a:r>
+            <a:endParaRPr lang="en-US"/>
           </a:p>
         </p:txBody>
       </p:sp>
@@ -2495,7 +2498,7 @@
           <a:p>
             <a:pPr lvl="0"/>
             <a:r>
-              <a:rPr lang="en-US"/>
+              <a:rPr lang="en-US" smtClean="0"/>
               <a:t>Click to edit Master text styles</a:t>
             </a:r>
           </a:p>
@@ -2518,7 +2521,7 @@
           <a:p>
             <a:fld id="{5BCAD085-E8A6-8845-BD4E-CB4CCA059FC4}" type="datetimeFigureOut">
               <a:rPr lang="en-US" smtClean="0"/>
-              <a:t>6/23/26</a:t>
+              <a:t>1/27/13</a:t>
             </a:fld>
             <a:endParaRPr lang="en-US"/>
           </a:p>
@@ -2627,9 +2630,10 @@
           <a:lstStyle/>
           <a:p>
             <a:r>
-              <a:rPr lang="en-US"/>
+              <a:rPr lang="en-US" smtClean="0"/>
               <a:t>Click to edit Master title style</a:t>
             </a:r>
+            <a:endParaRPr lang="en-US"/>
           </a:p>
         </p:txBody>
       </p:sp>
@@ -2660,37 +2664,38 @@
           <a:p>
             <a:pPr lvl="0"/>
             <a:r>
-              <a:rPr lang="en-US"/>
+              <a:rPr lang="en-US" smtClean="0"/>
               <a:t>Click to edit Master text styles</a:t>
             </a:r>
           </a:p>
           <a:p>
             <a:pPr lvl="1"/>
             <a:r>
-              <a:rPr lang="en-US"/>
+              <a:rPr lang="en-US" smtClean="0"/>
               <a:t>Second level</a:t>
             </a:r>
           </a:p>
           <a:p>
             <a:pPr lvl="2"/>
             <a:r>
-              <a:rPr lang="en-US"/>
+              <a:rPr lang="en-US" smtClean="0"/>
               <a:t>Third level</a:t>
             </a:r>
           </a:p>
           <a:p>
             <a:pPr lvl="3"/>
             <a:r>
-              <a:rPr lang="en-US"/>
+              <a:rPr lang="en-US" smtClean="0"/>
               <a:t>Fourth level</a:t>
             </a:r>
           </a:p>
           <a:p>
             <a:pPr lvl="4"/>
             <a:r>
-              <a:rPr lang="en-US"/>
+              <a:rPr lang="en-US" smtClean="0"/>
               <a:t>Fifth level</a:t>
             </a:r>
+            <a:endParaRPr lang="en-US"/>
           </a:p>
         </p:txBody>
       </p:sp>
@@ -2729,7 +2734,7 @@
           <a:p>
             <a:fld id="{5BCAD085-E8A6-8845-BD4E-CB4CCA059FC4}" type="datetimeFigureOut">
               <a:rPr lang="en-US" smtClean="0"/>
-              <a:t>6/23/26</a:t>
+              <a:t>1/27/13</a:t>
             </a:fld>
             <a:endParaRPr lang="en-US"/>
           </a:p>
@@ -3088,7 +3093,7 @@
 </file>
 
 <file path=ppt/slides/slide1.xml><?xml version="1.0" encoding="utf-8"?>
-<p:sld xmlns:a="http://schemas.openxmlformats.org/drawingml/2006/main" xmlns:r="http://schemas.openxmlformats.org/officeDocument/2006/relationships" xmlns:p="http://schemas.openxmlformats.org/presentationml/2006/main">
+<p:sld xmlns:a="http://schemas.openxmlformats.org/drawingml/2006/main" xmlns:p="http://schemas.openxmlformats.org/presentationml/2006/main" xmlns:r="http://schemas.openxmlformats.org/officeDocument/2006/relationships">
   <p:cSld>
     <p:spTree>
       <p:nvGrpSpPr>
@@ -3096,14 +3101,7 @@
         <p:cNvGrpSpPr/>
         <p:nvPr/>
       </p:nvGrpSpPr>
-      <p:grpSpPr>
-        <a:xfrm>
-          <a:off x="0" y="0"/>
-          <a:ext cx="0" cy="0"/>
-          <a:chOff x="0" y="0"/>
-          <a:chExt cx="0" cy="0"/>
-        </a:xfrm>
-      </p:grpSpPr>
+      <p:grpSpPr/>
       <p:sp>
         <p:nvSpPr>
           <p:cNvPr id="2" name="Rectangle 1"/>
@@ -3145,7 +3143,6 @@
           <a:lstStyle/>
           <a:p>
             <a:pPr algn="ctr"/>
-            <a:endParaRPr/>
           </a:p>
         </p:txBody>
       </p:sp>
@@ -3190,7 +3187,6 @@
           <a:lstStyle/>
           <a:p>
             <a:pPr algn="ctr"/>
-            <a:endParaRPr/>
           </a:p>
         </p:txBody>
       </p:sp>
@@ -3235,7 +3231,6 @@
           <a:lstStyle/>
           <a:p>
             <a:pPr algn="ctr"/>
-            <a:endParaRPr/>
           </a:p>
         </p:txBody>
       </p:sp>
@@ -3280,7 +3275,6 @@
           <a:lstStyle/>
           <a:p>
             <a:pPr algn="ctr"/>
-            <a:endParaRPr/>
           </a:p>
         </p:txBody>
       </p:sp>
@@ -3301,7 +3295,7 @@
           <a:noFill/>
         </p:spPr>
         <p:txBody>
-          <a:bodyPr wrap="square" lIns="25400" tIns="25400" rIns="25400" bIns="25400" anchor="t">
+          <a:bodyPr wrap="square" lIns="25400" rIns="25400" tIns="25400" bIns="25400" anchor="t">
             <a:spAutoFit/>
           </a:bodyPr>
           <a:lstStyle/>
@@ -3343,7 +3337,7 @@
           <a:noFill/>
         </p:spPr>
         <p:txBody>
-          <a:bodyPr wrap="square" lIns="25400" tIns="25400" rIns="25400" bIns="25400" anchor="t">
+          <a:bodyPr wrap="square" lIns="25400" rIns="25400" tIns="25400" bIns="25400" anchor="t">
             <a:spAutoFit/>
           </a:bodyPr>
           <a:lstStyle/>
@@ -3385,7 +3379,7 @@
           <a:noFill/>
         </p:spPr>
         <p:txBody>
-          <a:bodyPr wrap="square" lIns="25400" tIns="25400" rIns="25400" bIns="25400" anchor="t">
+          <a:bodyPr wrap="square" lIns="25400" rIns="25400" tIns="25400" bIns="25400" anchor="t">
             <a:spAutoFit/>
           </a:bodyPr>
           <a:lstStyle/>
@@ -3451,7 +3445,6 @@
           <a:lstStyle/>
           <a:p>
             <a:pPr algn="ctr"/>
-            <a:endParaRPr/>
           </a:p>
         </p:txBody>
       </p:sp>
@@ -3472,7 +3465,7 @@
           <a:noFill/>
         </p:spPr>
         <p:txBody>
-          <a:bodyPr wrap="square" lIns="25400" tIns="25400" rIns="25400" bIns="25400" anchor="t">
+          <a:bodyPr wrap="square" lIns="25400" rIns="25400" tIns="25400" bIns="25400" anchor="t">
             <a:spAutoFit/>
           </a:bodyPr>
           <a:lstStyle/>
@@ -3506,7 +3499,7 @@
 </file>
 
 <file path=ppt/slides/slide10.xml><?xml version="1.0" encoding="utf-8"?>
-<p:sld xmlns:a="http://schemas.openxmlformats.org/drawingml/2006/main" xmlns:r="http://schemas.openxmlformats.org/officeDocument/2006/relationships" xmlns:p="http://schemas.openxmlformats.org/presentationml/2006/main">
+<p:sld xmlns:a="http://schemas.openxmlformats.org/drawingml/2006/main" xmlns:p="http://schemas.openxmlformats.org/presentationml/2006/main" xmlns:r="http://schemas.openxmlformats.org/officeDocument/2006/relationships">
   <p:cSld>
     <p:spTree>
       <p:nvGrpSpPr>
@@ -3514,14 +3507,7 @@
         <p:cNvGrpSpPr/>
         <p:nvPr/>
       </p:nvGrpSpPr>
-      <p:grpSpPr>
-        <a:xfrm>
-          <a:off x="0" y="0"/>
-          <a:ext cx="0" cy="0"/>
-          <a:chOff x="0" y="0"/>
-          <a:chExt cx="0" cy="0"/>
-        </a:xfrm>
-      </p:grpSpPr>
+      <p:grpSpPr/>
       <p:sp>
         <p:nvSpPr>
           <p:cNvPr id="2" name="Rectangle 1"/>
@@ -3563,7 +3549,6 @@
           <a:lstStyle/>
           <a:p>
             <a:pPr algn="ctr"/>
-            <a:endParaRPr/>
           </a:p>
         </p:txBody>
       </p:sp>
@@ -3584,7 +3569,7 @@
           <a:noFill/>
         </p:spPr>
         <p:txBody>
-          <a:bodyPr wrap="square" lIns="25400" tIns="25400" rIns="25400" bIns="25400" anchor="t">
+          <a:bodyPr wrap="square" lIns="25400" rIns="25400" tIns="25400" bIns="25400" anchor="t">
             <a:spAutoFit/>
           </a:bodyPr>
           <a:lstStyle/>
@@ -3626,7 +3611,7 @@
           <a:noFill/>
         </p:spPr>
         <p:txBody>
-          <a:bodyPr wrap="square" lIns="25400" tIns="25400" rIns="25400" bIns="25400" anchor="t">
+          <a:bodyPr wrap="square" lIns="25400" rIns="25400" tIns="25400" bIns="25400" anchor="t">
             <a:spAutoFit/>
           </a:bodyPr>
           <a:lstStyle/>
@@ -3694,7 +3679,6 @@
           <a:lstStyle/>
           <a:p>
             <a:pPr algn="ctr"/>
-            <a:endParaRPr/>
           </a:p>
         </p:txBody>
       </p:sp>
@@ -3735,7 +3719,7 @@
           </a:fontRef>
         </p:style>
         <p:txBody>
-          <a:bodyPr wrap="none" lIns="0" tIns="0" rIns="0" bIns="0" rtlCol="0" anchor="ctr"/>
+          <a:bodyPr rtlCol="0" anchor="ctr" wrap="none" lIns="0" rIns="0" tIns="0" bIns="0"/>
           <a:lstStyle/>
           <a:p>
             <a:pPr algn="ctr"/>
@@ -3768,7 +3752,7 @@
           <a:noFill/>
         </p:spPr>
         <p:txBody>
-          <a:bodyPr wrap="square" lIns="25400" tIns="25400" rIns="25400" bIns="25400" anchor="ctr">
+          <a:bodyPr wrap="square" lIns="25400" rIns="25400" tIns="25400" bIns="25400" anchor="ctr">
             <a:spAutoFit/>
           </a:bodyPr>
           <a:lstStyle/>
@@ -3810,7 +3794,7 @@
           <a:noFill/>
         </p:spPr>
         <p:txBody>
-          <a:bodyPr wrap="square" lIns="25400" tIns="25400" rIns="25400" bIns="25400" anchor="t">
+          <a:bodyPr wrap="square" lIns="25400" rIns="25400" tIns="25400" bIns="25400" anchor="t">
             <a:spAutoFit/>
           </a:bodyPr>
           <a:lstStyle/>
@@ -3954,7 +3938,6 @@
           <a:lstStyle/>
           <a:p>
             <a:pPr algn="ctr"/>
-            <a:endParaRPr/>
           </a:p>
         </p:txBody>
       </p:sp>
@@ -3995,7 +3978,7 @@
           </a:fontRef>
         </p:style>
         <p:txBody>
-          <a:bodyPr wrap="none" lIns="0" tIns="0" rIns="0" bIns="0" rtlCol="0" anchor="ctr"/>
+          <a:bodyPr rtlCol="0" anchor="ctr" wrap="none" lIns="0" rIns="0" tIns="0" bIns="0"/>
           <a:lstStyle/>
           <a:p>
             <a:pPr algn="ctr"/>
@@ -4028,7 +4011,7 @@
           <a:noFill/>
         </p:spPr>
         <p:txBody>
-          <a:bodyPr wrap="square" lIns="25400" tIns="25400" rIns="25400" bIns="25400" anchor="ctr">
+          <a:bodyPr wrap="square" lIns="25400" rIns="25400" tIns="25400" bIns="25400" anchor="ctr">
             <a:spAutoFit/>
           </a:bodyPr>
           <a:lstStyle/>
@@ -4070,7 +4053,7 @@
           <a:noFill/>
         </p:spPr>
         <p:txBody>
-          <a:bodyPr wrap="square" lIns="25400" tIns="25400" rIns="25400" bIns="25400" anchor="t">
+          <a:bodyPr wrap="square" lIns="25400" rIns="25400" tIns="25400" bIns="25400" anchor="t">
             <a:spAutoFit/>
           </a:bodyPr>
           <a:lstStyle/>
@@ -4195,7 +4178,6 @@
           <a:lstStyle/>
           <a:p>
             <a:pPr algn="ctr"/>
-            <a:endParaRPr/>
           </a:p>
         </p:txBody>
       </p:sp>
@@ -4236,7 +4218,7 @@
           </a:fontRef>
         </p:style>
         <p:txBody>
-          <a:bodyPr wrap="none" lIns="0" tIns="0" rIns="0" bIns="0" rtlCol="0" anchor="ctr"/>
+          <a:bodyPr rtlCol="0" anchor="ctr" wrap="none" lIns="0" rIns="0" tIns="0" bIns="0"/>
           <a:lstStyle/>
           <a:p>
             <a:pPr algn="ctr"/>
@@ -4269,7 +4251,7 @@
           <a:noFill/>
         </p:spPr>
         <p:txBody>
-          <a:bodyPr wrap="square" lIns="25400" tIns="25400" rIns="25400" bIns="25400" anchor="ctr">
+          <a:bodyPr wrap="square" lIns="25400" rIns="25400" tIns="25400" bIns="25400" anchor="ctr">
             <a:spAutoFit/>
           </a:bodyPr>
           <a:lstStyle/>
@@ -4311,7 +4293,7 @@
           <a:noFill/>
         </p:spPr>
         <p:txBody>
-          <a:bodyPr wrap="square" lIns="25400" tIns="25400" rIns="25400" bIns="25400" anchor="t">
+          <a:bodyPr wrap="square" lIns="25400" rIns="25400" tIns="25400" bIns="25400" anchor="t">
             <a:spAutoFit/>
           </a:bodyPr>
           <a:lstStyle/>
@@ -4325,7 +4307,7 @@
               </a:spcAft>
             </a:pPr>
             <a:r>
-              <a:rPr sz="1250" b="0" i="0">
+              <a:rPr sz="1150" b="0" i="0">
                 <a:solidFill>
                   <a:srgbClr val="222A3A"/>
                 </a:solidFill>
@@ -4344,7 +4326,7 @@
               </a:spcAft>
             </a:pPr>
             <a:r>
-              <a:rPr sz="1250" b="0" i="0">
+              <a:rPr sz="1150" b="0" i="0">
                 <a:solidFill>
                   <a:srgbClr val="222A3A"/>
                 </a:solidFill>
@@ -4363,7 +4345,7 @@
               </a:spcAft>
             </a:pPr>
             <a:r>
-              <a:rPr sz="1250" b="0" i="0">
+              <a:rPr sz="1150" b="0" i="0">
                 <a:solidFill>
                   <a:srgbClr val="222A3A"/>
                 </a:solidFill>
@@ -4382,7 +4364,7 @@
               </a:spcAft>
             </a:pPr>
             <a:r>
-              <a:rPr sz="1250" b="0" i="0">
+              <a:rPr sz="1150" b="0" i="0">
                 <a:solidFill>
                   <a:srgbClr val="222A3A"/>
                 </a:solidFill>
@@ -4401,13 +4383,51 @@
               </a:spcAft>
             </a:pPr>
             <a:r>
-              <a:rPr sz="1250" b="0" i="0">
+              <a:rPr sz="1150" b="0" i="0">
                 <a:solidFill>
                   <a:srgbClr val="222A3A"/>
                 </a:solidFill>
                 <a:latin typeface="Calibri"/>
               </a:rPr>
               <a:t>   webhook, audit</a:t>
+            </a:r>
+          </a:p>
+          <a:p>
+            <a:pPr algn="l">
+              <a:lnSpc>
+                <a:spcPct val="106000"/>
+              </a:lnSpc>
+              <a:spcAft>
+                <a:spcPts val="200"/>
+              </a:spcAft>
+            </a:pPr>
+            <a:r>
+              <a:rPr sz="1150" b="0" i="0">
+                <a:solidFill>
+                  <a:srgbClr val="222A3A"/>
+                </a:solidFill>
+                <a:latin typeface="Calibri"/>
+              </a:rPr>
+              <a:t>Copy quyền: nhân bản cấu hình</a:t>
+            </a:r>
+          </a:p>
+          <a:p>
+            <a:pPr algn="l">
+              <a:lnSpc>
+                <a:spcPct val="106000"/>
+              </a:lnSpc>
+              <a:spcAft>
+                <a:spcPts val="200"/>
+              </a:spcAft>
+            </a:pPr>
+            <a:r>
+              <a:rPr sz="1150" b="0" i="0">
+                <a:solidFill>
+                  <a:srgbClr val="222A3A"/>
+                </a:solidFill>
+                <a:latin typeface="Calibri"/>
+              </a:rPr>
+              <a:t>   1 tài khoản sang tài khoản khác</a:t>
             </a:r>
           </a:p>
         </p:txBody>
@@ -4421,7 +4441,7 @@
 </file>
 
 <file path=ppt/slides/slide11.xml><?xml version="1.0" encoding="utf-8"?>
-<p:sld xmlns:a="http://schemas.openxmlformats.org/drawingml/2006/main" xmlns:r="http://schemas.openxmlformats.org/officeDocument/2006/relationships" xmlns:p="http://schemas.openxmlformats.org/presentationml/2006/main">
+<p:sld xmlns:a="http://schemas.openxmlformats.org/drawingml/2006/main" xmlns:p="http://schemas.openxmlformats.org/presentationml/2006/main" xmlns:r="http://schemas.openxmlformats.org/officeDocument/2006/relationships">
   <p:cSld>
     <p:spTree>
       <p:nvGrpSpPr>
@@ -4429,14 +4449,7 @@
         <p:cNvGrpSpPr/>
         <p:nvPr/>
       </p:nvGrpSpPr>
-      <p:grpSpPr>
-        <a:xfrm>
-          <a:off x="0" y="0"/>
-          <a:ext cx="0" cy="0"/>
-          <a:chOff x="0" y="0"/>
-          <a:chExt cx="0" cy="0"/>
-        </a:xfrm>
-      </p:grpSpPr>
+      <p:grpSpPr/>
       <p:sp>
         <p:nvSpPr>
           <p:cNvPr id="2" name="Rectangle 1"/>
@@ -4478,7 +4491,6 @@
           <a:lstStyle/>
           <a:p>
             <a:pPr algn="ctr"/>
-            <a:endParaRPr/>
           </a:p>
         </p:txBody>
       </p:sp>
@@ -4499,7 +4511,7 @@
           <a:noFill/>
         </p:spPr>
         <p:txBody>
-          <a:bodyPr wrap="square" lIns="25400" tIns="25400" rIns="25400" bIns="25400" anchor="t">
+          <a:bodyPr wrap="square" lIns="25400" rIns="25400" tIns="25400" bIns="25400" anchor="t">
             <a:spAutoFit/>
           </a:bodyPr>
           <a:lstStyle/>
@@ -4541,7 +4553,7 @@
           <a:noFill/>
         </p:spPr>
         <p:txBody>
-          <a:bodyPr wrap="square" lIns="25400" tIns="25400" rIns="25400" bIns="25400" anchor="t">
+          <a:bodyPr wrap="square" lIns="25400" rIns="25400" tIns="25400" bIns="25400" anchor="t">
             <a:spAutoFit/>
           </a:bodyPr>
           <a:lstStyle/>
@@ -4609,7 +4621,6 @@
           <a:lstStyle/>
           <a:p>
             <a:pPr algn="ctr"/>
-            <a:endParaRPr/>
           </a:p>
         </p:txBody>
       </p:sp>
@@ -4630,7 +4641,7 @@
           <a:noFill/>
         </p:spPr>
         <p:txBody>
-          <a:bodyPr wrap="square" lIns="25400" tIns="25400" rIns="25400" bIns="25400" anchor="ctr">
+          <a:bodyPr wrap="square" lIns="25400" rIns="25400" tIns="25400" bIns="25400" anchor="ctr">
             <a:spAutoFit/>
           </a:bodyPr>
           <a:lstStyle/>
@@ -4698,7 +4709,6 @@
           <a:lstStyle/>
           <a:p>
             <a:pPr algn="ctr"/>
-            <a:endParaRPr/>
           </a:p>
         </p:txBody>
       </p:sp>
@@ -4719,7 +4729,7 @@
           <a:noFill/>
         </p:spPr>
         <p:txBody>
-          <a:bodyPr wrap="square" lIns="25400" tIns="25400" rIns="25400" bIns="25400" anchor="ctr">
+          <a:bodyPr wrap="square" lIns="25400" rIns="25400" tIns="25400" bIns="25400" anchor="ctr">
             <a:spAutoFit/>
           </a:bodyPr>
           <a:lstStyle/>
@@ -4787,7 +4797,6 @@
           <a:lstStyle/>
           <a:p>
             <a:pPr algn="ctr"/>
-            <a:endParaRPr/>
           </a:p>
         </p:txBody>
       </p:sp>
@@ -4808,7 +4817,7 @@
           <a:noFill/>
         </p:spPr>
         <p:txBody>
-          <a:bodyPr wrap="square" lIns="25400" tIns="25400" rIns="25400" bIns="25400" anchor="ctr">
+          <a:bodyPr wrap="square" lIns="25400" rIns="25400" tIns="25400" bIns="25400" anchor="ctr">
             <a:spAutoFit/>
           </a:bodyPr>
           <a:lstStyle/>
@@ -4876,7 +4885,6 @@
           <a:lstStyle/>
           <a:p>
             <a:pPr algn="ctr"/>
-            <a:endParaRPr/>
           </a:p>
         </p:txBody>
       </p:sp>
@@ -4897,7 +4905,7 @@
           <a:noFill/>
         </p:spPr>
         <p:txBody>
-          <a:bodyPr wrap="square" lIns="25400" tIns="25400" rIns="25400" bIns="25400" anchor="ctr">
+          <a:bodyPr wrap="square" lIns="25400" rIns="25400" tIns="25400" bIns="25400" anchor="ctr">
             <a:spAutoFit/>
           </a:bodyPr>
           <a:lstStyle/>
@@ -4965,7 +4973,6 @@
           <a:lstStyle/>
           <a:p>
             <a:pPr algn="ctr"/>
-            <a:endParaRPr/>
           </a:p>
         </p:txBody>
       </p:sp>
@@ -4986,7 +4993,7 @@
           <a:noFill/>
         </p:spPr>
         <p:txBody>
-          <a:bodyPr wrap="square" lIns="25400" tIns="25400" rIns="25400" bIns="25400" anchor="ctr">
+          <a:bodyPr wrap="square" lIns="25400" rIns="25400" tIns="25400" bIns="25400" anchor="ctr">
             <a:spAutoFit/>
           </a:bodyPr>
           <a:lstStyle/>
@@ -5054,7 +5061,6 @@
           <a:lstStyle/>
           <a:p>
             <a:pPr algn="ctr"/>
-            <a:endParaRPr/>
           </a:p>
         </p:txBody>
       </p:sp>
@@ -5075,7 +5081,7 @@
           <a:noFill/>
         </p:spPr>
         <p:txBody>
-          <a:bodyPr wrap="square" lIns="25400" tIns="25400" rIns="25400" bIns="25400" anchor="ctr">
+          <a:bodyPr wrap="square" lIns="25400" rIns="25400" tIns="25400" bIns="25400" anchor="ctr">
             <a:spAutoFit/>
           </a:bodyPr>
           <a:lstStyle/>
@@ -5143,7 +5149,6 @@
           <a:lstStyle/>
           <a:p>
             <a:pPr algn="ctr"/>
-            <a:endParaRPr/>
           </a:p>
         </p:txBody>
       </p:sp>
@@ -5164,7 +5169,7 @@
           <a:noFill/>
         </p:spPr>
         <p:txBody>
-          <a:bodyPr wrap="square" lIns="25400" tIns="25400" rIns="25400" bIns="25400" anchor="ctr">
+          <a:bodyPr wrap="square" lIns="25400" rIns="25400" tIns="25400" bIns="25400" anchor="ctr">
             <a:spAutoFit/>
           </a:bodyPr>
           <a:lstStyle/>
@@ -5232,7 +5237,6 @@
           <a:lstStyle/>
           <a:p>
             <a:pPr algn="ctr"/>
-            <a:endParaRPr/>
           </a:p>
         </p:txBody>
       </p:sp>
@@ -5253,7 +5257,7 @@
           <a:noFill/>
         </p:spPr>
         <p:txBody>
-          <a:bodyPr wrap="square" lIns="25400" tIns="25400" rIns="25400" bIns="25400" anchor="ctr">
+          <a:bodyPr wrap="square" lIns="25400" rIns="25400" tIns="25400" bIns="25400" anchor="ctr">
             <a:spAutoFit/>
           </a:bodyPr>
           <a:lstStyle/>
@@ -5321,7 +5325,6 @@
           <a:lstStyle/>
           <a:p>
             <a:pPr algn="ctr"/>
-            <a:endParaRPr/>
           </a:p>
         </p:txBody>
       </p:sp>
@@ -5342,7 +5345,7 @@
           <a:noFill/>
         </p:spPr>
         <p:txBody>
-          <a:bodyPr wrap="square" lIns="25400" tIns="25400" rIns="25400" bIns="25400" anchor="ctr">
+          <a:bodyPr wrap="square" lIns="25400" rIns="25400" tIns="25400" bIns="25400" anchor="ctr">
             <a:spAutoFit/>
           </a:bodyPr>
           <a:lstStyle/>
@@ -5410,7 +5413,6 @@
           <a:lstStyle/>
           <a:p>
             <a:pPr algn="ctr"/>
-            <a:endParaRPr/>
           </a:p>
         </p:txBody>
       </p:sp>
@@ -5431,7 +5433,7 @@
           <a:noFill/>
         </p:spPr>
         <p:txBody>
-          <a:bodyPr wrap="square" lIns="25400" tIns="25400" rIns="25400" bIns="25400" anchor="ctr">
+          <a:bodyPr wrap="square" lIns="25400" rIns="25400" tIns="25400" bIns="25400" anchor="ctr">
             <a:spAutoFit/>
           </a:bodyPr>
           <a:lstStyle/>
@@ -5499,7 +5501,6 @@
           <a:lstStyle/>
           <a:p>
             <a:pPr algn="ctr"/>
-            <a:endParaRPr/>
           </a:p>
         </p:txBody>
       </p:sp>
@@ -5520,7 +5521,7 @@
           <a:noFill/>
         </p:spPr>
         <p:txBody>
-          <a:bodyPr wrap="square" lIns="25400" tIns="25400" rIns="25400" bIns="25400" anchor="ctr">
+          <a:bodyPr wrap="square" lIns="25400" rIns="25400" tIns="25400" bIns="25400" anchor="ctr">
             <a:spAutoFit/>
           </a:bodyPr>
           <a:lstStyle/>
@@ -5588,7 +5589,6 @@
           <a:lstStyle/>
           <a:p>
             <a:pPr algn="ctr"/>
-            <a:endParaRPr/>
           </a:p>
         </p:txBody>
       </p:sp>
@@ -5609,7 +5609,7 @@
           <a:noFill/>
         </p:spPr>
         <p:txBody>
-          <a:bodyPr wrap="square" lIns="25400" tIns="25400" rIns="25400" bIns="25400" anchor="ctr">
+          <a:bodyPr wrap="square" lIns="25400" rIns="25400" tIns="25400" bIns="25400" anchor="ctr">
             <a:spAutoFit/>
           </a:bodyPr>
           <a:lstStyle/>
@@ -5677,7 +5677,6 @@
           <a:lstStyle/>
           <a:p>
             <a:pPr algn="ctr"/>
-            <a:endParaRPr/>
           </a:p>
         </p:txBody>
       </p:sp>
@@ -5698,7 +5697,7 @@
           <a:noFill/>
         </p:spPr>
         <p:txBody>
-          <a:bodyPr wrap="square" lIns="25400" tIns="25400" rIns="25400" bIns="25400" anchor="ctr">
+          <a:bodyPr wrap="square" lIns="25400" rIns="25400" tIns="25400" bIns="25400" anchor="ctr">
             <a:spAutoFit/>
           </a:bodyPr>
           <a:lstStyle/>
@@ -5766,7 +5765,6 @@
           <a:lstStyle/>
           <a:p>
             <a:pPr algn="ctr"/>
-            <a:endParaRPr/>
           </a:p>
         </p:txBody>
       </p:sp>
@@ -5787,7 +5785,7 @@
           <a:noFill/>
         </p:spPr>
         <p:txBody>
-          <a:bodyPr wrap="square" lIns="25400" tIns="25400" rIns="25400" bIns="25400" anchor="ctr">
+          <a:bodyPr wrap="square" lIns="25400" rIns="25400" tIns="25400" bIns="25400" anchor="ctr">
             <a:spAutoFit/>
           </a:bodyPr>
           <a:lstStyle/>
@@ -5855,7 +5853,6 @@
           <a:lstStyle/>
           <a:p>
             <a:pPr algn="ctr"/>
-            <a:endParaRPr/>
           </a:p>
         </p:txBody>
       </p:sp>
@@ -5876,7 +5873,7 @@
           <a:noFill/>
         </p:spPr>
         <p:txBody>
-          <a:bodyPr wrap="square" lIns="25400" tIns="25400" rIns="25400" bIns="25400" anchor="ctr">
+          <a:bodyPr wrap="square" lIns="25400" rIns="25400" tIns="25400" bIns="25400" anchor="ctr">
             <a:spAutoFit/>
           </a:bodyPr>
           <a:lstStyle/>
@@ -5944,7 +5941,6 @@
           <a:lstStyle/>
           <a:p>
             <a:pPr algn="ctr"/>
-            <a:endParaRPr/>
           </a:p>
         </p:txBody>
       </p:sp>
@@ -5965,7 +5961,7 @@
           <a:noFill/>
         </p:spPr>
         <p:txBody>
-          <a:bodyPr wrap="square" lIns="25400" tIns="25400" rIns="25400" bIns="25400" anchor="ctr">
+          <a:bodyPr wrap="square" lIns="25400" rIns="25400" tIns="25400" bIns="25400" anchor="ctr">
             <a:spAutoFit/>
           </a:bodyPr>
           <a:lstStyle/>
@@ -6033,7 +6029,6 @@
           <a:lstStyle/>
           <a:p>
             <a:pPr algn="ctr"/>
-            <a:endParaRPr/>
           </a:p>
         </p:txBody>
       </p:sp>
@@ -6054,7 +6049,7 @@
           <a:noFill/>
         </p:spPr>
         <p:txBody>
-          <a:bodyPr wrap="square" lIns="25400" tIns="25400" rIns="25400" bIns="25400" anchor="ctr">
+          <a:bodyPr wrap="square" lIns="25400" rIns="25400" tIns="25400" bIns="25400" anchor="ctr">
             <a:spAutoFit/>
           </a:bodyPr>
           <a:lstStyle/>
@@ -6122,7 +6117,6 @@
           <a:lstStyle/>
           <a:p>
             <a:pPr algn="ctr"/>
-            <a:endParaRPr/>
           </a:p>
         </p:txBody>
       </p:sp>
@@ -6143,7 +6137,7 @@
           <a:noFill/>
         </p:spPr>
         <p:txBody>
-          <a:bodyPr wrap="square" lIns="25400" tIns="25400" rIns="25400" bIns="25400" anchor="ctr">
+          <a:bodyPr wrap="square" lIns="25400" rIns="25400" tIns="25400" bIns="25400" anchor="ctr">
             <a:spAutoFit/>
           </a:bodyPr>
           <a:lstStyle/>
@@ -6211,7 +6205,6 @@
           <a:lstStyle/>
           <a:p>
             <a:pPr algn="ctr"/>
-            <a:endParaRPr/>
           </a:p>
         </p:txBody>
       </p:sp>
@@ -6232,7 +6225,7 @@
           <a:noFill/>
         </p:spPr>
         <p:txBody>
-          <a:bodyPr wrap="square" lIns="25400" tIns="25400" rIns="25400" bIns="25400" anchor="ctr">
+          <a:bodyPr wrap="square" lIns="25400" rIns="25400" tIns="25400" bIns="25400" anchor="ctr">
             <a:spAutoFit/>
           </a:bodyPr>
           <a:lstStyle/>
@@ -6300,7 +6293,6 @@
           <a:lstStyle/>
           <a:p>
             <a:pPr algn="ctr"/>
-            <a:endParaRPr/>
           </a:p>
         </p:txBody>
       </p:sp>
@@ -6321,7 +6313,7 @@
           <a:noFill/>
         </p:spPr>
         <p:txBody>
-          <a:bodyPr wrap="square" lIns="25400" tIns="25400" rIns="25400" bIns="25400" anchor="ctr">
+          <a:bodyPr wrap="square" lIns="25400" rIns="25400" tIns="25400" bIns="25400" anchor="ctr">
             <a:spAutoFit/>
           </a:bodyPr>
           <a:lstStyle/>
@@ -6389,7 +6381,6 @@
           <a:lstStyle/>
           <a:p>
             <a:pPr algn="ctr"/>
-            <a:endParaRPr/>
           </a:p>
         </p:txBody>
       </p:sp>
@@ -6410,7 +6401,7 @@
           <a:noFill/>
         </p:spPr>
         <p:txBody>
-          <a:bodyPr wrap="square" lIns="25400" tIns="25400" rIns="25400" bIns="25400" anchor="ctr">
+          <a:bodyPr wrap="square" lIns="25400" rIns="25400" tIns="25400" bIns="25400" anchor="ctr">
             <a:spAutoFit/>
           </a:bodyPr>
           <a:lstStyle/>
@@ -6478,7 +6469,6 @@
           <a:lstStyle/>
           <a:p>
             <a:pPr algn="ctr"/>
-            <a:endParaRPr/>
           </a:p>
         </p:txBody>
       </p:sp>
@@ -6499,7 +6489,7 @@
           <a:noFill/>
         </p:spPr>
         <p:txBody>
-          <a:bodyPr wrap="square" lIns="25400" tIns="25400" rIns="25400" bIns="25400" anchor="ctr">
+          <a:bodyPr wrap="square" lIns="25400" rIns="25400" tIns="25400" bIns="25400" anchor="ctr">
             <a:spAutoFit/>
           </a:bodyPr>
           <a:lstStyle/>
@@ -6567,7 +6557,6 @@
           <a:lstStyle/>
           <a:p>
             <a:pPr algn="ctr"/>
-            <a:endParaRPr/>
           </a:p>
         </p:txBody>
       </p:sp>
@@ -6588,7 +6577,7 @@
           <a:noFill/>
         </p:spPr>
         <p:txBody>
-          <a:bodyPr wrap="square" lIns="25400" tIns="25400" rIns="25400" bIns="25400" anchor="ctr">
+          <a:bodyPr wrap="square" lIns="25400" rIns="25400" tIns="25400" bIns="25400" anchor="ctr">
             <a:spAutoFit/>
           </a:bodyPr>
           <a:lstStyle/>
@@ -6656,7 +6645,6 @@
           <a:lstStyle/>
           <a:p>
             <a:pPr algn="ctr"/>
-            <a:endParaRPr/>
           </a:p>
         </p:txBody>
       </p:sp>
@@ -6677,7 +6665,7 @@
           <a:noFill/>
         </p:spPr>
         <p:txBody>
-          <a:bodyPr wrap="square" lIns="25400" tIns="25400" rIns="25400" bIns="25400" anchor="ctr">
+          <a:bodyPr wrap="square" lIns="25400" rIns="25400" tIns="25400" bIns="25400" anchor="ctr">
             <a:spAutoFit/>
           </a:bodyPr>
           <a:lstStyle/>
@@ -6745,7 +6733,6 @@
           <a:lstStyle/>
           <a:p>
             <a:pPr algn="ctr"/>
-            <a:endParaRPr/>
           </a:p>
         </p:txBody>
       </p:sp>
@@ -6766,7 +6753,7 @@
           <a:noFill/>
         </p:spPr>
         <p:txBody>
-          <a:bodyPr wrap="square" lIns="25400" tIns="25400" rIns="25400" bIns="25400" anchor="ctr">
+          <a:bodyPr wrap="square" lIns="25400" rIns="25400" tIns="25400" bIns="25400" anchor="ctr">
             <a:spAutoFit/>
           </a:bodyPr>
           <a:lstStyle/>
@@ -6834,7 +6821,6 @@
           <a:lstStyle/>
           <a:p>
             <a:pPr algn="ctr"/>
-            <a:endParaRPr/>
           </a:p>
         </p:txBody>
       </p:sp>
@@ -6855,7 +6841,7 @@
           <a:noFill/>
         </p:spPr>
         <p:txBody>
-          <a:bodyPr wrap="square" lIns="25400" tIns="25400" rIns="25400" bIns="25400" anchor="ctr">
+          <a:bodyPr wrap="square" lIns="25400" rIns="25400" tIns="25400" bIns="25400" anchor="ctr">
             <a:spAutoFit/>
           </a:bodyPr>
           <a:lstStyle/>
@@ -6923,7 +6909,6 @@
           <a:lstStyle/>
           <a:p>
             <a:pPr algn="ctr"/>
-            <a:endParaRPr/>
           </a:p>
         </p:txBody>
       </p:sp>
@@ -6944,7 +6929,7 @@
           <a:noFill/>
         </p:spPr>
         <p:txBody>
-          <a:bodyPr wrap="square" lIns="25400" tIns="25400" rIns="25400" bIns="25400" anchor="ctr">
+          <a:bodyPr wrap="square" lIns="25400" rIns="25400" tIns="25400" bIns="25400" anchor="ctr">
             <a:spAutoFit/>
           </a:bodyPr>
           <a:lstStyle/>
@@ -6978,7 +6963,7 @@
 </file>
 
 <file path=ppt/slides/slide12.xml><?xml version="1.0" encoding="utf-8"?>
-<p:sld xmlns:a="http://schemas.openxmlformats.org/drawingml/2006/main" xmlns:r="http://schemas.openxmlformats.org/officeDocument/2006/relationships" xmlns:p="http://schemas.openxmlformats.org/presentationml/2006/main">
+<p:sld xmlns:a="http://schemas.openxmlformats.org/drawingml/2006/main" xmlns:p="http://schemas.openxmlformats.org/presentationml/2006/main" xmlns:r="http://schemas.openxmlformats.org/officeDocument/2006/relationships">
   <p:cSld>
     <p:spTree>
       <p:nvGrpSpPr>
@@ -6986,14 +6971,7 @@
         <p:cNvGrpSpPr/>
         <p:nvPr/>
       </p:nvGrpSpPr>
-      <p:grpSpPr>
-        <a:xfrm>
-          <a:off x="0" y="0"/>
-          <a:ext cx="0" cy="0"/>
-          <a:chOff x="0" y="0"/>
-          <a:chExt cx="0" cy="0"/>
-        </a:xfrm>
-      </p:grpSpPr>
+      <p:grpSpPr/>
       <p:sp>
         <p:nvSpPr>
           <p:cNvPr id="2" name="Rectangle 1"/>
@@ -7035,7 +7013,6 @@
           <a:lstStyle/>
           <a:p>
             <a:pPr algn="ctr"/>
-            <a:endParaRPr/>
           </a:p>
         </p:txBody>
       </p:sp>
@@ -7056,7 +7033,7 @@
           <a:noFill/>
         </p:spPr>
         <p:txBody>
-          <a:bodyPr wrap="square" lIns="25400" tIns="25400" rIns="25400" bIns="25400" anchor="t">
+          <a:bodyPr wrap="square" lIns="25400" rIns="25400" tIns="25400" bIns="25400" anchor="t">
             <a:spAutoFit/>
           </a:bodyPr>
           <a:lstStyle/>
@@ -7098,7 +7075,7 @@
           <a:noFill/>
         </p:spPr>
         <p:txBody>
-          <a:bodyPr wrap="square" lIns="25400" tIns="25400" rIns="25400" bIns="25400" anchor="t">
+          <a:bodyPr wrap="square" lIns="25400" rIns="25400" tIns="25400" bIns="25400" anchor="t">
             <a:spAutoFit/>
           </a:bodyPr>
           <a:lstStyle/>
@@ -7166,7 +7143,6 @@
           <a:lstStyle/>
           <a:p>
             <a:pPr algn="ctr"/>
-            <a:endParaRPr/>
           </a:p>
         </p:txBody>
       </p:sp>
@@ -7207,7 +7183,7 @@
           </a:fontRef>
         </p:style>
         <p:txBody>
-          <a:bodyPr wrap="none" lIns="0" tIns="0" rIns="0" bIns="0" rtlCol="0" anchor="ctr"/>
+          <a:bodyPr rtlCol="0" anchor="ctr" wrap="none" lIns="0" rIns="0" tIns="0" bIns="0"/>
           <a:lstStyle/>
           <a:p>
             <a:pPr algn="ctr"/>
@@ -7240,7 +7216,7 @@
           <a:noFill/>
         </p:spPr>
         <p:txBody>
-          <a:bodyPr wrap="square" lIns="25400" tIns="25400" rIns="25400" bIns="25400" anchor="ctr">
+          <a:bodyPr wrap="square" lIns="25400" rIns="25400" tIns="25400" bIns="25400" anchor="ctr">
             <a:spAutoFit/>
           </a:bodyPr>
           <a:lstStyle/>
@@ -7282,7 +7258,7 @@
           <a:noFill/>
         </p:spPr>
         <p:txBody>
-          <a:bodyPr wrap="square" lIns="25400" tIns="25400" rIns="25400" bIns="25400" anchor="t">
+          <a:bodyPr wrap="square" lIns="25400" rIns="25400" tIns="25400" bIns="25400" anchor="t">
             <a:spAutoFit/>
           </a:bodyPr>
           <a:lstStyle/>
@@ -7426,7 +7402,6 @@
           <a:lstStyle/>
           <a:p>
             <a:pPr algn="ctr"/>
-            <a:endParaRPr/>
           </a:p>
         </p:txBody>
       </p:sp>
@@ -7467,7 +7442,7 @@
           </a:fontRef>
         </p:style>
         <p:txBody>
-          <a:bodyPr wrap="none" lIns="0" tIns="0" rIns="0" bIns="0" rtlCol="0" anchor="ctr"/>
+          <a:bodyPr rtlCol="0" anchor="ctr" wrap="none" lIns="0" rIns="0" tIns="0" bIns="0"/>
           <a:lstStyle/>
           <a:p>
             <a:pPr algn="ctr"/>
@@ -7500,7 +7475,7 @@
           <a:noFill/>
         </p:spPr>
         <p:txBody>
-          <a:bodyPr wrap="square" lIns="25400" tIns="25400" rIns="25400" bIns="25400" anchor="ctr">
+          <a:bodyPr wrap="square" lIns="25400" rIns="25400" tIns="25400" bIns="25400" anchor="ctr">
             <a:spAutoFit/>
           </a:bodyPr>
           <a:lstStyle/>
@@ -7542,7 +7517,7 @@
           <a:noFill/>
         </p:spPr>
         <p:txBody>
-          <a:bodyPr wrap="square" lIns="25400" tIns="25400" rIns="25400" bIns="25400" anchor="t">
+          <a:bodyPr wrap="square" lIns="25400" rIns="25400" tIns="25400" bIns="25400" anchor="t">
             <a:spAutoFit/>
           </a:bodyPr>
           <a:lstStyle/>
@@ -7648,7 +7623,6 @@
           <a:lstStyle/>
           <a:p>
             <a:pPr algn="ctr"/>
-            <a:endParaRPr/>
           </a:p>
         </p:txBody>
       </p:sp>
@@ -7689,7 +7663,7 @@
           </a:fontRef>
         </p:style>
         <p:txBody>
-          <a:bodyPr wrap="none" lIns="0" tIns="0" rIns="0" bIns="0" rtlCol="0" anchor="ctr"/>
+          <a:bodyPr rtlCol="0" anchor="ctr" wrap="none" lIns="0" rIns="0" tIns="0" bIns="0"/>
           <a:lstStyle/>
           <a:p>
             <a:pPr algn="ctr"/>
@@ -7722,7 +7696,7 @@
           <a:noFill/>
         </p:spPr>
         <p:txBody>
-          <a:bodyPr wrap="square" lIns="25400" tIns="25400" rIns="25400" bIns="25400" anchor="ctr">
+          <a:bodyPr wrap="square" lIns="25400" rIns="25400" tIns="25400" bIns="25400" anchor="ctr">
             <a:spAutoFit/>
           </a:bodyPr>
           <a:lstStyle/>
@@ -7764,7 +7738,7 @@
           <a:noFill/>
         </p:spPr>
         <p:txBody>
-          <a:bodyPr wrap="square" lIns="25400" tIns="25400" rIns="25400" bIns="25400" anchor="t">
+          <a:bodyPr wrap="square" lIns="25400" rIns="25400" tIns="25400" bIns="25400" anchor="t">
             <a:spAutoFit/>
           </a:bodyPr>
           <a:lstStyle/>
@@ -7851,7 +7825,6 @@
           <a:lstStyle/>
           <a:p>
             <a:pPr algn="ctr"/>
-            <a:endParaRPr/>
           </a:p>
         </p:txBody>
       </p:sp>
@@ -7892,7 +7865,7 @@
           </a:fontRef>
         </p:style>
         <p:txBody>
-          <a:bodyPr wrap="none" lIns="0" tIns="0" rIns="0" bIns="0" rtlCol="0" anchor="ctr"/>
+          <a:bodyPr rtlCol="0" anchor="ctr" wrap="none" lIns="0" rIns="0" tIns="0" bIns="0"/>
           <a:lstStyle/>
           <a:p>
             <a:pPr algn="ctr"/>
@@ -7925,7 +7898,7 @@
           <a:noFill/>
         </p:spPr>
         <p:txBody>
-          <a:bodyPr wrap="square" lIns="25400" tIns="25400" rIns="25400" bIns="25400" anchor="ctr">
+          <a:bodyPr wrap="square" lIns="25400" rIns="25400" tIns="25400" bIns="25400" anchor="ctr">
             <a:spAutoFit/>
           </a:bodyPr>
           <a:lstStyle/>
@@ -7967,7 +7940,7 @@
           <a:noFill/>
         </p:spPr>
         <p:txBody>
-          <a:bodyPr wrap="square" lIns="25400" tIns="25400" rIns="25400" bIns="25400" anchor="t">
+          <a:bodyPr wrap="square" lIns="25400" rIns="25400" tIns="25400" bIns="25400" anchor="t">
             <a:spAutoFit/>
           </a:bodyPr>
           <a:lstStyle/>
@@ -8028,7 +8001,7 @@
           <a:noFill/>
         </p:spPr>
         <p:txBody>
-          <a:bodyPr wrap="square" lIns="25400" tIns="25400" rIns="25400" bIns="25400" anchor="t">
+          <a:bodyPr wrap="square" lIns="25400" rIns="25400" tIns="25400" bIns="25400" anchor="t">
             <a:spAutoFit/>
           </a:bodyPr>
           <a:lstStyle/>
@@ -8062,7 +8035,7 @@
 </file>
 
 <file path=ppt/slides/slide13.xml><?xml version="1.0" encoding="utf-8"?>
-<p:sld xmlns:a="http://schemas.openxmlformats.org/drawingml/2006/main" xmlns:r="http://schemas.openxmlformats.org/officeDocument/2006/relationships" xmlns:p="http://schemas.openxmlformats.org/presentationml/2006/main">
+<p:sld xmlns:a="http://schemas.openxmlformats.org/drawingml/2006/main" xmlns:p="http://schemas.openxmlformats.org/presentationml/2006/main" xmlns:r="http://schemas.openxmlformats.org/officeDocument/2006/relationships">
   <p:cSld>
     <p:spTree>
       <p:nvGrpSpPr>
@@ -8070,14 +8043,7 @@
         <p:cNvGrpSpPr/>
         <p:nvPr/>
       </p:nvGrpSpPr>
-      <p:grpSpPr>
-        <a:xfrm>
-          <a:off x="0" y="0"/>
-          <a:ext cx="0" cy="0"/>
-          <a:chOff x="0" y="0"/>
-          <a:chExt cx="0" cy="0"/>
-        </a:xfrm>
-      </p:grpSpPr>
+      <p:grpSpPr/>
       <p:sp>
         <p:nvSpPr>
           <p:cNvPr id="2" name="Rectangle 1"/>
@@ -8119,7 +8085,6 @@
           <a:lstStyle/>
           <a:p>
             <a:pPr algn="ctr"/>
-            <a:endParaRPr/>
           </a:p>
         </p:txBody>
       </p:sp>
@@ -8140,7 +8105,7 @@
           <a:noFill/>
         </p:spPr>
         <p:txBody>
-          <a:bodyPr wrap="square" lIns="25400" tIns="25400" rIns="25400" bIns="25400" anchor="t">
+          <a:bodyPr wrap="square" lIns="25400" rIns="25400" tIns="25400" bIns="25400" anchor="t">
             <a:spAutoFit/>
           </a:bodyPr>
           <a:lstStyle/>
@@ -8182,7 +8147,7 @@
           <a:noFill/>
         </p:spPr>
         <p:txBody>
-          <a:bodyPr wrap="square" lIns="25400" tIns="25400" rIns="25400" bIns="25400" anchor="t">
+          <a:bodyPr wrap="square" lIns="25400" rIns="25400" tIns="25400" bIns="25400" anchor="t">
             <a:spAutoFit/>
           </a:bodyPr>
           <a:lstStyle/>
@@ -8250,7 +8215,6 @@
           <a:lstStyle/>
           <a:p>
             <a:pPr algn="ctr"/>
-            <a:endParaRPr/>
           </a:p>
         </p:txBody>
       </p:sp>
@@ -8291,7 +8255,7 @@
           </a:fontRef>
         </p:style>
         <p:txBody>
-          <a:bodyPr wrap="none" lIns="0" tIns="0" rIns="0" bIns="0" rtlCol="0" anchor="ctr"/>
+          <a:bodyPr rtlCol="0" anchor="ctr" wrap="none" lIns="0" rIns="0" tIns="0" bIns="0"/>
           <a:lstStyle/>
           <a:p>
             <a:pPr algn="ctr"/>
@@ -8324,7 +8288,7 @@
           <a:noFill/>
         </p:spPr>
         <p:txBody>
-          <a:bodyPr wrap="square" lIns="25400" tIns="25400" rIns="25400" bIns="25400" anchor="ctr">
+          <a:bodyPr wrap="square" lIns="25400" rIns="25400" tIns="25400" bIns="25400" anchor="ctr">
             <a:spAutoFit/>
           </a:bodyPr>
           <a:lstStyle/>
@@ -8366,7 +8330,7 @@
           <a:noFill/>
         </p:spPr>
         <p:txBody>
-          <a:bodyPr wrap="square" lIns="25400" tIns="25400" rIns="25400" bIns="25400" anchor="t">
+          <a:bodyPr wrap="square" lIns="25400" rIns="25400" tIns="25400" bIns="25400" anchor="t">
             <a:spAutoFit/>
           </a:bodyPr>
           <a:lstStyle/>
@@ -8491,7 +8455,6 @@
           <a:lstStyle/>
           <a:p>
             <a:pPr algn="ctr"/>
-            <a:endParaRPr/>
           </a:p>
         </p:txBody>
       </p:sp>
@@ -8532,7 +8495,7 @@
           </a:fontRef>
         </p:style>
         <p:txBody>
-          <a:bodyPr wrap="none" lIns="0" tIns="0" rIns="0" bIns="0" rtlCol="0" anchor="ctr"/>
+          <a:bodyPr rtlCol="0" anchor="ctr" wrap="none" lIns="0" rIns="0" tIns="0" bIns="0"/>
           <a:lstStyle/>
           <a:p>
             <a:pPr algn="ctr"/>
@@ -8565,7 +8528,7 @@
           <a:noFill/>
         </p:spPr>
         <p:txBody>
-          <a:bodyPr wrap="square" lIns="25400" tIns="25400" rIns="25400" bIns="25400" anchor="ctr">
+          <a:bodyPr wrap="square" lIns="25400" rIns="25400" tIns="25400" bIns="25400" anchor="ctr">
             <a:spAutoFit/>
           </a:bodyPr>
           <a:lstStyle/>
@@ -8607,7 +8570,7 @@
           <a:noFill/>
         </p:spPr>
         <p:txBody>
-          <a:bodyPr wrap="square" lIns="25400" tIns="25400" rIns="25400" bIns="25400" anchor="t">
+          <a:bodyPr wrap="square" lIns="25400" rIns="25400" tIns="25400" bIns="25400" anchor="t">
             <a:spAutoFit/>
           </a:bodyPr>
           <a:lstStyle/>
@@ -8706,7 +8669,7 @@
           <a:noFill/>
         </p:spPr>
         <p:txBody>
-          <a:bodyPr wrap="square" lIns="25400" tIns="25400" rIns="25400" bIns="25400" anchor="t">
+          <a:bodyPr wrap="square" lIns="25400" rIns="25400" tIns="25400" bIns="25400" anchor="t">
             <a:spAutoFit/>
           </a:bodyPr>
           <a:lstStyle/>
@@ -8740,7 +8703,7 @@
 </file>
 
 <file path=ppt/slides/slide14.xml><?xml version="1.0" encoding="utf-8"?>
-<p:sld xmlns:a="http://schemas.openxmlformats.org/drawingml/2006/main" xmlns:r="http://schemas.openxmlformats.org/officeDocument/2006/relationships" xmlns:p="http://schemas.openxmlformats.org/presentationml/2006/main">
+<p:sld xmlns:a="http://schemas.openxmlformats.org/drawingml/2006/main" xmlns:p="http://schemas.openxmlformats.org/presentationml/2006/main" xmlns:r="http://schemas.openxmlformats.org/officeDocument/2006/relationships">
   <p:cSld>
     <p:spTree>
       <p:nvGrpSpPr>
@@ -8748,14 +8711,7 @@
         <p:cNvGrpSpPr/>
         <p:nvPr/>
       </p:nvGrpSpPr>
-      <p:grpSpPr>
-        <a:xfrm>
-          <a:off x="0" y="0"/>
-          <a:ext cx="0" cy="0"/>
-          <a:chOff x="0" y="0"/>
-          <a:chExt cx="0" cy="0"/>
-        </a:xfrm>
-      </p:grpSpPr>
+      <p:grpSpPr/>
       <p:sp>
         <p:nvSpPr>
           <p:cNvPr id="2" name="Rectangle 1"/>
@@ -8797,7 +8753,6 @@
           <a:lstStyle/>
           <a:p>
             <a:pPr algn="ctr"/>
-            <a:endParaRPr/>
           </a:p>
         </p:txBody>
       </p:sp>
@@ -8818,7 +8773,7 @@
           <a:noFill/>
         </p:spPr>
         <p:txBody>
-          <a:bodyPr wrap="square" lIns="25400" tIns="25400" rIns="25400" bIns="25400" anchor="t">
+          <a:bodyPr wrap="square" lIns="25400" rIns="25400" tIns="25400" bIns="25400" anchor="t">
             <a:spAutoFit/>
           </a:bodyPr>
           <a:lstStyle/>
@@ -8860,7 +8815,7 @@
           <a:noFill/>
         </p:spPr>
         <p:txBody>
-          <a:bodyPr wrap="square" lIns="25400" tIns="25400" rIns="25400" bIns="25400" anchor="t">
+          <a:bodyPr wrap="square" lIns="25400" rIns="25400" tIns="25400" bIns="25400" anchor="t">
             <a:spAutoFit/>
           </a:bodyPr>
           <a:lstStyle/>
@@ -8928,7 +8883,6 @@
           <a:lstStyle/>
           <a:p>
             <a:pPr algn="ctr"/>
-            <a:endParaRPr/>
           </a:p>
         </p:txBody>
       </p:sp>
@@ -8949,7 +8903,7 @@
           <a:noFill/>
         </p:spPr>
         <p:txBody>
-          <a:bodyPr wrap="square" lIns="25400" tIns="25400" rIns="25400" bIns="25400" anchor="ctr">
+          <a:bodyPr wrap="square" lIns="25400" rIns="25400" tIns="25400" bIns="25400" anchor="ctr">
             <a:spAutoFit/>
           </a:bodyPr>
           <a:lstStyle/>
@@ -9017,7 +8971,6 @@
           <a:lstStyle/>
           <a:p>
             <a:pPr algn="ctr"/>
-            <a:endParaRPr/>
           </a:p>
         </p:txBody>
       </p:sp>
@@ -9038,7 +8991,7 @@
           <a:noFill/>
         </p:spPr>
         <p:txBody>
-          <a:bodyPr wrap="square" lIns="25400" tIns="25400" rIns="25400" bIns="25400" anchor="ctr">
+          <a:bodyPr wrap="square" lIns="25400" rIns="25400" tIns="25400" bIns="25400" anchor="ctr">
             <a:spAutoFit/>
           </a:bodyPr>
           <a:lstStyle/>
@@ -9106,7 +9059,6 @@
           <a:lstStyle/>
           <a:p>
             <a:pPr algn="ctr"/>
-            <a:endParaRPr/>
           </a:p>
         </p:txBody>
       </p:sp>
@@ -9127,7 +9079,7 @@
           <a:noFill/>
         </p:spPr>
         <p:txBody>
-          <a:bodyPr wrap="square" lIns="25400" tIns="25400" rIns="25400" bIns="25400" anchor="ctr">
+          <a:bodyPr wrap="square" lIns="25400" rIns="25400" tIns="25400" bIns="25400" anchor="ctr">
             <a:spAutoFit/>
           </a:bodyPr>
           <a:lstStyle/>
@@ -9195,7 +9147,6 @@
           <a:lstStyle/>
           <a:p>
             <a:pPr algn="ctr"/>
-            <a:endParaRPr/>
           </a:p>
         </p:txBody>
       </p:sp>
@@ -9216,7 +9167,7 @@
           <a:noFill/>
         </p:spPr>
         <p:txBody>
-          <a:bodyPr wrap="square" lIns="25400" tIns="25400" rIns="25400" bIns="25400" anchor="ctr">
+          <a:bodyPr wrap="square" lIns="25400" rIns="25400" tIns="25400" bIns="25400" anchor="ctr">
             <a:spAutoFit/>
           </a:bodyPr>
           <a:lstStyle/>
@@ -9284,7 +9235,6 @@
           <a:lstStyle/>
           <a:p>
             <a:pPr algn="ctr"/>
-            <a:endParaRPr/>
           </a:p>
         </p:txBody>
       </p:sp>
@@ -9305,7 +9255,7 @@
           <a:noFill/>
         </p:spPr>
         <p:txBody>
-          <a:bodyPr wrap="square" lIns="25400" tIns="25400" rIns="25400" bIns="25400" anchor="ctr">
+          <a:bodyPr wrap="square" lIns="25400" rIns="25400" tIns="25400" bIns="25400" anchor="ctr">
             <a:spAutoFit/>
           </a:bodyPr>
           <a:lstStyle/>
@@ -9373,7 +9323,6 @@
           <a:lstStyle/>
           <a:p>
             <a:pPr algn="ctr"/>
-            <a:endParaRPr/>
           </a:p>
         </p:txBody>
       </p:sp>
@@ -9394,7 +9343,7 @@
           <a:noFill/>
         </p:spPr>
         <p:txBody>
-          <a:bodyPr wrap="square" lIns="25400" tIns="25400" rIns="25400" bIns="25400" anchor="ctr">
+          <a:bodyPr wrap="square" lIns="25400" rIns="25400" tIns="25400" bIns="25400" anchor="ctr">
             <a:spAutoFit/>
           </a:bodyPr>
           <a:lstStyle/>
@@ -9462,7 +9411,6 @@
           <a:lstStyle/>
           <a:p>
             <a:pPr algn="ctr"/>
-            <a:endParaRPr/>
           </a:p>
         </p:txBody>
       </p:sp>
@@ -9483,7 +9431,7 @@
           <a:noFill/>
         </p:spPr>
         <p:txBody>
-          <a:bodyPr wrap="square" lIns="25400" tIns="25400" rIns="25400" bIns="25400" anchor="ctr">
+          <a:bodyPr wrap="square" lIns="25400" rIns="25400" tIns="25400" bIns="25400" anchor="ctr">
             <a:spAutoFit/>
           </a:bodyPr>
           <a:lstStyle/>
@@ -9551,7 +9499,6 @@
           <a:lstStyle/>
           <a:p>
             <a:pPr algn="ctr"/>
-            <a:endParaRPr/>
           </a:p>
         </p:txBody>
       </p:sp>
@@ -9572,7 +9519,7 @@
           <a:noFill/>
         </p:spPr>
         <p:txBody>
-          <a:bodyPr wrap="square" lIns="25400" tIns="25400" rIns="25400" bIns="25400" anchor="ctr">
+          <a:bodyPr wrap="square" lIns="25400" rIns="25400" tIns="25400" bIns="25400" anchor="ctr">
             <a:spAutoFit/>
           </a:bodyPr>
           <a:lstStyle/>
@@ -9640,7 +9587,6 @@
           <a:lstStyle/>
           <a:p>
             <a:pPr algn="ctr"/>
-            <a:endParaRPr/>
           </a:p>
         </p:txBody>
       </p:sp>
@@ -9661,7 +9607,7 @@
           <a:noFill/>
         </p:spPr>
         <p:txBody>
-          <a:bodyPr wrap="square" lIns="25400" tIns="25400" rIns="25400" bIns="25400" anchor="ctr">
+          <a:bodyPr wrap="square" lIns="25400" rIns="25400" tIns="25400" bIns="25400" anchor="ctr">
             <a:spAutoFit/>
           </a:bodyPr>
           <a:lstStyle/>
@@ -9729,7 +9675,6 @@
           <a:lstStyle/>
           <a:p>
             <a:pPr algn="ctr"/>
-            <a:endParaRPr/>
           </a:p>
         </p:txBody>
       </p:sp>
@@ -9750,7 +9695,7 @@
           <a:noFill/>
         </p:spPr>
         <p:txBody>
-          <a:bodyPr wrap="square" lIns="25400" tIns="25400" rIns="25400" bIns="25400" anchor="ctr">
+          <a:bodyPr wrap="square" lIns="25400" rIns="25400" tIns="25400" bIns="25400" anchor="ctr">
             <a:spAutoFit/>
           </a:bodyPr>
           <a:lstStyle/>
@@ -9818,7 +9763,6 @@
           <a:lstStyle/>
           <a:p>
             <a:pPr algn="ctr"/>
-            <a:endParaRPr/>
           </a:p>
         </p:txBody>
       </p:sp>
@@ -9839,7 +9783,7 @@
           <a:noFill/>
         </p:spPr>
         <p:txBody>
-          <a:bodyPr wrap="square" lIns="25400" tIns="25400" rIns="25400" bIns="25400" anchor="ctr">
+          <a:bodyPr wrap="square" lIns="25400" rIns="25400" tIns="25400" bIns="25400" anchor="ctr">
             <a:spAutoFit/>
           </a:bodyPr>
           <a:lstStyle/>
@@ -9907,7 +9851,6 @@
           <a:lstStyle/>
           <a:p>
             <a:pPr algn="ctr"/>
-            <a:endParaRPr/>
           </a:p>
         </p:txBody>
       </p:sp>
@@ -9928,7 +9871,7 @@
           <a:noFill/>
         </p:spPr>
         <p:txBody>
-          <a:bodyPr wrap="square" lIns="25400" tIns="25400" rIns="25400" bIns="25400" anchor="ctr">
+          <a:bodyPr wrap="square" lIns="25400" rIns="25400" tIns="25400" bIns="25400" anchor="ctr">
             <a:spAutoFit/>
           </a:bodyPr>
           <a:lstStyle/>
@@ -9996,7 +9939,6 @@
           <a:lstStyle/>
           <a:p>
             <a:pPr algn="ctr"/>
-            <a:endParaRPr/>
           </a:p>
         </p:txBody>
       </p:sp>
@@ -10017,7 +9959,7 @@
           <a:noFill/>
         </p:spPr>
         <p:txBody>
-          <a:bodyPr wrap="square" lIns="25400" tIns="25400" rIns="25400" bIns="25400" anchor="ctr">
+          <a:bodyPr wrap="square" lIns="25400" rIns="25400" tIns="25400" bIns="25400" anchor="ctr">
             <a:spAutoFit/>
           </a:bodyPr>
           <a:lstStyle/>
@@ -10085,7 +10027,6 @@
           <a:lstStyle/>
           <a:p>
             <a:pPr algn="ctr"/>
-            <a:endParaRPr/>
           </a:p>
         </p:txBody>
       </p:sp>
@@ -10106,7 +10047,7 @@
           <a:noFill/>
         </p:spPr>
         <p:txBody>
-          <a:bodyPr wrap="square" lIns="25400" tIns="25400" rIns="25400" bIns="25400" anchor="ctr">
+          <a:bodyPr wrap="square" lIns="25400" rIns="25400" tIns="25400" bIns="25400" anchor="ctr">
             <a:spAutoFit/>
           </a:bodyPr>
           <a:lstStyle/>
@@ -10174,7 +10115,6 @@
           <a:lstStyle/>
           <a:p>
             <a:pPr algn="ctr"/>
-            <a:endParaRPr/>
           </a:p>
         </p:txBody>
       </p:sp>
@@ -10195,7 +10135,7 @@
           <a:noFill/>
         </p:spPr>
         <p:txBody>
-          <a:bodyPr wrap="square" lIns="25400" tIns="25400" rIns="25400" bIns="25400" anchor="ctr">
+          <a:bodyPr wrap="square" lIns="25400" rIns="25400" tIns="25400" bIns="25400" anchor="ctr">
             <a:spAutoFit/>
           </a:bodyPr>
           <a:lstStyle/>
@@ -10263,7 +10203,6 @@
           <a:lstStyle/>
           <a:p>
             <a:pPr algn="ctr"/>
-            <a:endParaRPr/>
           </a:p>
         </p:txBody>
       </p:sp>
@@ -10284,7 +10223,7 @@
           <a:noFill/>
         </p:spPr>
         <p:txBody>
-          <a:bodyPr wrap="square" lIns="25400" tIns="25400" rIns="25400" bIns="25400" anchor="ctr">
+          <a:bodyPr wrap="square" lIns="25400" rIns="25400" tIns="25400" bIns="25400" anchor="ctr">
             <a:spAutoFit/>
           </a:bodyPr>
           <a:lstStyle/>
@@ -10352,7 +10291,6 @@
           <a:lstStyle/>
           <a:p>
             <a:pPr algn="ctr"/>
-            <a:endParaRPr/>
           </a:p>
         </p:txBody>
       </p:sp>
@@ -10373,7 +10311,7 @@
           <a:noFill/>
         </p:spPr>
         <p:txBody>
-          <a:bodyPr wrap="square" lIns="25400" tIns="25400" rIns="25400" bIns="25400" anchor="ctr">
+          <a:bodyPr wrap="square" lIns="25400" rIns="25400" tIns="25400" bIns="25400" anchor="ctr">
             <a:spAutoFit/>
           </a:bodyPr>
           <a:lstStyle/>
@@ -10441,7 +10379,6 @@
           <a:lstStyle/>
           <a:p>
             <a:pPr algn="ctr"/>
-            <a:endParaRPr/>
           </a:p>
         </p:txBody>
       </p:sp>
@@ -10462,7 +10399,7 @@
           <a:noFill/>
         </p:spPr>
         <p:txBody>
-          <a:bodyPr wrap="square" lIns="25400" tIns="25400" rIns="25400" bIns="25400" anchor="ctr">
+          <a:bodyPr wrap="square" lIns="25400" rIns="25400" tIns="25400" bIns="25400" anchor="ctr">
             <a:spAutoFit/>
           </a:bodyPr>
           <a:lstStyle/>
@@ -10496,7 +10433,7 @@
 </file>
 
 <file path=ppt/slides/slide15.xml><?xml version="1.0" encoding="utf-8"?>
-<p:sld xmlns:a="http://schemas.openxmlformats.org/drawingml/2006/main" xmlns:r="http://schemas.openxmlformats.org/officeDocument/2006/relationships" xmlns:p="http://schemas.openxmlformats.org/presentationml/2006/main">
+<p:sld xmlns:a="http://schemas.openxmlformats.org/drawingml/2006/main" xmlns:p="http://schemas.openxmlformats.org/presentationml/2006/main" xmlns:r="http://schemas.openxmlformats.org/officeDocument/2006/relationships">
   <p:cSld>
     <p:spTree>
       <p:nvGrpSpPr>
@@ -10504,14 +10441,7 @@
         <p:cNvGrpSpPr/>
         <p:nvPr/>
       </p:nvGrpSpPr>
-      <p:grpSpPr>
-        <a:xfrm>
-          <a:off x="0" y="0"/>
-          <a:ext cx="0" cy="0"/>
-          <a:chOff x="0" y="0"/>
-          <a:chExt cx="0" cy="0"/>
-        </a:xfrm>
-      </p:grpSpPr>
+      <p:grpSpPr/>
       <p:sp>
         <p:nvSpPr>
           <p:cNvPr id="2" name="Rectangle 1"/>
@@ -10553,7 +10483,6 @@
           <a:lstStyle/>
           <a:p>
             <a:pPr algn="ctr"/>
-            <a:endParaRPr/>
           </a:p>
         </p:txBody>
       </p:sp>
@@ -10594,7 +10523,7 @@
           </a:fontRef>
         </p:style>
         <p:txBody>
-          <a:bodyPr wrap="none" lIns="0" tIns="0" rIns="0" bIns="0" rtlCol="0" anchor="ctr"/>
+          <a:bodyPr rtlCol="0" anchor="ctr" wrap="none" lIns="0" rIns="0" tIns="0" bIns="0"/>
           <a:lstStyle/>
           <a:p>
             <a:pPr algn="ctr"/>
@@ -10627,7 +10556,7 @@
           <a:noFill/>
         </p:spPr>
         <p:txBody>
-          <a:bodyPr wrap="square" lIns="25400" tIns="25400" rIns="25400" bIns="25400" anchor="t">
+          <a:bodyPr wrap="square" lIns="25400" rIns="25400" tIns="25400" bIns="25400" anchor="t">
             <a:spAutoFit/>
           </a:bodyPr>
           <a:lstStyle/>
@@ -10669,7 +10598,7 @@
           <a:noFill/>
         </p:spPr>
         <p:txBody>
-          <a:bodyPr wrap="square" lIns="25400" tIns="25400" rIns="25400" bIns="25400" anchor="t">
+          <a:bodyPr wrap="square" lIns="25400" rIns="25400" tIns="25400" bIns="25400" anchor="t">
             <a:spAutoFit/>
           </a:bodyPr>
           <a:lstStyle/>
@@ -10711,7 +10640,7 @@
           <a:noFill/>
         </p:spPr>
         <p:txBody>
-          <a:bodyPr wrap="square" lIns="25400" tIns="25400" rIns="25400" bIns="25400" anchor="t">
+          <a:bodyPr wrap="square" lIns="25400" rIns="25400" tIns="25400" bIns="25400" anchor="t">
             <a:spAutoFit/>
           </a:bodyPr>
           <a:lstStyle/>
@@ -10745,7 +10674,7 @@
 </file>
 
 <file path=ppt/slides/slide2.xml><?xml version="1.0" encoding="utf-8"?>
-<p:sld xmlns:a="http://schemas.openxmlformats.org/drawingml/2006/main" xmlns:r="http://schemas.openxmlformats.org/officeDocument/2006/relationships" xmlns:p="http://schemas.openxmlformats.org/presentationml/2006/main">
+<p:sld xmlns:a="http://schemas.openxmlformats.org/drawingml/2006/main" xmlns:p="http://schemas.openxmlformats.org/presentationml/2006/main" xmlns:r="http://schemas.openxmlformats.org/officeDocument/2006/relationships">
   <p:cSld>
     <p:spTree>
       <p:nvGrpSpPr>
@@ -10753,14 +10682,7 @@
         <p:cNvGrpSpPr/>
         <p:nvPr/>
       </p:nvGrpSpPr>
-      <p:grpSpPr>
-        <a:xfrm>
-          <a:off x="0" y="0"/>
-          <a:ext cx="0" cy="0"/>
-          <a:chOff x="0" y="0"/>
-          <a:chExt cx="0" cy="0"/>
-        </a:xfrm>
-      </p:grpSpPr>
+      <p:grpSpPr/>
       <p:sp>
         <p:nvSpPr>
           <p:cNvPr id="2" name="Rectangle 1"/>
@@ -10802,7 +10724,6 @@
           <a:lstStyle/>
           <a:p>
             <a:pPr algn="ctr"/>
-            <a:endParaRPr/>
           </a:p>
         </p:txBody>
       </p:sp>
@@ -10823,7 +10744,7 @@
           <a:noFill/>
         </p:spPr>
         <p:txBody>
-          <a:bodyPr wrap="square" lIns="25400" tIns="25400" rIns="25400" bIns="25400" anchor="t">
+          <a:bodyPr wrap="square" lIns="25400" rIns="25400" tIns="25400" bIns="25400" anchor="t">
             <a:spAutoFit/>
           </a:bodyPr>
           <a:lstStyle/>
@@ -10865,7 +10786,7 @@
           <a:noFill/>
         </p:spPr>
         <p:txBody>
-          <a:bodyPr wrap="square" lIns="25400" tIns="25400" rIns="25400" bIns="25400" anchor="t">
+          <a:bodyPr wrap="square" lIns="25400" rIns="25400" tIns="25400" bIns="25400" anchor="t">
             <a:spAutoFit/>
           </a:bodyPr>
           <a:lstStyle/>
@@ -10907,7 +10828,7 @@
           <a:noFill/>
         </p:spPr>
         <p:txBody>
-          <a:bodyPr wrap="square" lIns="25400" tIns="25400" rIns="25400" bIns="25400" anchor="t">
+          <a:bodyPr wrap="square" lIns="25400" rIns="25400" tIns="25400" bIns="25400" anchor="t">
             <a:spAutoFit/>
           </a:bodyPr>
           <a:lstStyle/>
@@ -10975,7 +10896,6 @@
           <a:lstStyle/>
           <a:p>
             <a:pPr algn="ctr"/>
-            <a:endParaRPr/>
           </a:p>
         </p:txBody>
       </p:sp>
@@ -11016,7 +10936,7 @@
           </a:fontRef>
         </p:style>
         <p:txBody>
-          <a:bodyPr wrap="none" lIns="0" tIns="0" rIns="0" bIns="0" rtlCol="0" anchor="ctr"/>
+          <a:bodyPr rtlCol="0" anchor="ctr" wrap="none" lIns="0" rIns="0" tIns="0" bIns="0"/>
           <a:lstStyle/>
           <a:p>
             <a:pPr algn="ctr"/>
@@ -11049,7 +10969,7 @@
           <a:noFill/>
         </p:spPr>
         <p:txBody>
-          <a:bodyPr wrap="square" lIns="25400" tIns="25400" rIns="25400" bIns="25400" anchor="ctr">
+          <a:bodyPr wrap="square" lIns="25400" rIns="25400" tIns="25400" bIns="25400" anchor="ctr">
             <a:spAutoFit/>
           </a:bodyPr>
           <a:lstStyle/>
@@ -11091,7 +11011,7 @@
           <a:noFill/>
         </p:spPr>
         <p:txBody>
-          <a:bodyPr wrap="square" lIns="25400" tIns="25400" rIns="25400" bIns="25400" anchor="t">
+          <a:bodyPr wrap="square" lIns="25400" rIns="25400" tIns="25400" bIns="25400" anchor="t">
             <a:spAutoFit/>
           </a:bodyPr>
           <a:lstStyle/>
@@ -11216,7 +11136,6 @@
           <a:lstStyle/>
           <a:p>
             <a:pPr algn="ctr"/>
-            <a:endParaRPr/>
           </a:p>
         </p:txBody>
       </p:sp>
@@ -11257,7 +11176,7 @@
           </a:fontRef>
         </p:style>
         <p:txBody>
-          <a:bodyPr wrap="none" lIns="0" tIns="0" rIns="0" bIns="0" rtlCol="0" anchor="ctr"/>
+          <a:bodyPr rtlCol="0" anchor="ctr" wrap="none" lIns="0" rIns="0" tIns="0" bIns="0"/>
           <a:lstStyle/>
           <a:p>
             <a:pPr algn="ctr"/>
@@ -11290,7 +11209,7 @@
           <a:noFill/>
         </p:spPr>
         <p:txBody>
-          <a:bodyPr wrap="square" lIns="25400" tIns="25400" rIns="25400" bIns="25400" anchor="ctr">
+          <a:bodyPr wrap="square" lIns="25400" rIns="25400" tIns="25400" bIns="25400" anchor="ctr">
             <a:spAutoFit/>
           </a:bodyPr>
           <a:lstStyle/>
@@ -11332,7 +11251,7 @@
           <a:noFill/>
         </p:spPr>
         <p:txBody>
-          <a:bodyPr wrap="square" lIns="25400" tIns="25400" rIns="25400" bIns="25400" anchor="t">
+          <a:bodyPr wrap="square" lIns="25400" rIns="25400" tIns="25400" bIns="25400" anchor="t">
             <a:spAutoFit/>
           </a:bodyPr>
           <a:lstStyle/>
@@ -11457,7 +11376,6 @@
           <a:lstStyle/>
           <a:p>
             <a:pPr algn="ctr"/>
-            <a:endParaRPr/>
           </a:p>
         </p:txBody>
       </p:sp>
@@ -11498,7 +11416,7 @@
           </a:fontRef>
         </p:style>
         <p:txBody>
-          <a:bodyPr wrap="none" lIns="0" tIns="0" rIns="0" bIns="0" rtlCol="0" anchor="ctr"/>
+          <a:bodyPr rtlCol="0" anchor="ctr" wrap="none" lIns="0" rIns="0" tIns="0" bIns="0"/>
           <a:lstStyle/>
           <a:p>
             <a:pPr algn="ctr"/>
@@ -11531,7 +11449,7 @@
           <a:noFill/>
         </p:spPr>
         <p:txBody>
-          <a:bodyPr wrap="square" lIns="25400" tIns="25400" rIns="25400" bIns="25400" anchor="ctr">
+          <a:bodyPr wrap="square" lIns="25400" rIns="25400" tIns="25400" bIns="25400" anchor="ctr">
             <a:spAutoFit/>
           </a:bodyPr>
           <a:lstStyle/>
@@ -11573,7 +11491,7 @@
           <a:noFill/>
         </p:spPr>
         <p:txBody>
-          <a:bodyPr wrap="square" lIns="25400" tIns="25400" rIns="25400" bIns="25400" anchor="t">
+          <a:bodyPr wrap="square" lIns="25400" rIns="25400" tIns="25400" bIns="25400" anchor="t">
             <a:spAutoFit/>
           </a:bodyPr>
           <a:lstStyle/>
@@ -11664,7 +11582,7 @@
 </file>
 
 <file path=ppt/slides/slide3.xml><?xml version="1.0" encoding="utf-8"?>
-<p:sld xmlns:a="http://schemas.openxmlformats.org/drawingml/2006/main" xmlns:r="http://schemas.openxmlformats.org/officeDocument/2006/relationships" xmlns:p="http://schemas.openxmlformats.org/presentationml/2006/main">
+<p:sld xmlns:a="http://schemas.openxmlformats.org/drawingml/2006/main" xmlns:p="http://schemas.openxmlformats.org/presentationml/2006/main" xmlns:r="http://schemas.openxmlformats.org/officeDocument/2006/relationships">
   <p:cSld>
     <p:spTree>
       <p:nvGrpSpPr>
@@ -11672,14 +11590,7 @@
         <p:cNvGrpSpPr/>
         <p:nvPr/>
       </p:nvGrpSpPr>
-      <p:grpSpPr>
-        <a:xfrm>
-          <a:off x="0" y="0"/>
-          <a:ext cx="0" cy="0"/>
-          <a:chOff x="0" y="0"/>
-          <a:chExt cx="0" cy="0"/>
-        </a:xfrm>
-      </p:grpSpPr>
+      <p:grpSpPr/>
       <p:sp>
         <p:nvSpPr>
           <p:cNvPr id="2" name="Rectangle 1"/>
@@ -11721,7 +11632,6 @@
           <a:lstStyle/>
           <a:p>
             <a:pPr algn="ctr"/>
-            <a:endParaRPr/>
           </a:p>
         </p:txBody>
       </p:sp>
@@ -11742,7 +11652,7 @@
           <a:noFill/>
         </p:spPr>
         <p:txBody>
-          <a:bodyPr wrap="square" lIns="25400" tIns="25400" rIns="25400" bIns="25400" anchor="t">
+          <a:bodyPr wrap="square" lIns="25400" rIns="25400" tIns="25400" bIns="25400" anchor="t">
             <a:spAutoFit/>
           </a:bodyPr>
           <a:lstStyle/>
@@ -11784,7 +11694,7 @@
           <a:noFill/>
         </p:spPr>
         <p:txBody>
-          <a:bodyPr wrap="square" lIns="25400" tIns="25400" rIns="25400" bIns="25400" anchor="t">
+          <a:bodyPr wrap="square" lIns="25400" rIns="25400" tIns="25400" bIns="25400" anchor="t">
             <a:spAutoFit/>
           </a:bodyPr>
           <a:lstStyle/>
@@ -11846,7 +11756,7 @@
           </a:fontRef>
         </p:style>
         <p:txBody>
-          <a:bodyPr wrap="none" lIns="0" tIns="0" rIns="0" bIns="0" rtlCol="0" anchor="ctr"/>
+          <a:bodyPr rtlCol="0" anchor="ctr" wrap="none" lIns="0" rIns="0" tIns="0" bIns="0"/>
           <a:lstStyle/>
           <a:p>
             <a:pPr algn="ctr"/>
@@ -11905,7 +11815,6 @@
           <a:lstStyle/>
           <a:p>
             <a:pPr algn="ctr"/>
-            <a:endParaRPr/>
           </a:p>
         </p:txBody>
       </p:sp>
@@ -11917,8 +11826,8 @@
         </p:nvSpPr>
         <p:spPr>
           <a:xfrm>
-            <a:off x="1508760" y="1891301"/>
-            <a:ext cx="9966960" cy="259045"/>
+            <a:off x="1508760" y="1691640"/>
+            <a:ext cx="9966960" cy="658368"/>
           </a:xfrm>
           <a:prstGeom prst="rect">
             <a:avLst/>
@@ -11926,195 +11835,28 @@
           <a:noFill/>
         </p:spPr>
         <p:txBody>
-          <a:bodyPr wrap="square" lIns="25400" tIns="25400" rIns="25400" bIns="25400" anchor="ctr">
+          <a:bodyPr wrap="square" lIns="25400" rIns="25400" tIns="25400" bIns="25400" anchor="ctr">
             <a:spAutoFit/>
           </a:bodyPr>
           <a:lstStyle/>
           <a:p>
-            <a:r>
-              <a:rPr sz="1350" b="0" i="0" dirty="0" err="1">
+            <a:pPr algn="l">
+              <a:lnSpc>
+                <a:spcPct val="100000"/>
+              </a:lnSpc>
+              <a:spcAft>
+                <a:spcPts val="0"/>
+              </a:spcAft>
+            </a:pPr>
+            <a:r>
+              <a:rPr sz="1350" b="0" i="0">
                 <a:solidFill>
                   <a:srgbClr val="222A3A"/>
                 </a:solidFill>
                 <a:latin typeface="Calibri"/>
               </a:rPr>
-              <a:t>Mở</a:t>
-            </a:r>
-            <a:r>
-              <a:rPr sz="1350" b="0" i="0" dirty="0">
-                <a:solidFill>
-                  <a:srgbClr val="222A3A"/>
-                </a:solidFill>
-                <a:latin typeface="Calibri"/>
-              </a:rPr>
-              <a:t> </a:t>
-            </a:r>
-            <a:r>
-              <a:rPr lang="en-US" sz="1350" dirty="0">
-                <a:solidFill>
-                  <a:srgbClr val="222A3A"/>
-                </a:solidFill>
-              </a:rPr>
-              <a:t>http://</a:t>
-            </a:r>
-            <a:r>
-              <a:rPr lang="en-US" sz="1350" dirty="0" err="1">
-                <a:solidFill>
-                  <a:srgbClr val="222A3A"/>
-                </a:solidFill>
-              </a:rPr>
-              <a:t>mes.biahalong.com</a:t>
-            </a:r>
-            <a:r>
-              <a:rPr sz="1350" b="0" i="0" dirty="0">
-                <a:solidFill>
-                  <a:srgbClr val="222A3A"/>
-                </a:solidFill>
-                <a:latin typeface="Calibri"/>
-              </a:rPr>
-              <a:t>→ </a:t>
-            </a:r>
-            <a:r>
-              <a:rPr sz="1350" b="0" i="0" dirty="0" err="1">
-                <a:solidFill>
-                  <a:srgbClr val="222A3A"/>
-                </a:solidFill>
-                <a:latin typeface="Calibri"/>
-              </a:rPr>
-              <a:t>nhập</a:t>
-            </a:r>
-            <a:r>
-              <a:rPr sz="1350" b="0" i="0" dirty="0">
-                <a:solidFill>
-                  <a:srgbClr val="222A3A"/>
-                </a:solidFill>
-                <a:latin typeface="Calibri"/>
-              </a:rPr>
-              <a:t> </a:t>
-            </a:r>
-            <a:r>
-              <a:rPr sz="1350" b="0" i="0" dirty="0" err="1">
-                <a:solidFill>
-                  <a:srgbClr val="222A3A"/>
-                </a:solidFill>
-                <a:latin typeface="Calibri"/>
-              </a:rPr>
-              <a:t>tên</a:t>
-            </a:r>
-            <a:r>
-              <a:rPr sz="1350" b="0" i="0" dirty="0">
-                <a:solidFill>
-                  <a:srgbClr val="222A3A"/>
-                </a:solidFill>
-                <a:latin typeface="Calibri"/>
-              </a:rPr>
-              <a:t> </a:t>
-            </a:r>
-            <a:r>
-              <a:rPr sz="1350" b="0" i="0" dirty="0" err="1">
-                <a:solidFill>
-                  <a:srgbClr val="222A3A"/>
-                </a:solidFill>
-                <a:latin typeface="Calibri"/>
-              </a:rPr>
-              <a:t>đăng</a:t>
-            </a:r>
-            <a:r>
-              <a:rPr sz="1350" b="0" i="0" dirty="0">
-                <a:solidFill>
-                  <a:srgbClr val="222A3A"/>
-                </a:solidFill>
-                <a:latin typeface="Calibri"/>
-              </a:rPr>
-              <a:t> </a:t>
-            </a:r>
-            <a:r>
-              <a:rPr sz="1350" b="0" i="0" dirty="0" err="1">
-                <a:solidFill>
-                  <a:srgbClr val="222A3A"/>
-                </a:solidFill>
-                <a:latin typeface="Calibri"/>
-              </a:rPr>
-              <a:t>nhập</a:t>
-            </a:r>
-            <a:r>
-              <a:rPr sz="1350" b="0" i="0" dirty="0">
-                <a:solidFill>
-                  <a:srgbClr val="222A3A"/>
-                </a:solidFill>
-                <a:latin typeface="Calibri"/>
-              </a:rPr>
-              <a:t> &amp; </a:t>
-            </a:r>
-            <a:r>
-              <a:rPr sz="1350" b="0" i="0" dirty="0" err="1">
-                <a:solidFill>
-                  <a:srgbClr val="222A3A"/>
-                </a:solidFill>
-                <a:latin typeface="Calibri"/>
-              </a:rPr>
-              <a:t>mật</a:t>
-            </a:r>
-            <a:r>
-              <a:rPr sz="1350" b="0" i="0" dirty="0">
-                <a:solidFill>
-                  <a:srgbClr val="222A3A"/>
-                </a:solidFill>
-                <a:latin typeface="Calibri"/>
-              </a:rPr>
-              <a:t> </a:t>
-            </a:r>
-            <a:r>
-              <a:rPr sz="1350" b="0" i="0" dirty="0" err="1">
-                <a:solidFill>
-                  <a:srgbClr val="222A3A"/>
-                </a:solidFill>
-                <a:latin typeface="Calibri"/>
-              </a:rPr>
-              <a:t>khẩu</a:t>
-            </a:r>
-            <a:r>
-              <a:rPr sz="1350" b="0" i="0" dirty="0">
-                <a:solidFill>
-                  <a:srgbClr val="222A3A"/>
-                </a:solidFill>
-                <a:latin typeface="Calibri"/>
-              </a:rPr>
-              <a:t> → </a:t>
-            </a:r>
-            <a:r>
-              <a:rPr sz="1350" b="0" i="0" dirty="0" err="1">
-                <a:solidFill>
-                  <a:srgbClr val="222A3A"/>
-                </a:solidFill>
-                <a:latin typeface="Calibri"/>
-              </a:rPr>
-              <a:t>Đăng</a:t>
-            </a:r>
-            <a:r>
-              <a:rPr sz="1350" b="0" i="0" dirty="0">
-                <a:solidFill>
-                  <a:srgbClr val="222A3A"/>
-                </a:solidFill>
-                <a:latin typeface="Calibri"/>
-              </a:rPr>
-              <a:t> </a:t>
-            </a:r>
-            <a:r>
-              <a:rPr sz="1350" b="0" i="0" dirty="0" err="1">
-                <a:solidFill>
-                  <a:srgbClr val="222A3A"/>
-                </a:solidFill>
-                <a:latin typeface="Calibri"/>
-              </a:rPr>
-              <a:t>nhập</a:t>
-            </a:r>
-            <a:endParaRPr sz="1350" b="0" i="0" dirty="0">
-              <a:solidFill>
-                <a:srgbClr val="222A3A"/>
-              </a:solidFill>
-              <a:latin typeface="Calibri"/>
-            </a:endParaRPr>
+              <a:t>Mở http://localhost:8077/ → nhập tên đăng nhập &amp; mật khẩu → Đăng nhập</a:t>
+            </a:r>
           </a:p>
         </p:txBody>
       </p:sp>
@@ -12155,7 +11897,7 @@
           </a:fontRef>
         </p:style>
         <p:txBody>
-          <a:bodyPr wrap="none" lIns="0" tIns="0" rIns="0" bIns="0" rtlCol="0" anchor="ctr"/>
+          <a:bodyPr rtlCol="0" anchor="ctr" wrap="none" lIns="0" rIns="0" tIns="0" bIns="0"/>
           <a:lstStyle/>
           <a:p>
             <a:pPr algn="ctr"/>
@@ -12214,7 +11956,6 @@
           <a:lstStyle/>
           <a:p>
             <a:pPr algn="ctr"/>
-            <a:endParaRPr/>
           </a:p>
         </p:txBody>
       </p:sp>
@@ -12235,7 +11976,7 @@
           <a:noFill/>
         </p:spPr>
         <p:txBody>
-          <a:bodyPr wrap="square" lIns="25400" tIns="25400" rIns="25400" bIns="25400" anchor="ctr">
+          <a:bodyPr wrap="square" lIns="25400" rIns="25400" tIns="25400" bIns="25400" anchor="ctr">
             <a:spAutoFit/>
           </a:bodyPr>
           <a:lstStyle/>
@@ -12297,7 +12038,7 @@
           </a:fontRef>
         </p:style>
         <p:txBody>
-          <a:bodyPr wrap="none" lIns="0" tIns="0" rIns="0" bIns="0" rtlCol="0" anchor="ctr"/>
+          <a:bodyPr rtlCol="0" anchor="ctr" wrap="none" lIns="0" rIns="0" tIns="0" bIns="0"/>
           <a:lstStyle/>
           <a:p>
             <a:pPr algn="ctr"/>
@@ -12356,7 +12097,6 @@
           <a:lstStyle/>
           <a:p>
             <a:pPr algn="ctr"/>
-            <a:endParaRPr/>
           </a:p>
         </p:txBody>
       </p:sp>
@@ -12377,7 +12117,7 @@
           <a:noFill/>
         </p:spPr>
         <p:txBody>
-          <a:bodyPr wrap="square" lIns="25400" tIns="25400" rIns="25400" bIns="25400" anchor="ctr">
+          <a:bodyPr wrap="square" lIns="25400" rIns="25400" tIns="25400" bIns="25400" anchor="ctr">
             <a:spAutoFit/>
           </a:bodyPr>
           <a:lstStyle/>
@@ -12439,7 +12179,7 @@
           </a:fontRef>
         </p:style>
         <p:txBody>
-          <a:bodyPr wrap="none" lIns="0" tIns="0" rIns="0" bIns="0" rtlCol="0" anchor="ctr"/>
+          <a:bodyPr rtlCol="0" anchor="ctr" wrap="none" lIns="0" rIns="0" tIns="0" bIns="0"/>
           <a:lstStyle/>
           <a:p>
             <a:pPr algn="ctr"/>
@@ -12498,7 +12238,6 @@
           <a:lstStyle/>
           <a:p>
             <a:pPr algn="ctr"/>
-            <a:endParaRPr/>
           </a:p>
         </p:txBody>
       </p:sp>
@@ -12519,7 +12258,7 @@
           <a:noFill/>
         </p:spPr>
         <p:txBody>
-          <a:bodyPr wrap="square" lIns="25400" tIns="25400" rIns="25400" bIns="25400" anchor="ctr">
+          <a:bodyPr wrap="square" lIns="25400" rIns="25400" tIns="25400" bIns="25400" anchor="ctr">
             <a:spAutoFit/>
           </a:bodyPr>
           <a:lstStyle/>
@@ -12561,7 +12300,7 @@
           <a:noFill/>
         </p:spPr>
         <p:txBody>
-          <a:bodyPr wrap="square" lIns="25400" tIns="25400" rIns="25400" bIns="25400" anchor="t">
+          <a:bodyPr wrap="square" lIns="25400" rIns="25400" tIns="25400" bIns="25400" anchor="t">
             <a:spAutoFit/>
           </a:bodyPr>
           <a:lstStyle/>
@@ -12595,7 +12334,7 @@
 </file>
 
 <file path=ppt/slides/slide4.xml><?xml version="1.0" encoding="utf-8"?>
-<p:sld xmlns:a="http://schemas.openxmlformats.org/drawingml/2006/main" xmlns:r="http://schemas.openxmlformats.org/officeDocument/2006/relationships" xmlns:p="http://schemas.openxmlformats.org/presentationml/2006/main">
+<p:sld xmlns:a="http://schemas.openxmlformats.org/drawingml/2006/main" xmlns:p="http://schemas.openxmlformats.org/presentationml/2006/main" xmlns:r="http://schemas.openxmlformats.org/officeDocument/2006/relationships">
   <p:cSld>
     <p:spTree>
       <p:nvGrpSpPr>
@@ -12603,14 +12342,7 @@
         <p:cNvGrpSpPr/>
         <p:nvPr/>
       </p:nvGrpSpPr>
-      <p:grpSpPr>
-        <a:xfrm>
-          <a:off x="0" y="0"/>
-          <a:ext cx="0" cy="0"/>
-          <a:chOff x="0" y="0"/>
-          <a:chExt cx="0" cy="0"/>
-        </a:xfrm>
-      </p:grpSpPr>
+      <p:grpSpPr/>
       <p:sp>
         <p:nvSpPr>
           <p:cNvPr id="2" name="Rectangle 1"/>
@@ -12652,7 +12384,6 @@
           <a:lstStyle/>
           <a:p>
             <a:pPr algn="ctr"/>
-            <a:endParaRPr/>
           </a:p>
         </p:txBody>
       </p:sp>
@@ -12673,7 +12404,7 @@
           <a:noFill/>
         </p:spPr>
         <p:txBody>
-          <a:bodyPr wrap="square" lIns="25400" tIns="25400" rIns="25400" bIns="25400" anchor="t">
+          <a:bodyPr wrap="square" lIns="25400" rIns="25400" tIns="25400" bIns="25400" anchor="t">
             <a:spAutoFit/>
           </a:bodyPr>
           <a:lstStyle/>
@@ -12715,7 +12446,7 @@
           <a:noFill/>
         </p:spPr>
         <p:txBody>
-          <a:bodyPr wrap="square" lIns="25400" tIns="25400" rIns="25400" bIns="25400" anchor="t">
+          <a:bodyPr wrap="square" lIns="25400" rIns="25400" tIns="25400" bIns="25400" anchor="t">
             <a:spAutoFit/>
           </a:bodyPr>
           <a:lstStyle/>
@@ -12735,7 +12466,7 @@
                 </a:solidFill>
                 <a:latin typeface="Cambria"/>
               </a:rPr>
-              <a:t>10 tài khoản demo</a:t>
+              <a:t>11 tài khoản demo</a:t>
             </a:r>
           </a:p>
         </p:txBody>
@@ -12783,7 +12514,6 @@
           <a:lstStyle/>
           <a:p>
             <a:pPr algn="ctr"/>
-            <a:endParaRPr/>
           </a:p>
         </p:txBody>
       </p:sp>
@@ -12804,7 +12534,7 @@
           <a:noFill/>
         </p:spPr>
         <p:txBody>
-          <a:bodyPr wrap="square" lIns="25400" tIns="25400" rIns="25400" bIns="25400" anchor="ctr">
+          <a:bodyPr wrap="square" lIns="25400" rIns="25400" tIns="25400" bIns="25400" anchor="ctr">
             <a:spAutoFit/>
           </a:bodyPr>
           <a:lstStyle/>
@@ -12872,7 +12602,6 @@
           <a:lstStyle/>
           <a:p>
             <a:pPr algn="ctr"/>
-            <a:endParaRPr/>
           </a:p>
         </p:txBody>
       </p:sp>
@@ -12893,7 +12622,7 @@
           <a:noFill/>
         </p:spPr>
         <p:txBody>
-          <a:bodyPr wrap="square" lIns="25400" tIns="25400" rIns="25400" bIns="25400" anchor="ctr">
+          <a:bodyPr wrap="square" lIns="25400" rIns="25400" tIns="25400" bIns="25400" anchor="ctr">
             <a:spAutoFit/>
           </a:bodyPr>
           <a:lstStyle/>
@@ -12961,7 +12690,6 @@
           <a:lstStyle/>
           <a:p>
             <a:pPr algn="ctr"/>
-            <a:endParaRPr/>
           </a:p>
         </p:txBody>
       </p:sp>
@@ -12982,7 +12710,7 @@
           <a:noFill/>
         </p:spPr>
         <p:txBody>
-          <a:bodyPr wrap="square" lIns="25400" tIns="25400" rIns="25400" bIns="25400" anchor="ctr">
+          <a:bodyPr wrap="square" lIns="25400" rIns="25400" tIns="25400" bIns="25400" anchor="ctr">
             <a:spAutoFit/>
           </a:bodyPr>
           <a:lstStyle/>
@@ -13016,7 +12744,7 @@
         <p:spPr>
           <a:xfrm>
             <a:off x="548640" y="1975104"/>
-            <a:ext cx="2304288" cy="315468"/>
+            <a:ext cx="2304288" cy="292608"/>
           </a:xfrm>
           <a:prstGeom prst="rect">
             <a:avLst/>
@@ -13050,7 +12778,6 @@
           <a:lstStyle/>
           <a:p>
             <a:pPr algn="ctr"/>
-            <a:endParaRPr/>
           </a:p>
         </p:txBody>
       </p:sp>
@@ -13063,7 +12790,7 @@
         <p:spPr>
           <a:xfrm>
             <a:off x="621792" y="1975104"/>
-            <a:ext cx="2176272" cy="315468"/>
+            <a:ext cx="2176272" cy="292608"/>
           </a:xfrm>
           <a:prstGeom prst="rect">
             <a:avLst/>
@@ -13071,7 +12798,7 @@
           <a:noFill/>
         </p:spPr>
         <p:txBody>
-          <a:bodyPr wrap="square" lIns="25400" tIns="25400" rIns="25400" bIns="25400" anchor="ctr">
+          <a:bodyPr wrap="square" lIns="25400" rIns="25400" tIns="25400" bIns="25400" anchor="ctr">
             <a:spAutoFit/>
           </a:bodyPr>
           <a:lstStyle/>
@@ -13085,7 +12812,7 @@
               </a:spcAft>
             </a:pPr>
             <a:r>
-              <a:rPr sz="1100" b="0" i="0">
+              <a:rPr sz="1050" b="0" i="0">
                 <a:solidFill>
                   <a:srgbClr val="222A3A"/>
                 </a:solidFill>
@@ -13105,7 +12832,7 @@
         <p:spPr>
           <a:xfrm>
             <a:off x="2852928" y="1975104"/>
-            <a:ext cx="3785616" cy="315468"/>
+            <a:ext cx="3785616" cy="292608"/>
           </a:xfrm>
           <a:prstGeom prst="rect">
             <a:avLst/>
@@ -13139,7 +12866,6 @@
           <a:lstStyle/>
           <a:p>
             <a:pPr algn="ctr"/>
-            <a:endParaRPr/>
           </a:p>
         </p:txBody>
       </p:sp>
@@ -13152,7 +12878,7 @@
         <p:spPr>
           <a:xfrm>
             <a:off x="2926080" y="1975104"/>
-            <a:ext cx="3657600" cy="315468"/>
+            <a:ext cx="3657600" cy="292608"/>
           </a:xfrm>
           <a:prstGeom prst="rect">
             <a:avLst/>
@@ -13160,7 +12886,7 @@
           <a:noFill/>
         </p:spPr>
         <p:txBody>
-          <a:bodyPr wrap="square" lIns="25400" tIns="25400" rIns="25400" bIns="25400" anchor="ctr">
+          <a:bodyPr wrap="square" lIns="25400" rIns="25400" tIns="25400" bIns="25400" anchor="ctr">
             <a:spAutoFit/>
           </a:bodyPr>
           <a:lstStyle/>
@@ -13174,7 +12900,7 @@
               </a:spcAft>
             </a:pPr>
             <a:r>
-              <a:rPr sz="1100" b="0" i="0">
+              <a:rPr sz="1050" b="0" i="0">
                 <a:solidFill>
                   <a:srgbClr val="222A3A"/>
                 </a:solidFill>
@@ -13194,7 +12920,7 @@
         <p:spPr>
           <a:xfrm>
             <a:off x="6638544" y="1975104"/>
-            <a:ext cx="2139696" cy="315468"/>
+            <a:ext cx="2139696" cy="292608"/>
           </a:xfrm>
           <a:prstGeom prst="rect">
             <a:avLst/>
@@ -13228,7 +12954,6 @@
           <a:lstStyle/>
           <a:p>
             <a:pPr algn="ctr"/>
-            <a:endParaRPr/>
           </a:p>
         </p:txBody>
       </p:sp>
@@ -13241,7 +12966,7 @@
         <p:spPr>
           <a:xfrm>
             <a:off x="6711696" y="1975104"/>
-            <a:ext cx="2011679" cy="315468"/>
+            <a:ext cx="2011679" cy="292608"/>
           </a:xfrm>
           <a:prstGeom prst="rect">
             <a:avLst/>
@@ -13249,7 +12974,7 @@
           <a:noFill/>
         </p:spPr>
         <p:txBody>
-          <a:bodyPr wrap="square" lIns="25400" tIns="25400" rIns="25400" bIns="25400" anchor="ctr">
+          <a:bodyPr wrap="square" lIns="25400" rIns="25400" tIns="25400" bIns="25400" anchor="ctr">
             <a:spAutoFit/>
           </a:bodyPr>
           <a:lstStyle/>
@@ -13263,7 +12988,7 @@
               </a:spcAft>
             </a:pPr>
             <a:r>
-              <a:rPr sz="1100" b="0" i="0">
+              <a:rPr sz="1050" b="0" i="0">
                 <a:solidFill>
                   <a:srgbClr val="222A3A"/>
                 </a:solidFill>
@@ -13282,8 +13007,8 @@
         </p:nvSpPr>
         <p:spPr>
           <a:xfrm>
-            <a:off x="548640" y="2290572"/>
-            <a:ext cx="2304288" cy="315468"/>
+            <a:off x="548640" y="2267712"/>
+            <a:ext cx="2304288" cy="292608"/>
           </a:xfrm>
           <a:prstGeom prst="rect">
             <a:avLst/>
@@ -13317,7 +13042,6 @@
           <a:lstStyle/>
           <a:p>
             <a:pPr algn="ctr"/>
-            <a:endParaRPr/>
           </a:p>
         </p:txBody>
       </p:sp>
@@ -13329,8 +13053,8 @@
         </p:nvSpPr>
         <p:spPr>
           <a:xfrm>
-            <a:off x="621792" y="2290572"/>
-            <a:ext cx="2176272" cy="315468"/>
+            <a:off x="621792" y="2267712"/>
+            <a:ext cx="2176272" cy="292608"/>
           </a:xfrm>
           <a:prstGeom prst="rect">
             <a:avLst/>
@@ -13338,7 +13062,7 @@
           <a:noFill/>
         </p:spPr>
         <p:txBody>
-          <a:bodyPr wrap="square" lIns="25400" tIns="25400" rIns="25400" bIns="25400" anchor="ctr">
+          <a:bodyPr wrap="square" lIns="25400" rIns="25400" tIns="25400" bIns="25400" anchor="ctr">
             <a:spAutoFit/>
           </a:bodyPr>
           <a:lstStyle/>
@@ -13352,7 +13076,7 @@
               </a:spcAft>
             </a:pPr>
             <a:r>
-              <a:rPr sz="1100" b="0" i="0">
+              <a:rPr sz="1050" b="0" i="0">
                 <a:solidFill>
                   <a:srgbClr val="222A3A"/>
                 </a:solidFill>
@@ -13371,8 +13095,8 @@
         </p:nvSpPr>
         <p:spPr>
           <a:xfrm>
-            <a:off x="2852928" y="2290572"/>
-            <a:ext cx="3785616" cy="315468"/>
+            <a:off x="2852928" y="2267712"/>
+            <a:ext cx="3785616" cy="292608"/>
           </a:xfrm>
           <a:prstGeom prst="rect">
             <a:avLst/>
@@ -13406,7 +13130,6 @@
           <a:lstStyle/>
           <a:p>
             <a:pPr algn="ctr"/>
-            <a:endParaRPr/>
           </a:p>
         </p:txBody>
       </p:sp>
@@ -13418,8 +13141,8 @@
         </p:nvSpPr>
         <p:spPr>
           <a:xfrm>
-            <a:off x="2926080" y="2290572"/>
-            <a:ext cx="3657600" cy="315468"/>
+            <a:off x="2926080" y="2267712"/>
+            <a:ext cx="3657600" cy="292608"/>
           </a:xfrm>
           <a:prstGeom prst="rect">
             <a:avLst/>
@@ -13427,7 +13150,7 @@
           <a:noFill/>
         </p:spPr>
         <p:txBody>
-          <a:bodyPr wrap="square" lIns="25400" tIns="25400" rIns="25400" bIns="25400" anchor="ctr">
+          <a:bodyPr wrap="square" lIns="25400" rIns="25400" tIns="25400" bIns="25400" anchor="ctr">
             <a:spAutoFit/>
           </a:bodyPr>
           <a:lstStyle/>
@@ -13441,7 +13164,7 @@
               </a:spcAft>
             </a:pPr>
             <a:r>
-              <a:rPr sz="1100" b="0" i="0">
+              <a:rPr sz="1050" b="0" i="0">
                 <a:solidFill>
                   <a:srgbClr val="222A3A"/>
                 </a:solidFill>
@@ -13460,8 +13183,8 @@
         </p:nvSpPr>
         <p:spPr>
           <a:xfrm>
-            <a:off x="6638544" y="2290572"/>
-            <a:ext cx="2139696" cy="315468"/>
+            <a:off x="6638544" y="2267712"/>
+            <a:ext cx="2139696" cy="292608"/>
           </a:xfrm>
           <a:prstGeom prst="rect">
             <a:avLst/>
@@ -13495,7 +13218,6 @@
           <a:lstStyle/>
           <a:p>
             <a:pPr algn="ctr"/>
-            <a:endParaRPr/>
           </a:p>
         </p:txBody>
       </p:sp>
@@ -13507,8 +13229,8 @@
         </p:nvSpPr>
         <p:spPr>
           <a:xfrm>
-            <a:off x="6711696" y="2290572"/>
-            <a:ext cx="2011679" cy="315468"/>
+            <a:off x="6711696" y="2267712"/>
+            <a:ext cx="2011679" cy="292608"/>
           </a:xfrm>
           <a:prstGeom prst="rect">
             <a:avLst/>
@@ -13516,7 +13238,7 @@
           <a:noFill/>
         </p:spPr>
         <p:txBody>
-          <a:bodyPr wrap="square" lIns="25400" tIns="25400" rIns="25400" bIns="25400" anchor="ctr">
+          <a:bodyPr wrap="square" lIns="25400" rIns="25400" tIns="25400" bIns="25400" anchor="ctr">
             <a:spAutoFit/>
           </a:bodyPr>
           <a:lstStyle/>
@@ -13530,7 +13252,7 @@
               </a:spcAft>
             </a:pPr>
             <a:r>
-              <a:rPr sz="1100" b="0" i="0">
+              <a:rPr sz="1050" b="0" i="0">
                 <a:solidFill>
                   <a:srgbClr val="222A3A"/>
                 </a:solidFill>
@@ -13549,8 +13271,8 @@
         </p:nvSpPr>
         <p:spPr>
           <a:xfrm>
-            <a:off x="548640" y="2606039"/>
-            <a:ext cx="2304288" cy="315468"/>
+            <a:off x="548640" y="2560320"/>
+            <a:ext cx="2304288" cy="292608"/>
           </a:xfrm>
           <a:prstGeom prst="rect">
             <a:avLst/>
@@ -13584,7 +13306,6 @@
           <a:lstStyle/>
           <a:p>
             <a:pPr algn="ctr"/>
-            <a:endParaRPr/>
           </a:p>
         </p:txBody>
       </p:sp>
@@ -13596,8 +13317,8 @@
         </p:nvSpPr>
         <p:spPr>
           <a:xfrm>
-            <a:off x="621792" y="2606039"/>
-            <a:ext cx="2176272" cy="315468"/>
+            <a:off x="621792" y="2560320"/>
+            <a:ext cx="2176272" cy="292608"/>
           </a:xfrm>
           <a:prstGeom prst="rect">
             <a:avLst/>
@@ -13605,7 +13326,7 @@
           <a:noFill/>
         </p:spPr>
         <p:txBody>
-          <a:bodyPr wrap="square" lIns="25400" tIns="25400" rIns="25400" bIns="25400" anchor="ctr">
+          <a:bodyPr wrap="square" lIns="25400" rIns="25400" tIns="25400" bIns="25400" anchor="ctr">
             <a:spAutoFit/>
           </a:bodyPr>
           <a:lstStyle/>
@@ -13619,7 +13340,7 @@
               </a:spcAft>
             </a:pPr>
             <a:r>
-              <a:rPr sz="1100" b="0" i="0">
+              <a:rPr sz="1050" b="0" i="0">
                 <a:solidFill>
                   <a:srgbClr val="222A3A"/>
                 </a:solidFill>
@@ -13638,8 +13359,8 @@
         </p:nvSpPr>
         <p:spPr>
           <a:xfrm>
-            <a:off x="2852928" y="2606039"/>
-            <a:ext cx="3785616" cy="315468"/>
+            <a:off x="2852928" y="2560320"/>
+            <a:ext cx="3785616" cy="292608"/>
           </a:xfrm>
           <a:prstGeom prst="rect">
             <a:avLst/>
@@ -13673,7 +13394,6 @@
           <a:lstStyle/>
           <a:p>
             <a:pPr algn="ctr"/>
-            <a:endParaRPr/>
           </a:p>
         </p:txBody>
       </p:sp>
@@ -13685,8 +13405,8 @@
         </p:nvSpPr>
         <p:spPr>
           <a:xfrm>
-            <a:off x="2926080" y="2606039"/>
-            <a:ext cx="3657600" cy="315468"/>
+            <a:off x="2926080" y="2560320"/>
+            <a:ext cx="3657600" cy="292608"/>
           </a:xfrm>
           <a:prstGeom prst="rect">
             <a:avLst/>
@@ -13694,7 +13414,7 @@
           <a:noFill/>
         </p:spPr>
         <p:txBody>
-          <a:bodyPr wrap="square" lIns="25400" tIns="25400" rIns="25400" bIns="25400" anchor="ctr">
+          <a:bodyPr wrap="square" lIns="25400" rIns="25400" tIns="25400" bIns="25400" anchor="ctr">
             <a:spAutoFit/>
           </a:bodyPr>
           <a:lstStyle/>
@@ -13708,7 +13428,7 @@
               </a:spcAft>
             </a:pPr>
             <a:r>
-              <a:rPr sz="1100" b="0" i="0">
+              <a:rPr sz="1050" b="0" i="0">
                 <a:solidFill>
                   <a:srgbClr val="222A3A"/>
                 </a:solidFill>
@@ -13727,8 +13447,8 @@
         </p:nvSpPr>
         <p:spPr>
           <a:xfrm>
-            <a:off x="6638544" y="2606039"/>
-            <a:ext cx="2139696" cy="315468"/>
+            <a:off x="6638544" y="2560320"/>
+            <a:ext cx="2139696" cy="292608"/>
           </a:xfrm>
           <a:prstGeom prst="rect">
             <a:avLst/>
@@ -13762,7 +13482,6 @@
           <a:lstStyle/>
           <a:p>
             <a:pPr algn="ctr"/>
-            <a:endParaRPr/>
           </a:p>
         </p:txBody>
       </p:sp>
@@ -13774,8 +13493,8 @@
         </p:nvSpPr>
         <p:spPr>
           <a:xfrm>
-            <a:off x="6711696" y="2606039"/>
-            <a:ext cx="2011679" cy="315468"/>
+            <a:off x="6711696" y="2560320"/>
+            <a:ext cx="2011679" cy="292608"/>
           </a:xfrm>
           <a:prstGeom prst="rect">
             <a:avLst/>
@@ -13783,7 +13502,7 @@
           <a:noFill/>
         </p:spPr>
         <p:txBody>
-          <a:bodyPr wrap="square" lIns="25400" tIns="25400" rIns="25400" bIns="25400" anchor="ctr">
+          <a:bodyPr wrap="square" lIns="25400" rIns="25400" tIns="25400" bIns="25400" anchor="ctr">
             <a:spAutoFit/>
           </a:bodyPr>
           <a:lstStyle/>
@@ -13797,7 +13516,7 @@
               </a:spcAft>
             </a:pPr>
             <a:r>
-              <a:rPr sz="1100" b="0" i="0">
+              <a:rPr sz="1050" b="0" i="0">
                 <a:solidFill>
                   <a:srgbClr val="222A3A"/>
                 </a:solidFill>
@@ -13816,8 +13535,8 @@
         </p:nvSpPr>
         <p:spPr>
           <a:xfrm>
-            <a:off x="548640" y="2921507"/>
-            <a:ext cx="2304288" cy="315468"/>
+            <a:off x="548640" y="2852927"/>
+            <a:ext cx="2304288" cy="292608"/>
           </a:xfrm>
           <a:prstGeom prst="rect">
             <a:avLst/>
@@ -13851,7 +13570,6 @@
           <a:lstStyle/>
           <a:p>
             <a:pPr algn="ctr"/>
-            <a:endParaRPr/>
           </a:p>
         </p:txBody>
       </p:sp>
@@ -13863,8 +13581,8 @@
         </p:nvSpPr>
         <p:spPr>
           <a:xfrm>
-            <a:off x="621792" y="2921507"/>
-            <a:ext cx="2176272" cy="315468"/>
+            <a:off x="621792" y="2852927"/>
+            <a:ext cx="2176272" cy="292608"/>
           </a:xfrm>
           <a:prstGeom prst="rect">
             <a:avLst/>
@@ -13872,7 +13590,7 @@
           <a:noFill/>
         </p:spPr>
         <p:txBody>
-          <a:bodyPr wrap="square" lIns="25400" tIns="25400" rIns="25400" bIns="25400" anchor="ctr">
+          <a:bodyPr wrap="square" lIns="25400" rIns="25400" tIns="25400" bIns="25400" anchor="ctr">
             <a:spAutoFit/>
           </a:bodyPr>
           <a:lstStyle/>
@@ -13886,7 +13604,7 @@
               </a:spcAft>
             </a:pPr>
             <a:r>
-              <a:rPr sz="1100" b="0" i="0">
+              <a:rPr sz="1050" b="0" i="0">
                 <a:solidFill>
                   <a:srgbClr val="222A3A"/>
                 </a:solidFill>
@@ -13905,8 +13623,8 @@
         </p:nvSpPr>
         <p:spPr>
           <a:xfrm>
-            <a:off x="2852928" y="2921507"/>
-            <a:ext cx="3785616" cy="315468"/>
+            <a:off x="2852928" y="2852927"/>
+            <a:ext cx="3785616" cy="292608"/>
           </a:xfrm>
           <a:prstGeom prst="rect">
             <a:avLst/>
@@ -13940,7 +13658,6 @@
           <a:lstStyle/>
           <a:p>
             <a:pPr algn="ctr"/>
-            <a:endParaRPr/>
           </a:p>
         </p:txBody>
       </p:sp>
@@ -13952,8 +13669,8 @@
         </p:nvSpPr>
         <p:spPr>
           <a:xfrm>
-            <a:off x="2926080" y="2921507"/>
-            <a:ext cx="3657600" cy="315468"/>
+            <a:off x="2926080" y="2852927"/>
+            <a:ext cx="3657600" cy="292608"/>
           </a:xfrm>
           <a:prstGeom prst="rect">
             <a:avLst/>
@@ -13961,7 +13678,7 @@
           <a:noFill/>
         </p:spPr>
         <p:txBody>
-          <a:bodyPr wrap="square" lIns="25400" tIns="25400" rIns="25400" bIns="25400" anchor="ctr">
+          <a:bodyPr wrap="square" lIns="25400" rIns="25400" tIns="25400" bIns="25400" anchor="ctr">
             <a:spAutoFit/>
           </a:bodyPr>
           <a:lstStyle/>
@@ -13975,7 +13692,7 @@
               </a:spcAft>
             </a:pPr>
             <a:r>
-              <a:rPr sz="1100" b="0" i="0">
+              <a:rPr sz="1050" b="0" i="0">
                 <a:solidFill>
                   <a:srgbClr val="222A3A"/>
                 </a:solidFill>
@@ -13994,8 +13711,8 @@
         </p:nvSpPr>
         <p:spPr>
           <a:xfrm>
-            <a:off x="6638544" y="2921507"/>
-            <a:ext cx="2139696" cy="315468"/>
+            <a:off x="6638544" y="2852927"/>
+            <a:ext cx="2139696" cy="292608"/>
           </a:xfrm>
           <a:prstGeom prst="rect">
             <a:avLst/>
@@ -14029,7 +13746,6 @@
           <a:lstStyle/>
           <a:p>
             <a:pPr algn="ctr"/>
-            <a:endParaRPr/>
           </a:p>
         </p:txBody>
       </p:sp>
@@ -14041,8 +13757,8 @@
         </p:nvSpPr>
         <p:spPr>
           <a:xfrm>
-            <a:off x="6711696" y="2921507"/>
-            <a:ext cx="2011679" cy="315468"/>
+            <a:off x="6711696" y="2852927"/>
+            <a:ext cx="2011679" cy="292608"/>
           </a:xfrm>
           <a:prstGeom prst="rect">
             <a:avLst/>
@@ -14050,7 +13766,7 @@
           <a:noFill/>
         </p:spPr>
         <p:txBody>
-          <a:bodyPr wrap="square" lIns="25400" tIns="25400" rIns="25400" bIns="25400" anchor="ctr">
+          <a:bodyPr wrap="square" lIns="25400" rIns="25400" tIns="25400" bIns="25400" anchor="ctr">
             <a:spAutoFit/>
           </a:bodyPr>
           <a:lstStyle/>
@@ -14064,7 +13780,7 @@
               </a:spcAft>
             </a:pPr>
             <a:r>
-              <a:rPr sz="1100" b="0" i="0">
+              <a:rPr sz="1050" b="0" i="0">
                 <a:solidFill>
                   <a:srgbClr val="222A3A"/>
                 </a:solidFill>
@@ -14083,8 +13799,8 @@
         </p:nvSpPr>
         <p:spPr>
           <a:xfrm>
-            <a:off x="548640" y="3236975"/>
-            <a:ext cx="2304288" cy="315468"/>
+            <a:off x="548640" y="3145535"/>
+            <a:ext cx="2304288" cy="292608"/>
           </a:xfrm>
           <a:prstGeom prst="rect">
             <a:avLst/>
@@ -14118,7 +13834,6 @@
           <a:lstStyle/>
           <a:p>
             <a:pPr algn="ctr"/>
-            <a:endParaRPr/>
           </a:p>
         </p:txBody>
       </p:sp>
@@ -14130,8 +13845,8 @@
         </p:nvSpPr>
         <p:spPr>
           <a:xfrm>
-            <a:off x="621792" y="3236975"/>
-            <a:ext cx="2176272" cy="315468"/>
+            <a:off x="621792" y="3145535"/>
+            <a:ext cx="2176272" cy="292608"/>
           </a:xfrm>
           <a:prstGeom prst="rect">
             <a:avLst/>
@@ -14139,7 +13854,7 @@
           <a:noFill/>
         </p:spPr>
         <p:txBody>
-          <a:bodyPr wrap="square" lIns="25400" tIns="25400" rIns="25400" bIns="25400" anchor="ctr">
+          <a:bodyPr wrap="square" lIns="25400" rIns="25400" tIns="25400" bIns="25400" anchor="ctr">
             <a:spAutoFit/>
           </a:bodyPr>
           <a:lstStyle/>
@@ -14153,7 +13868,7 @@
               </a:spcAft>
             </a:pPr>
             <a:r>
-              <a:rPr sz="1100" b="0" i="0">
+              <a:rPr sz="1050" b="0" i="0">
                 <a:solidFill>
                   <a:srgbClr val="222A3A"/>
                 </a:solidFill>
@@ -14172,8 +13887,8 @@
         </p:nvSpPr>
         <p:spPr>
           <a:xfrm>
-            <a:off x="2852928" y="3236975"/>
-            <a:ext cx="3785616" cy="315468"/>
+            <a:off x="2852928" y="3145535"/>
+            <a:ext cx="3785616" cy="292608"/>
           </a:xfrm>
           <a:prstGeom prst="rect">
             <a:avLst/>
@@ -14207,7 +13922,6 @@
           <a:lstStyle/>
           <a:p>
             <a:pPr algn="ctr"/>
-            <a:endParaRPr/>
           </a:p>
         </p:txBody>
       </p:sp>
@@ -14219,8 +13933,8 @@
         </p:nvSpPr>
         <p:spPr>
           <a:xfrm>
-            <a:off x="2926080" y="3236975"/>
-            <a:ext cx="3657600" cy="315468"/>
+            <a:off x="2926080" y="3145535"/>
+            <a:ext cx="3657600" cy="292608"/>
           </a:xfrm>
           <a:prstGeom prst="rect">
             <a:avLst/>
@@ -14228,7 +13942,7 @@
           <a:noFill/>
         </p:spPr>
         <p:txBody>
-          <a:bodyPr wrap="square" lIns="25400" tIns="25400" rIns="25400" bIns="25400" anchor="ctr">
+          <a:bodyPr wrap="square" lIns="25400" rIns="25400" tIns="25400" bIns="25400" anchor="ctr">
             <a:spAutoFit/>
           </a:bodyPr>
           <a:lstStyle/>
@@ -14242,7 +13956,7 @@
               </a:spcAft>
             </a:pPr>
             <a:r>
-              <a:rPr sz="1100" b="0" i="0">
+              <a:rPr sz="1050" b="0" i="0">
                 <a:solidFill>
                   <a:srgbClr val="222A3A"/>
                 </a:solidFill>
@@ -14261,8 +13975,8 @@
         </p:nvSpPr>
         <p:spPr>
           <a:xfrm>
-            <a:off x="6638544" y="3236975"/>
-            <a:ext cx="2139696" cy="315468"/>
+            <a:off x="6638544" y="3145535"/>
+            <a:ext cx="2139696" cy="292608"/>
           </a:xfrm>
           <a:prstGeom prst="rect">
             <a:avLst/>
@@ -14296,7 +14010,6 @@
           <a:lstStyle/>
           <a:p>
             <a:pPr algn="ctr"/>
-            <a:endParaRPr/>
           </a:p>
         </p:txBody>
       </p:sp>
@@ -14308,8 +14021,8 @@
         </p:nvSpPr>
         <p:spPr>
           <a:xfrm>
-            <a:off x="6711696" y="3236975"/>
-            <a:ext cx="2011679" cy="315468"/>
+            <a:off x="6711696" y="3145535"/>
+            <a:ext cx="2011679" cy="292608"/>
           </a:xfrm>
           <a:prstGeom prst="rect">
             <a:avLst/>
@@ -14317,7 +14030,7 @@
           <a:noFill/>
         </p:spPr>
         <p:txBody>
-          <a:bodyPr wrap="square" lIns="25400" tIns="25400" rIns="25400" bIns="25400" anchor="ctr">
+          <a:bodyPr wrap="square" lIns="25400" rIns="25400" tIns="25400" bIns="25400" anchor="ctr">
             <a:spAutoFit/>
           </a:bodyPr>
           <a:lstStyle/>
@@ -14331,7 +14044,7 @@
               </a:spcAft>
             </a:pPr>
             <a:r>
-              <a:rPr sz="1100" b="0" i="0">
+              <a:rPr sz="1050" b="0" i="0">
                 <a:solidFill>
                   <a:srgbClr val="222A3A"/>
                 </a:solidFill>
@@ -14350,8 +14063,8 @@
         </p:nvSpPr>
         <p:spPr>
           <a:xfrm>
-            <a:off x="548640" y="3552443"/>
-            <a:ext cx="2304288" cy="315468"/>
+            <a:off x="548640" y="3438143"/>
+            <a:ext cx="2304288" cy="292608"/>
           </a:xfrm>
           <a:prstGeom prst="rect">
             <a:avLst/>
@@ -14385,7 +14098,6 @@
           <a:lstStyle/>
           <a:p>
             <a:pPr algn="ctr"/>
-            <a:endParaRPr/>
           </a:p>
         </p:txBody>
       </p:sp>
@@ -14397,8 +14109,8 @@
         </p:nvSpPr>
         <p:spPr>
           <a:xfrm>
-            <a:off x="621792" y="3552443"/>
-            <a:ext cx="2176272" cy="315468"/>
+            <a:off x="621792" y="3438143"/>
+            <a:ext cx="2176272" cy="292608"/>
           </a:xfrm>
           <a:prstGeom prst="rect">
             <a:avLst/>
@@ -14406,7 +14118,7 @@
           <a:noFill/>
         </p:spPr>
         <p:txBody>
-          <a:bodyPr wrap="square" lIns="25400" tIns="25400" rIns="25400" bIns="25400" anchor="ctr">
+          <a:bodyPr wrap="square" lIns="25400" rIns="25400" tIns="25400" bIns="25400" anchor="ctr">
             <a:spAutoFit/>
           </a:bodyPr>
           <a:lstStyle/>
@@ -14420,7 +14132,7 @@
               </a:spcAft>
             </a:pPr>
             <a:r>
-              <a:rPr sz="1100" b="0" i="0">
+              <a:rPr sz="1050" b="0" i="0">
                 <a:solidFill>
                   <a:srgbClr val="222A3A"/>
                 </a:solidFill>
@@ -14439,8 +14151,8 @@
         </p:nvSpPr>
         <p:spPr>
           <a:xfrm>
-            <a:off x="2852928" y="3552443"/>
-            <a:ext cx="3785616" cy="315468"/>
+            <a:off x="2852928" y="3438143"/>
+            <a:ext cx="3785616" cy="292608"/>
           </a:xfrm>
           <a:prstGeom prst="rect">
             <a:avLst/>
@@ -14474,7 +14186,6 @@
           <a:lstStyle/>
           <a:p>
             <a:pPr algn="ctr"/>
-            <a:endParaRPr/>
           </a:p>
         </p:txBody>
       </p:sp>
@@ -14486,8 +14197,8 @@
         </p:nvSpPr>
         <p:spPr>
           <a:xfrm>
-            <a:off x="2926080" y="3552443"/>
-            <a:ext cx="3657600" cy="315468"/>
+            <a:off x="2926080" y="3438143"/>
+            <a:ext cx="3657600" cy="292608"/>
           </a:xfrm>
           <a:prstGeom prst="rect">
             <a:avLst/>
@@ -14495,7 +14206,7 @@
           <a:noFill/>
         </p:spPr>
         <p:txBody>
-          <a:bodyPr wrap="square" lIns="25400" tIns="25400" rIns="25400" bIns="25400" anchor="ctr">
+          <a:bodyPr wrap="square" lIns="25400" rIns="25400" tIns="25400" bIns="25400" anchor="ctr">
             <a:spAutoFit/>
           </a:bodyPr>
           <a:lstStyle/>
@@ -14509,7 +14220,7 @@
               </a:spcAft>
             </a:pPr>
             <a:r>
-              <a:rPr sz="1100" b="0" i="0">
+              <a:rPr sz="1050" b="0" i="0">
                 <a:solidFill>
                   <a:srgbClr val="222A3A"/>
                 </a:solidFill>
@@ -14528,8 +14239,8 @@
         </p:nvSpPr>
         <p:spPr>
           <a:xfrm>
-            <a:off x="6638544" y="3552443"/>
-            <a:ext cx="2139696" cy="315468"/>
+            <a:off x="6638544" y="3438143"/>
+            <a:ext cx="2139696" cy="292608"/>
           </a:xfrm>
           <a:prstGeom prst="rect">
             <a:avLst/>
@@ -14563,7 +14274,6 @@
           <a:lstStyle/>
           <a:p>
             <a:pPr algn="ctr"/>
-            <a:endParaRPr/>
           </a:p>
         </p:txBody>
       </p:sp>
@@ -14575,8 +14285,8 @@
         </p:nvSpPr>
         <p:spPr>
           <a:xfrm>
-            <a:off x="6711696" y="3552443"/>
-            <a:ext cx="2011679" cy="315468"/>
+            <a:off x="6711696" y="3438143"/>
+            <a:ext cx="2011679" cy="292608"/>
           </a:xfrm>
           <a:prstGeom prst="rect">
             <a:avLst/>
@@ -14584,7 +14294,7 @@
           <a:noFill/>
         </p:spPr>
         <p:txBody>
-          <a:bodyPr wrap="square" lIns="25400" tIns="25400" rIns="25400" bIns="25400" anchor="ctr">
+          <a:bodyPr wrap="square" lIns="25400" rIns="25400" tIns="25400" bIns="25400" anchor="ctr">
             <a:spAutoFit/>
           </a:bodyPr>
           <a:lstStyle/>
@@ -14598,7 +14308,7 @@
               </a:spcAft>
             </a:pPr>
             <a:r>
-              <a:rPr sz="1100" b="0" i="0">
+              <a:rPr sz="1050" b="0" i="0">
                 <a:solidFill>
                   <a:srgbClr val="222A3A"/>
                 </a:solidFill>
@@ -14617,8 +14327,8 @@
         </p:nvSpPr>
         <p:spPr>
           <a:xfrm>
-            <a:off x="548640" y="3867911"/>
-            <a:ext cx="2304288" cy="315468"/>
+            <a:off x="548640" y="3730751"/>
+            <a:ext cx="2304288" cy="292608"/>
           </a:xfrm>
           <a:prstGeom prst="rect">
             <a:avLst/>
@@ -14652,7 +14362,6 @@
           <a:lstStyle/>
           <a:p>
             <a:pPr algn="ctr"/>
-            <a:endParaRPr/>
           </a:p>
         </p:txBody>
       </p:sp>
@@ -14664,8 +14373,8 @@
         </p:nvSpPr>
         <p:spPr>
           <a:xfrm>
-            <a:off x="621792" y="3867911"/>
-            <a:ext cx="2176272" cy="315468"/>
+            <a:off x="621792" y="3730751"/>
+            <a:ext cx="2176272" cy="292608"/>
           </a:xfrm>
           <a:prstGeom prst="rect">
             <a:avLst/>
@@ -14673,7 +14382,7 @@
           <a:noFill/>
         </p:spPr>
         <p:txBody>
-          <a:bodyPr wrap="square" lIns="25400" tIns="25400" rIns="25400" bIns="25400" anchor="ctr">
+          <a:bodyPr wrap="square" lIns="25400" rIns="25400" tIns="25400" bIns="25400" anchor="ctr">
             <a:spAutoFit/>
           </a:bodyPr>
           <a:lstStyle/>
@@ -14687,7 +14396,7 @@
               </a:spcAft>
             </a:pPr>
             <a:r>
-              <a:rPr sz="1100" b="0" i="0">
+              <a:rPr sz="1050" b="0" i="0">
                 <a:solidFill>
                   <a:srgbClr val="222A3A"/>
                 </a:solidFill>
@@ -14706,8 +14415,8 @@
         </p:nvSpPr>
         <p:spPr>
           <a:xfrm>
-            <a:off x="2852928" y="3867911"/>
-            <a:ext cx="3785616" cy="315468"/>
+            <a:off x="2852928" y="3730751"/>
+            <a:ext cx="3785616" cy="292608"/>
           </a:xfrm>
           <a:prstGeom prst="rect">
             <a:avLst/>
@@ -14741,7 +14450,6 @@
           <a:lstStyle/>
           <a:p>
             <a:pPr algn="ctr"/>
-            <a:endParaRPr/>
           </a:p>
         </p:txBody>
       </p:sp>
@@ -14753,8 +14461,8 @@
         </p:nvSpPr>
         <p:spPr>
           <a:xfrm>
-            <a:off x="2926080" y="3867911"/>
-            <a:ext cx="3657600" cy="315468"/>
+            <a:off x="2926080" y="3730751"/>
+            <a:ext cx="3657600" cy="292608"/>
           </a:xfrm>
           <a:prstGeom prst="rect">
             <a:avLst/>
@@ -14762,7 +14470,7 @@
           <a:noFill/>
         </p:spPr>
         <p:txBody>
-          <a:bodyPr wrap="square" lIns="25400" tIns="25400" rIns="25400" bIns="25400" anchor="ctr">
+          <a:bodyPr wrap="square" lIns="25400" rIns="25400" tIns="25400" bIns="25400" anchor="ctr">
             <a:spAutoFit/>
           </a:bodyPr>
           <a:lstStyle/>
@@ -14776,7 +14484,7 @@
               </a:spcAft>
             </a:pPr>
             <a:r>
-              <a:rPr sz="1100" b="0" i="0">
+              <a:rPr sz="1050" b="0" i="0">
                 <a:solidFill>
                   <a:srgbClr val="222A3A"/>
                 </a:solidFill>
@@ -14795,8 +14503,8 @@
         </p:nvSpPr>
         <p:spPr>
           <a:xfrm>
-            <a:off x="6638544" y="3867911"/>
-            <a:ext cx="2139696" cy="315468"/>
+            <a:off x="6638544" y="3730751"/>
+            <a:ext cx="2139696" cy="292608"/>
           </a:xfrm>
           <a:prstGeom prst="rect">
             <a:avLst/>
@@ -14830,7 +14538,6 @@
           <a:lstStyle/>
           <a:p>
             <a:pPr algn="ctr"/>
-            <a:endParaRPr/>
           </a:p>
         </p:txBody>
       </p:sp>
@@ -14842,8 +14549,8 @@
         </p:nvSpPr>
         <p:spPr>
           <a:xfrm>
-            <a:off x="6711696" y="3867911"/>
-            <a:ext cx="2011679" cy="315468"/>
+            <a:off x="6711696" y="3730751"/>
+            <a:ext cx="2011679" cy="292608"/>
           </a:xfrm>
           <a:prstGeom prst="rect">
             <a:avLst/>
@@ -14851,7 +14558,7 @@
           <a:noFill/>
         </p:spPr>
         <p:txBody>
-          <a:bodyPr wrap="square" lIns="25400" tIns="25400" rIns="25400" bIns="25400" anchor="ctr">
+          <a:bodyPr wrap="square" lIns="25400" rIns="25400" tIns="25400" bIns="25400" anchor="ctr">
             <a:spAutoFit/>
           </a:bodyPr>
           <a:lstStyle/>
@@ -14865,7 +14572,7 @@
               </a:spcAft>
             </a:pPr>
             <a:r>
-              <a:rPr sz="1100" b="0" i="0">
+              <a:rPr sz="1050" b="0" i="0">
                 <a:solidFill>
                   <a:srgbClr val="222A3A"/>
                 </a:solidFill>
@@ -14884,8 +14591,8 @@
         </p:nvSpPr>
         <p:spPr>
           <a:xfrm>
-            <a:off x="548640" y="4183379"/>
-            <a:ext cx="2304288" cy="315468"/>
+            <a:off x="548640" y="4023359"/>
+            <a:ext cx="2304288" cy="292608"/>
           </a:xfrm>
           <a:prstGeom prst="rect">
             <a:avLst/>
@@ -14919,7 +14626,6 @@
           <a:lstStyle/>
           <a:p>
             <a:pPr algn="ctr"/>
-            <a:endParaRPr/>
           </a:p>
         </p:txBody>
       </p:sp>
@@ -14931,8 +14637,8 @@
         </p:nvSpPr>
         <p:spPr>
           <a:xfrm>
-            <a:off x="621792" y="4183379"/>
-            <a:ext cx="2176272" cy="315468"/>
+            <a:off x="621792" y="4023359"/>
+            <a:ext cx="2176272" cy="292608"/>
           </a:xfrm>
           <a:prstGeom prst="rect">
             <a:avLst/>
@@ -14940,7 +14646,7 @@
           <a:noFill/>
         </p:spPr>
         <p:txBody>
-          <a:bodyPr wrap="square" lIns="25400" tIns="25400" rIns="25400" bIns="25400" anchor="ctr">
+          <a:bodyPr wrap="square" lIns="25400" rIns="25400" tIns="25400" bIns="25400" anchor="ctr">
             <a:spAutoFit/>
           </a:bodyPr>
           <a:lstStyle/>
@@ -14954,7 +14660,7 @@
               </a:spcAft>
             </a:pPr>
             <a:r>
-              <a:rPr sz="1100" b="0" i="0">
+              <a:rPr sz="1050" b="0" i="0">
                 <a:solidFill>
                   <a:srgbClr val="222A3A"/>
                 </a:solidFill>
@@ -14973,8 +14679,8 @@
         </p:nvSpPr>
         <p:spPr>
           <a:xfrm>
-            <a:off x="2852928" y="4183379"/>
-            <a:ext cx="3785616" cy="315468"/>
+            <a:off x="2852928" y="4023359"/>
+            <a:ext cx="3785616" cy="292608"/>
           </a:xfrm>
           <a:prstGeom prst="rect">
             <a:avLst/>
@@ -15008,7 +14714,6 @@
           <a:lstStyle/>
           <a:p>
             <a:pPr algn="ctr"/>
-            <a:endParaRPr/>
           </a:p>
         </p:txBody>
       </p:sp>
@@ -15020,8 +14725,8 @@
         </p:nvSpPr>
         <p:spPr>
           <a:xfrm>
-            <a:off x="2926080" y="4183379"/>
-            <a:ext cx="3657600" cy="315468"/>
+            <a:off x="2926080" y="4023359"/>
+            <a:ext cx="3657600" cy="292608"/>
           </a:xfrm>
           <a:prstGeom prst="rect">
             <a:avLst/>
@@ -15029,7 +14734,7 @@
           <a:noFill/>
         </p:spPr>
         <p:txBody>
-          <a:bodyPr wrap="square" lIns="25400" tIns="25400" rIns="25400" bIns="25400" anchor="ctr">
+          <a:bodyPr wrap="square" lIns="25400" rIns="25400" tIns="25400" bIns="25400" anchor="ctr">
             <a:spAutoFit/>
           </a:bodyPr>
           <a:lstStyle/>
@@ -15043,13 +14748,13 @@
               </a:spcAft>
             </a:pPr>
             <a:r>
-              <a:rPr sz="1100" b="0" i="0">
+              <a:rPr sz="1050" b="0" i="0">
                 <a:solidFill>
                   <a:srgbClr val="222A3A"/>
                 </a:solidFill>
                 <a:latin typeface="Calibri"/>
               </a:rPr>
-              <a:t>Thủ kho NVL</a:t>
+              <a:t>Thủ kho NVL (Kho công ty)</a:t>
             </a:r>
           </a:p>
         </p:txBody>
@@ -15062,8 +14767,8 @@
         </p:nvSpPr>
         <p:spPr>
           <a:xfrm>
-            <a:off x="6638544" y="4183379"/>
-            <a:ext cx="2139696" cy="315468"/>
+            <a:off x="6638544" y="4023359"/>
+            <a:ext cx="2139696" cy="292608"/>
           </a:xfrm>
           <a:prstGeom prst="rect">
             <a:avLst/>
@@ -15097,7 +14802,6 @@
           <a:lstStyle/>
           <a:p>
             <a:pPr algn="ctr"/>
-            <a:endParaRPr/>
           </a:p>
         </p:txBody>
       </p:sp>
@@ -15109,8 +14813,8 @@
         </p:nvSpPr>
         <p:spPr>
           <a:xfrm>
-            <a:off x="6711696" y="4183379"/>
-            <a:ext cx="2011679" cy="315468"/>
+            <a:off x="6711696" y="4023359"/>
+            <a:ext cx="2011679" cy="292608"/>
           </a:xfrm>
           <a:prstGeom prst="rect">
             <a:avLst/>
@@ -15118,7 +14822,7 @@
           <a:noFill/>
         </p:spPr>
         <p:txBody>
-          <a:bodyPr wrap="square" lIns="25400" tIns="25400" rIns="25400" bIns="25400" anchor="ctr">
+          <a:bodyPr wrap="square" lIns="25400" rIns="25400" tIns="25400" bIns="25400" anchor="ctr">
             <a:spAutoFit/>
           </a:bodyPr>
           <a:lstStyle/>
@@ -15132,7 +14836,7 @@
               </a:spcAft>
             </a:pPr>
             <a:r>
-              <a:rPr sz="1100" b="0" i="0">
+              <a:rPr sz="1050" b="0" i="0">
                 <a:solidFill>
                   <a:srgbClr val="222A3A"/>
                 </a:solidFill>
@@ -15151,8 +14855,8 @@
         </p:nvSpPr>
         <p:spPr>
           <a:xfrm>
-            <a:off x="548640" y="4498847"/>
-            <a:ext cx="2304288" cy="315468"/>
+            <a:off x="548640" y="4315968"/>
+            <a:ext cx="2304288" cy="292608"/>
           </a:xfrm>
           <a:prstGeom prst="rect">
             <a:avLst/>
@@ -15186,7 +14890,6 @@
           <a:lstStyle/>
           <a:p>
             <a:pPr algn="ctr"/>
-            <a:endParaRPr/>
           </a:p>
         </p:txBody>
       </p:sp>
@@ -15198,8 +14901,8 @@
         </p:nvSpPr>
         <p:spPr>
           <a:xfrm>
-            <a:off x="621792" y="4498847"/>
-            <a:ext cx="2176272" cy="315468"/>
+            <a:off x="621792" y="4315968"/>
+            <a:ext cx="2176272" cy="292608"/>
           </a:xfrm>
           <a:prstGeom prst="rect">
             <a:avLst/>
@@ -15207,7 +14910,7 @@
           <a:noFill/>
         </p:spPr>
         <p:txBody>
-          <a:bodyPr wrap="square" lIns="25400" tIns="25400" rIns="25400" bIns="25400" anchor="ctr">
+          <a:bodyPr wrap="square" lIns="25400" rIns="25400" tIns="25400" bIns="25400" anchor="ctr">
             <a:spAutoFit/>
           </a:bodyPr>
           <a:lstStyle/>
@@ -15221,13 +14924,13 @@
               </a:spcAft>
             </a:pPr>
             <a:r>
-              <a:rPr sz="1100" b="0" i="0">
+              <a:rPr sz="1050" b="0" i="0">
                 <a:solidFill>
                   <a:srgbClr val="222A3A"/>
                 </a:solidFill>
                 <a:latin typeface="Calibri"/>
               </a:rPr>
-              <a:t>baotri</a:t>
+              <a:t>thukho_px</a:t>
             </a:r>
           </a:p>
         </p:txBody>
@@ -15240,8 +14943,8 @@
         </p:nvSpPr>
         <p:spPr>
           <a:xfrm>
-            <a:off x="2852928" y="4498847"/>
-            <a:ext cx="3785616" cy="315468"/>
+            <a:off x="2852928" y="4315968"/>
+            <a:ext cx="3785616" cy="292608"/>
           </a:xfrm>
           <a:prstGeom prst="rect">
             <a:avLst/>
@@ -15275,7 +14978,6 @@
           <a:lstStyle/>
           <a:p>
             <a:pPr algn="ctr"/>
-            <a:endParaRPr/>
           </a:p>
         </p:txBody>
       </p:sp>
@@ -15287,8 +14989,8 @@
         </p:nvSpPr>
         <p:spPr>
           <a:xfrm>
-            <a:off x="2926080" y="4498847"/>
-            <a:ext cx="3657600" cy="315468"/>
+            <a:off x="2926080" y="4315968"/>
+            <a:ext cx="3657600" cy="292608"/>
           </a:xfrm>
           <a:prstGeom prst="rect">
             <a:avLst/>
@@ -15296,7 +14998,7 @@
           <a:noFill/>
         </p:spPr>
         <p:txBody>
-          <a:bodyPr wrap="square" lIns="25400" tIns="25400" rIns="25400" bIns="25400" anchor="ctr">
+          <a:bodyPr wrap="square" lIns="25400" rIns="25400" tIns="25400" bIns="25400" anchor="ctr">
             <a:spAutoFit/>
           </a:bodyPr>
           <a:lstStyle/>
@@ -15310,13 +15012,13 @@
               </a:spcAft>
             </a:pPr>
             <a:r>
-              <a:rPr sz="1100" b="0" i="0">
+              <a:rPr sz="1050" b="0" i="0">
                 <a:solidFill>
                   <a:srgbClr val="222A3A"/>
                 </a:solidFill>
                 <a:latin typeface="Calibri"/>
               </a:rPr>
-              <a:t>Nhân viên bảo trì</a:t>
+              <a:t>Thủ kho phân xưởng</a:t>
             </a:r>
           </a:p>
         </p:txBody>
@@ -15329,8 +15031,8 @@
         </p:nvSpPr>
         <p:spPr>
           <a:xfrm>
-            <a:off x="6638544" y="4498847"/>
-            <a:ext cx="2139696" cy="315468"/>
+            <a:off x="6638544" y="4315968"/>
+            <a:ext cx="2139696" cy="292608"/>
           </a:xfrm>
           <a:prstGeom prst="rect">
             <a:avLst/>
@@ -15364,7 +15066,6 @@
           <a:lstStyle/>
           <a:p>
             <a:pPr algn="ctr"/>
-            <a:endParaRPr/>
           </a:p>
         </p:txBody>
       </p:sp>
@@ -15376,8 +15077,8 @@
         </p:nvSpPr>
         <p:spPr>
           <a:xfrm>
-            <a:off x="6711696" y="4498847"/>
-            <a:ext cx="2011679" cy="315468"/>
+            <a:off x="6711696" y="4315968"/>
+            <a:ext cx="2011679" cy="292608"/>
           </a:xfrm>
           <a:prstGeom prst="rect">
             <a:avLst/>
@@ -15385,7 +15086,7 @@
           <a:noFill/>
         </p:spPr>
         <p:txBody>
-          <a:bodyPr wrap="square" lIns="25400" tIns="25400" rIns="25400" bIns="25400" anchor="ctr">
+          <a:bodyPr wrap="square" lIns="25400" rIns="25400" tIns="25400" bIns="25400" anchor="ctr">
             <a:spAutoFit/>
           </a:bodyPr>
           <a:lstStyle/>
@@ -15399,7 +15100,7 @@
               </a:spcAft>
             </a:pPr>
             <a:r>
-              <a:rPr sz="1100" b="0" i="0">
+              <a:rPr sz="1050" b="0" i="0">
                 <a:solidFill>
                   <a:srgbClr val="222A3A"/>
                 </a:solidFill>
@@ -15418,8 +15119,8 @@
         </p:nvSpPr>
         <p:spPr>
           <a:xfrm>
-            <a:off x="548640" y="4814315"/>
-            <a:ext cx="2304288" cy="315468"/>
+            <a:off x="548640" y="4608576"/>
+            <a:ext cx="2304288" cy="292608"/>
           </a:xfrm>
           <a:prstGeom prst="rect">
             <a:avLst/>
@@ -15453,7 +15154,6 @@
           <a:lstStyle/>
           <a:p>
             <a:pPr algn="ctr"/>
-            <a:endParaRPr/>
           </a:p>
         </p:txBody>
       </p:sp>
@@ -15465,8 +15165,8 @@
         </p:nvSpPr>
         <p:spPr>
           <a:xfrm>
-            <a:off x="621792" y="4814315"/>
-            <a:ext cx="2176272" cy="315468"/>
+            <a:off x="621792" y="4608576"/>
+            <a:ext cx="2176272" cy="292608"/>
           </a:xfrm>
           <a:prstGeom prst="rect">
             <a:avLst/>
@@ -15474,7 +15174,7 @@
           <a:noFill/>
         </p:spPr>
         <p:txBody>
-          <a:bodyPr wrap="square" lIns="25400" tIns="25400" rIns="25400" bIns="25400" anchor="ctr">
+          <a:bodyPr wrap="square" lIns="25400" rIns="25400" tIns="25400" bIns="25400" anchor="ctr">
             <a:spAutoFit/>
           </a:bodyPr>
           <a:lstStyle/>
@@ -15488,13 +15188,13 @@
               </a:spcAft>
             </a:pPr>
             <a:r>
-              <a:rPr sz="1100" b="0" i="0">
+              <a:rPr sz="1050" b="0" i="0">
                 <a:solidFill>
                   <a:srgbClr val="222A3A"/>
                 </a:solidFill>
                 <a:latin typeface="Calibri"/>
               </a:rPr>
-              <a:t>nangluong</a:t>
+              <a:t>baotri</a:t>
             </a:r>
           </a:p>
         </p:txBody>
@@ -15507,8 +15207,8 @@
         </p:nvSpPr>
         <p:spPr>
           <a:xfrm>
-            <a:off x="2852928" y="4814315"/>
-            <a:ext cx="3785616" cy="315468"/>
+            <a:off x="2852928" y="4608576"/>
+            <a:ext cx="3785616" cy="292608"/>
           </a:xfrm>
           <a:prstGeom prst="rect">
             <a:avLst/>
@@ -15542,7 +15242,6 @@
           <a:lstStyle/>
           <a:p>
             <a:pPr algn="ctr"/>
-            <a:endParaRPr/>
           </a:p>
         </p:txBody>
       </p:sp>
@@ -15554,8 +15253,8 @@
         </p:nvSpPr>
         <p:spPr>
           <a:xfrm>
-            <a:off x="2926080" y="4814315"/>
-            <a:ext cx="3657600" cy="315468"/>
+            <a:off x="2926080" y="4608576"/>
+            <a:ext cx="3657600" cy="292608"/>
           </a:xfrm>
           <a:prstGeom prst="rect">
             <a:avLst/>
@@ -15563,7 +15262,7 @@
           <a:noFill/>
         </p:spPr>
         <p:txBody>
-          <a:bodyPr wrap="square" lIns="25400" tIns="25400" rIns="25400" bIns="25400" anchor="ctr">
+          <a:bodyPr wrap="square" lIns="25400" rIns="25400" tIns="25400" bIns="25400" anchor="ctr">
             <a:spAutoFit/>
           </a:bodyPr>
           <a:lstStyle/>
@@ -15577,13 +15276,13 @@
               </a:spcAft>
             </a:pPr>
             <a:r>
-              <a:rPr sz="1100" b="0" i="0">
+              <a:rPr sz="1050" b="0" i="0">
                 <a:solidFill>
                   <a:srgbClr val="222A3A"/>
                 </a:solidFill>
                 <a:latin typeface="Calibri"/>
               </a:rPr>
-              <a:t>NV quản lý năng lượng</a:t>
+              <a:t>Nhân viên bảo trì</a:t>
             </a:r>
           </a:p>
         </p:txBody>
@@ -15596,8 +15295,8 @@
         </p:nvSpPr>
         <p:spPr>
           <a:xfrm>
-            <a:off x="6638544" y="4814315"/>
-            <a:ext cx="2139696" cy="315468"/>
+            <a:off x="6638544" y="4608576"/>
+            <a:ext cx="2139696" cy="292608"/>
           </a:xfrm>
           <a:prstGeom prst="rect">
             <a:avLst/>
@@ -15631,7 +15330,6 @@
           <a:lstStyle/>
           <a:p>
             <a:pPr algn="ctr"/>
-            <a:endParaRPr/>
           </a:p>
         </p:txBody>
       </p:sp>
@@ -15643,8 +15341,8 @@
         </p:nvSpPr>
         <p:spPr>
           <a:xfrm>
-            <a:off x="6711696" y="4814315"/>
-            <a:ext cx="2011679" cy="315468"/>
+            <a:off x="6711696" y="4608576"/>
+            <a:ext cx="2011679" cy="292608"/>
           </a:xfrm>
           <a:prstGeom prst="rect">
             <a:avLst/>
@@ -15652,7 +15350,7 @@
           <a:noFill/>
         </p:spPr>
         <p:txBody>
-          <a:bodyPr wrap="square" lIns="25400" tIns="25400" rIns="25400" bIns="25400" anchor="ctr">
+          <a:bodyPr wrap="square" lIns="25400" rIns="25400" tIns="25400" bIns="25400" anchor="ctr">
             <a:spAutoFit/>
           </a:bodyPr>
           <a:lstStyle/>
@@ -15666,7 +15364,7 @@
               </a:spcAft>
             </a:pPr>
             <a:r>
-              <a:rPr sz="1100" b="0" i="0">
+              <a:rPr sz="1050" b="0" i="0">
                 <a:solidFill>
                   <a:srgbClr val="222A3A"/>
                 </a:solidFill>
@@ -15679,7 +15377,271 @@
       </p:sp>
       <p:sp>
         <p:nvSpPr>
-          <p:cNvPr id="71" name="Rounded Rectangle 70"/>
+          <p:cNvPr id="71" name="Rectangle 70"/>
+          <p:cNvSpPr/>
+          <p:nvPr/>
+        </p:nvSpPr>
+        <p:spPr>
+          <a:xfrm>
+            <a:off x="548640" y="4901184"/>
+            <a:ext cx="2304288" cy="292608"/>
+          </a:xfrm>
+          <a:prstGeom prst="rect">
+            <a:avLst/>
+          </a:prstGeom>
+          <a:solidFill>
+            <a:srgbClr val="FFFFFF"/>
+          </a:solidFill>
+          <a:ln w="6350">
+            <a:solidFill>
+              <a:srgbClr val="D5DDE8"/>
+            </a:solidFill>
+          </a:ln>
+          <a:effectLst/>
+        </p:spPr>
+        <p:style>
+          <a:lnRef idx="1">
+            <a:schemeClr val="accent1"/>
+          </a:lnRef>
+          <a:fillRef idx="3">
+            <a:schemeClr val="accent1"/>
+          </a:fillRef>
+          <a:effectRef idx="2">
+            <a:schemeClr val="accent1"/>
+          </a:effectRef>
+          <a:fontRef idx="minor">
+            <a:schemeClr val="lt1"/>
+          </a:fontRef>
+        </p:style>
+        <p:txBody>
+          <a:bodyPr rtlCol="0" anchor="ctr"/>
+          <a:lstStyle/>
+          <a:p>
+            <a:pPr algn="ctr"/>
+          </a:p>
+        </p:txBody>
+      </p:sp>
+      <p:sp>
+        <p:nvSpPr>
+          <p:cNvPr id="72" name="TextBox 71"/>
+          <p:cNvSpPr txBox="1"/>
+          <p:nvPr/>
+        </p:nvSpPr>
+        <p:spPr>
+          <a:xfrm>
+            <a:off x="621792" y="4901184"/>
+            <a:ext cx="2176272" cy="292608"/>
+          </a:xfrm>
+          <a:prstGeom prst="rect">
+            <a:avLst/>
+          </a:prstGeom>
+          <a:noFill/>
+        </p:spPr>
+        <p:txBody>
+          <a:bodyPr wrap="square" lIns="25400" rIns="25400" tIns="25400" bIns="25400" anchor="ctr">
+            <a:spAutoFit/>
+          </a:bodyPr>
+          <a:lstStyle/>
+          <a:p>
+            <a:pPr algn="l">
+              <a:lnSpc>
+                <a:spcPct val="100000"/>
+              </a:lnSpc>
+              <a:spcAft>
+                <a:spcPts val="0"/>
+              </a:spcAft>
+            </a:pPr>
+            <a:r>
+              <a:rPr sz="1050" b="0" i="0">
+                <a:solidFill>
+                  <a:srgbClr val="222A3A"/>
+                </a:solidFill>
+                <a:latin typeface="Calibri"/>
+              </a:rPr>
+              <a:t>nangluong</a:t>
+            </a:r>
+          </a:p>
+        </p:txBody>
+      </p:sp>
+      <p:sp>
+        <p:nvSpPr>
+          <p:cNvPr id="73" name="Rectangle 72"/>
+          <p:cNvSpPr/>
+          <p:nvPr/>
+        </p:nvSpPr>
+        <p:spPr>
+          <a:xfrm>
+            <a:off x="2852928" y="4901184"/>
+            <a:ext cx="3785616" cy="292608"/>
+          </a:xfrm>
+          <a:prstGeom prst="rect">
+            <a:avLst/>
+          </a:prstGeom>
+          <a:solidFill>
+            <a:srgbClr val="FFFFFF"/>
+          </a:solidFill>
+          <a:ln w="6350">
+            <a:solidFill>
+              <a:srgbClr val="D5DDE8"/>
+            </a:solidFill>
+          </a:ln>
+          <a:effectLst/>
+        </p:spPr>
+        <p:style>
+          <a:lnRef idx="1">
+            <a:schemeClr val="accent1"/>
+          </a:lnRef>
+          <a:fillRef idx="3">
+            <a:schemeClr val="accent1"/>
+          </a:fillRef>
+          <a:effectRef idx="2">
+            <a:schemeClr val="accent1"/>
+          </a:effectRef>
+          <a:fontRef idx="minor">
+            <a:schemeClr val="lt1"/>
+          </a:fontRef>
+        </p:style>
+        <p:txBody>
+          <a:bodyPr rtlCol="0" anchor="ctr"/>
+          <a:lstStyle/>
+          <a:p>
+            <a:pPr algn="ctr"/>
+          </a:p>
+        </p:txBody>
+      </p:sp>
+      <p:sp>
+        <p:nvSpPr>
+          <p:cNvPr id="74" name="TextBox 73"/>
+          <p:cNvSpPr txBox="1"/>
+          <p:nvPr/>
+        </p:nvSpPr>
+        <p:spPr>
+          <a:xfrm>
+            <a:off x="2926080" y="4901184"/>
+            <a:ext cx="3657600" cy="292608"/>
+          </a:xfrm>
+          <a:prstGeom prst="rect">
+            <a:avLst/>
+          </a:prstGeom>
+          <a:noFill/>
+        </p:spPr>
+        <p:txBody>
+          <a:bodyPr wrap="square" lIns="25400" rIns="25400" tIns="25400" bIns="25400" anchor="ctr">
+            <a:spAutoFit/>
+          </a:bodyPr>
+          <a:lstStyle/>
+          <a:p>
+            <a:pPr algn="l">
+              <a:lnSpc>
+                <a:spcPct val="100000"/>
+              </a:lnSpc>
+              <a:spcAft>
+                <a:spcPts val="0"/>
+              </a:spcAft>
+            </a:pPr>
+            <a:r>
+              <a:rPr sz="1050" b="0" i="0">
+                <a:solidFill>
+                  <a:srgbClr val="222A3A"/>
+                </a:solidFill>
+                <a:latin typeface="Calibri"/>
+              </a:rPr>
+              <a:t>NV quản lý năng lượng</a:t>
+            </a:r>
+          </a:p>
+        </p:txBody>
+      </p:sp>
+      <p:sp>
+        <p:nvSpPr>
+          <p:cNvPr id="75" name="Rectangle 74"/>
+          <p:cNvSpPr/>
+          <p:nvPr/>
+        </p:nvSpPr>
+        <p:spPr>
+          <a:xfrm>
+            <a:off x="6638544" y="4901184"/>
+            <a:ext cx="2139696" cy="292608"/>
+          </a:xfrm>
+          <a:prstGeom prst="rect">
+            <a:avLst/>
+          </a:prstGeom>
+          <a:solidFill>
+            <a:srgbClr val="FFFFFF"/>
+          </a:solidFill>
+          <a:ln w="6350">
+            <a:solidFill>
+              <a:srgbClr val="D5DDE8"/>
+            </a:solidFill>
+          </a:ln>
+          <a:effectLst/>
+        </p:spPr>
+        <p:style>
+          <a:lnRef idx="1">
+            <a:schemeClr val="accent1"/>
+          </a:lnRef>
+          <a:fillRef idx="3">
+            <a:schemeClr val="accent1"/>
+          </a:fillRef>
+          <a:effectRef idx="2">
+            <a:schemeClr val="accent1"/>
+          </a:effectRef>
+          <a:fontRef idx="minor">
+            <a:schemeClr val="lt1"/>
+          </a:fontRef>
+        </p:style>
+        <p:txBody>
+          <a:bodyPr rtlCol="0" anchor="ctr"/>
+          <a:lstStyle/>
+          <a:p>
+            <a:pPr algn="ctr"/>
+          </a:p>
+        </p:txBody>
+      </p:sp>
+      <p:sp>
+        <p:nvSpPr>
+          <p:cNvPr id="76" name="TextBox 75"/>
+          <p:cNvSpPr txBox="1"/>
+          <p:nvPr/>
+        </p:nvSpPr>
+        <p:spPr>
+          <a:xfrm>
+            <a:off x="6711696" y="4901184"/>
+            <a:ext cx="2011679" cy="292608"/>
+          </a:xfrm>
+          <a:prstGeom prst="rect">
+            <a:avLst/>
+          </a:prstGeom>
+          <a:noFill/>
+        </p:spPr>
+        <p:txBody>
+          <a:bodyPr wrap="square" lIns="25400" rIns="25400" tIns="25400" bIns="25400" anchor="ctr">
+            <a:spAutoFit/>
+          </a:bodyPr>
+          <a:lstStyle/>
+          <a:p>
+            <a:pPr algn="l">
+              <a:lnSpc>
+                <a:spcPct val="100000"/>
+              </a:lnSpc>
+              <a:spcAft>
+                <a:spcPts val="0"/>
+              </a:spcAft>
+            </a:pPr>
+            <a:r>
+              <a:rPr sz="1050" b="0" i="0">
+                <a:solidFill>
+                  <a:srgbClr val="222A3A"/>
+                </a:solidFill>
+                <a:latin typeface="Calibri"/>
+              </a:rPr>
+              <a:t>operator</a:t>
+            </a:r>
+          </a:p>
+        </p:txBody>
+      </p:sp>
+      <p:sp>
+        <p:nvSpPr>
+          <p:cNvPr id="77" name="Rounded Rectangle 76"/>
           <p:cNvSpPr/>
           <p:nvPr/>
         </p:nvSpPr>
@@ -15720,13 +15682,12 @@
           <a:lstStyle/>
           <a:p>
             <a:pPr algn="ctr"/>
-            <a:endParaRPr/>
-          </a:p>
-        </p:txBody>
-      </p:sp>
-      <p:sp>
-        <p:nvSpPr>
-          <p:cNvPr id="72" name="TextBox 71"/>
+          </a:p>
+        </p:txBody>
+      </p:sp>
+      <p:sp>
+        <p:nvSpPr>
+          <p:cNvPr id="78" name="TextBox 77"/>
           <p:cNvSpPr txBox="1"/>
           <p:nvPr/>
         </p:nvSpPr>
@@ -15741,7 +15702,7 @@
           <a:noFill/>
         </p:spPr>
         <p:txBody>
-          <a:bodyPr wrap="square" lIns="25400" tIns="25400" rIns="25400" bIns="25400" anchor="t">
+          <a:bodyPr wrap="square" lIns="25400" rIns="25400" tIns="25400" bIns="25400" anchor="t">
             <a:spAutoFit/>
           </a:bodyPr>
           <a:lstStyle/>
@@ -15813,7 +15774,7 @@
 </file>
 
 <file path=ppt/slides/slide5.xml><?xml version="1.0" encoding="utf-8"?>
-<p:sld xmlns:a="http://schemas.openxmlformats.org/drawingml/2006/main" xmlns:r="http://schemas.openxmlformats.org/officeDocument/2006/relationships" xmlns:p="http://schemas.openxmlformats.org/presentationml/2006/main">
+<p:sld xmlns:a="http://schemas.openxmlformats.org/drawingml/2006/main" xmlns:p="http://schemas.openxmlformats.org/presentationml/2006/main" xmlns:r="http://schemas.openxmlformats.org/officeDocument/2006/relationships">
   <p:cSld>
     <p:spTree>
       <p:nvGrpSpPr>
@@ -15821,14 +15782,7 @@
         <p:cNvGrpSpPr/>
         <p:nvPr/>
       </p:nvGrpSpPr>
-      <p:grpSpPr>
-        <a:xfrm>
-          <a:off x="0" y="0"/>
-          <a:ext cx="0" cy="0"/>
-          <a:chOff x="0" y="0"/>
-          <a:chExt cx="0" cy="0"/>
-        </a:xfrm>
-      </p:grpSpPr>
+      <p:grpSpPr/>
       <p:sp>
         <p:nvSpPr>
           <p:cNvPr id="2" name="Rectangle 1"/>
@@ -15870,7 +15824,6 @@
           <a:lstStyle/>
           <a:p>
             <a:pPr algn="ctr"/>
-            <a:endParaRPr/>
           </a:p>
         </p:txBody>
       </p:sp>
@@ -15891,7 +15844,7 @@
           <a:noFill/>
         </p:spPr>
         <p:txBody>
-          <a:bodyPr wrap="square" lIns="25400" tIns="25400" rIns="25400" bIns="25400" anchor="t">
+          <a:bodyPr wrap="square" lIns="25400" rIns="25400" tIns="25400" bIns="25400" anchor="t">
             <a:spAutoFit/>
           </a:bodyPr>
           <a:lstStyle/>
@@ -15933,7 +15886,7 @@
           <a:noFill/>
         </p:spPr>
         <p:txBody>
-          <a:bodyPr wrap="square" lIns="25400" tIns="25400" rIns="25400" bIns="25400" anchor="t">
+          <a:bodyPr wrap="square" lIns="25400" rIns="25400" tIns="25400" bIns="25400" anchor="t">
             <a:spAutoFit/>
           </a:bodyPr>
           <a:lstStyle/>
@@ -15995,7 +15948,7 @@
           </a:fontRef>
         </p:style>
         <p:txBody>
-          <a:bodyPr wrap="none" lIns="0" tIns="0" rIns="0" bIns="0" rtlCol="0" anchor="ctr"/>
+          <a:bodyPr rtlCol="0" anchor="ctr" wrap="none" lIns="0" rIns="0" tIns="0" bIns="0"/>
           <a:lstStyle/>
           <a:p>
             <a:pPr algn="ctr"/>
@@ -16054,7 +16007,6 @@
           <a:lstStyle/>
           <a:p>
             <a:pPr algn="ctr"/>
-            <a:endParaRPr/>
           </a:p>
         </p:txBody>
       </p:sp>
@@ -16075,7 +16027,7 @@
           <a:noFill/>
         </p:spPr>
         <p:txBody>
-          <a:bodyPr wrap="square" lIns="25400" tIns="25400" rIns="25400" bIns="25400" anchor="ctr">
+          <a:bodyPr wrap="square" lIns="25400" rIns="25400" tIns="25400" bIns="25400" anchor="ctr">
             <a:spAutoFit/>
           </a:bodyPr>
           <a:lstStyle/>
@@ -16117,7 +16069,7 @@
           <a:noFill/>
         </p:spPr>
         <p:txBody>
-          <a:bodyPr wrap="square" lIns="25400" tIns="25400" rIns="25400" bIns="25400" anchor="ctr">
+          <a:bodyPr wrap="square" lIns="25400" rIns="25400" tIns="25400" bIns="25400" anchor="ctr">
             <a:spAutoFit/>
           </a:bodyPr>
           <a:lstStyle/>
@@ -16179,7 +16131,7 @@
           </a:fontRef>
         </p:style>
         <p:txBody>
-          <a:bodyPr wrap="none" lIns="0" tIns="0" rIns="0" bIns="0" rtlCol="0" anchor="ctr"/>
+          <a:bodyPr rtlCol="0" anchor="ctr" wrap="none" lIns="0" rIns="0" tIns="0" bIns="0"/>
           <a:lstStyle/>
           <a:p>
             <a:pPr algn="ctr"/>
@@ -16238,7 +16190,6 @@
           <a:lstStyle/>
           <a:p>
             <a:pPr algn="ctr"/>
-            <a:endParaRPr/>
           </a:p>
         </p:txBody>
       </p:sp>
@@ -16259,7 +16210,7 @@
           <a:noFill/>
         </p:spPr>
         <p:txBody>
-          <a:bodyPr wrap="square" lIns="25400" tIns="25400" rIns="25400" bIns="25400" anchor="ctr">
+          <a:bodyPr wrap="square" lIns="25400" rIns="25400" tIns="25400" bIns="25400" anchor="ctr">
             <a:spAutoFit/>
           </a:bodyPr>
           <a:lstStyle/>
@@ -16301,7 +16252,7 @@
           <a:noFill/>
         </p:spPr>
         <p:txBody>
-          <a:bodyPr wrap="square" lIns="25400" tIns="25400" rIns="25400" bIns="25400" anchor="ctr">
+          <a:bodyPr wrap="square" lIns="25400" rIns="25400" tIns="25400" bIns="25400" anchor="ctr">
             <a:spAutoFit/>
           </a:bodyPr>
           <a:lstStyle/>
@@ -16363,7 +16314,7 @@
           </a:fontRef>
         </p:style>
         <p:txBody>
-          <a:bodyPr wrap="none" lIns="0" tIns="0" rIns="0" bIns="0" rtlCol="0" anchor="ctr"/>
+          <a:bodyPr rtlCol="0" anchor="ctr" wrap="none" lIns="0" rIns="0" tIns="0" bIns="0"/>
           <a:lstStyle/>
           <a:p>
             <a:pPr algn="ctr"/>
@@ -16422,7 +16373,6 @@
           <a:lstStyle/>
           <a:p>
             <a:pPr algn="ctr"/>
-            <a:endParaRPr/>
           </a:p>
         </p:txBody>
       </p:sp>
@@ -16443,7 +16393,7 @@
           <a:noFill/>
         </p:spPr>
         <p:txBody>
-          <a:bodyPr wrap="square" lIns="25400" tIns="25400" rIns="25400" bIns="25400" anchor="ctr">
+          <a:bodyPr wrap="square" lIns="25400" rIns="25400" tIns="25400" bIns="25400" anchor="ctr">
             <a:spAutoFit/>
           </a:bodyPr>
           <a:lstStyle/>
@@ -16485,7 +16435,7 @@
           <a:noFill/>
         </p:spPr>
         <p:txBody>
-          <a:bodyPr wrap="square" lIns="25400" tIns="25400" rIns="25400" bIns="25400" anchor="ctr">
+          <a:bodyPr wrap="square" lIns="25400" rIns="25400" tIns="25400" bIns="25400" anchor="ctr">
             <a:spAutoFit/>
           </a:bodyPr>
           <a:lstStyle/>
@@ -16505,7 +16455,7 @@
                 </a:solidFill>
                 <a:latin typeface="Calibri"/>
               </a:rPr>
-              <a:t>Chỉ thao tác trên line / khu vực / loại test được phân.</a:t>
+              <a:t>Chỉ thao tác trên line / khu vực / loại test / địa điểm kho được phân.</a:t>
             </a:r>
           </a:p>
         </p:txBody>
@@ -16547,7 +16497,7 @@
           </a:fontRef>
         </p:style>
         <p:txBody>
-          <a:bodyPr wrap="none" lIns="0" tIns="0" rIns="0" bIns="0" rtlCol="0" anchor="ctr"/>
+          <a:bodyPr rtlCol="0" anchor="ctr" wrap="none" lIns="0" rIns="0" tIns="0" bIns="0"/>
           <a:lstStyle/>
           <a:p>
             <a:pPr algn="ctr"/>
@@ -16606,7 +16556,6 @@
           <a:lstStyle/>
           <a:p>
             <a:pPr algn="ctr"/>
-            <a:endParaRPr/>
           </a:p>
         </p:txBody>
       </p:sp>
@@ -16627,7 +16576,7 @@
           <a:noFill/>
         </p:spPr>
         <p:txBody>
-          <a:bodyPr wrap="square" lIns="25400" tIns="25400" rIns="25400" bIns="25400" anchor="ctr">
+          <a:bodyPr wrap="square" lIns="25400" rIns="25400" tIns="25400" bIns="25400" anchor="ctr">
             <a:spAutoFit/>
           </a:bodyPr>
           <a:lstStyle/>
@@ -16669,7 +16618,7 @@
           <a:noFill/>
         </p:spPr>
         <p:txBody>
-          <a:bodyPr wrap="square" lIns="25400" tIns="25400" rIns="25400" bIns="25400" anchor="ctr">
+          <a:bodyPr wrap="square" lIns="25400" rIns="25400" tIns="25400" bIns="25400" anchor="ctr">
             <a:spAutoFit/>
           </a:bodyPr>
           <a:lstStyle/>
@@ -16703,7 +16652,7 @@
 </file>
 
 <file path=ppt/slides/slide6.xml><?xml version="1.0" encoding="utf-8"?>
-<p:sld xmlns:a="http://schemas.openxmlformats.org/drawingml/2006/main" xmlns:r="http://schemas.openxmlformats.org/officeDocument/2006/relationships" xmlns:p="http://schemas.openxmlformats.org/presentationml/2006/main">
+<p:sld xmlns:a="http://schemas.openxmlformats.org/drawingml/2006/main" xmlns:p="http://schemas.openxmlformats.org/presentationml/2006/main" xmlns:r="http://schemas.openxmlformats.org/officeDocument/2006/relationships">
   <p:cSld>
     <p:spTree>
       <p:nvGrpSpPr>
@@ -16711,14 +16660,7 @@
         <p:cNvGrpSpPr/>
         <p:nvPr/>
       </p:nvGrpSpPr>
-      <p:grpSpPr>
-        <a:xfrm>
-          <a:off x="0" y="0"/>
-          <a:ext cx="0" cy="0"/>
-          <a:chOff x="0" y="0"/>
-          <a:chExt cx="0" cy="0"/>
-        </a:xfrm>
-      </p:grpSpPr>
+      <p:grpSpPr/>
       <p:sp>
         <p:nvSpPr>
           <p:cNvPr id="2" name="Rectangle 1"/>
@@ -16760,7 +16702,6 @@
           <a:lstStyle/>
           <a:p>
             <a:pPr algn="ctr"/>
-            <a:endParaRPr/>
           </a:p>
         </p:txBody>
       </p:sp>
@@ -16781,7 +16722,7 @@
           <a:noFill/>
         </p:spPr>
         <p:txBody>
-          <a:bodyPr wrap="square" lIns="25400" tIns="25400" rIns="25400" bIns="25400" anchor="t">
+          <a:bodyPr wrap="square" lIns="25400" rIns="25400" tIns="25400" bIns="25400" anchor="t">
             <a:spAutoFit/>
           </a:bodyPr>
           <a:lstStyle/>
@@ -16823,7 +16764,7 @@
           <a:noFill/>
         </p:spPr>
         <p:txBody>
-          <a:bodyPr wrap="square" lIns="25400" tIns="25400" rIns="25400" bIns="25400" anchor="t">
+          <a:bodyPr wrap="square" lIns="25400" rIns="25400" tIns="25400" bIns="25400" anchor="t">
             <a:spAutoFit/>
           </a:bodyPr>
           <a:lstStyle/>
@@ -16891,7 +16832,6 @@
           <a:lstStyle/>
           <a:p>
             <a:pPr algn="ctr"/>
-            <a:endParaRPr/>
           </a:p>
         </p:txBody>
       </p:sp>
@@ -16912,7 +16852,7 @@
           <a:noFill/>
         </p:spPr>
         <p:txBody>
-          <a:bodyPr wrap="square" lIns="25400" tIns="25400" rIns="25400" bIns="25400" anchor="t">
+          <a:bodyPr wrap="square" lIns="25400" rIns="25400" tIns="25400" bIns="25400" anchor="t">
             <a:spAutoFit/>
           </a:bodyPr>
           <a:lstStyle/>
@@ -16954,7 +16894,7 @@
           <a:noFill/>
         </p:spPr>
         <p:txBody>
-          <a:bodyPr wrap="square" lIns="25400" tIns="25400" rIns="25400" bIns="25400" anchor="t">
+          <a:bodyPr wrap="square" lIns="25400" rIns="25400" tIns="25400" bIns="25400" anchor="t">
             <a:spAutoFit/>
           </a:bodyPr>
           <a:lstStyle/>
@@ -17022,7 +16962,6 @@
           <a:lstStyle/>
           <a:p>
             <a:pPr algn="ctr"/>
-            <a:endParaRPr/>
           </a:p>
         </p:txBody>
       </p:sp>
@@ -17043,7 +16982,7 @@
           <a:noFill/>
         </p:spPr>
         <p:txBody>
-          <a:bodyPr wrap="square" lIns="25400" tIns="25400" rIns="25400" bIns="25400" anchor="t">
+          <a:bodyPr wrap="square" lIns="25400" rIns="25400" tIns="25400" bIns="25400" anchor="t">
             <a:spAutoFit/>
           </a:bodyPr>
           <a:lstStyle/>
@@ -17085,7 +17024,7 @@
           <a:noFill/>
         </p:spPr>
         <p:txBody>
-          <a:bodyPr wrap="square" lIns="25400" tIns="25400" rIns="25400" bIns="25400" anchor="t">
+          <a:bodyPr wrap="square" lIns="25400" rIns="25400" tIns="25400" bIns="25400" anchor="t">
             <a:spAutoFit/>
           </a:bodyPr>
           <a:lstStyle/>
@@ -17153,7 +17092,6 @@
           <a:lstStyle/>
           <a:p>
             <a:pPr algn="ctr"/>
-            <a:endParaRPr/>
           </a:p>
         </p:txBody>
       </p:sp>
@@ -17174,7 +17112,7 @@
           <a:noFill/>
         </p:spPr>
         <p:txBody>
-          <a:bodyPr wrap="square" lIns="25400" tIns="25400" rIns="25400" bIns="25400" anchor="t">
+          <a:bodyPr wrap="square" lIns="25400" rIns="25400" tIns="25400" bIns="25400" anchor="t">
             <a:spAutoFit/>
           </a:bodyPr>
           <a:lstStyle/>
@@ -17216,7 +17154,7 @@
           <a:noFill/>
         </p:spPr>
         <p:txBody>
-          <a:bodyPr wrap="square" lIns="25400" tIns="25400" rIns="25400" bIns="25400" anchor="t">
+          <a:bodyPr wrap="square" lIns="25400" rIns="25400" tIns="25400" bIns="25400" anchor="t">
             <a:spAutoFit/>
           </a:bodyPr>
           <a:lstStyle/>
@@ -17284,7 +17222,6 @@
           <a:lstStyle/>
           <a:p>
             <a:pPr algn="ctr"/>
-            <a:endParaRPr/>
           </a:p>
         </p:txBody>
       </p:sp>
@@ -17305,7 +17242,7 @@
           <a:noFill/>
         </p:spPr>
         <p:txBody>
-          <a:bodyPr wrap="square" lIns="25400" tIns="25400" rIns="25400" bIns="25400" anchor="t">
+          <a:bodyPr wrap="square" lIns="25400" rIns="25400" tIns="25400" bIns="25400" anchor="t">
             <a:spAutoFit/>
           </a:bodyPr>
           <a:lstStyle/>
@@ -17347,7 +17284,7 @@
           <a:noFill/>
         </p:spPr>
         <p:txBody>
-          <a:bodyPr wrap="square" lIns="25400" tIns="25400" rIns="25400" bIns="25400" anchor="t">
+          <a:bodyPr wrap="square" lIns="25400" rIns="25400" tIns="25400" bIns="25400" anchor="t">
             <a:spAutoFit/>
           </a:bodyPr>
           <a:lstStyle/>
@@ -17415,7 +17352,6 @@
           <a:lstStyle/>
           <a:p>
             <a:pPr algn="ctr"/>
-            <a:endParaRPr/>
           </a:p>
         </p:txBody>
       </p:sp>
@@ -17436,7 +17372,7 @@
           <a:noFill/>
         </p:spPr>
         <p:txBody>
-          <a:bodyPr wrap="square" lIns="25400" tIns="25400" rIns="25400" bIns="25400" anchor="t">
+          <a:bodyPr wrap="square" lIns="25400" rIns="25400" tIns="25400" bIns="25400" anchor="t">
             <a:spAutoFit/>
           </a:bodyPr>
           <a:lstStyle/>
@@ -17478,7 +17414,7 @@
           <a:noFill/>
         </p:spPr>
         <p:txBody>
-          <a:bodyPr wrap="square" lIns="25400" tIns="25400" rIns="25400" bIns="25400" anchor="t">
+          <a:bodyPr wrap="square" lIns="25400" rIns="25400" tIns="25400" bIns="25400" anchor="t">
             <a:spAutoFit/>
           </a:bodyPr>
           <a:lstStyle/>
@@ -17546,7 +17482,6 @@
           <a:lstStyle/>
           <a:p>
             <a:pPr algn="ctr"/>
-            <a:endParaRPr/>
           </a:p>
         </p:txBody>
       </p:sp>
@@ -17567,7 +17502,7 @@
           <a:noFill/>
         </p:spPr>
         <p:txBody>
-          <a:bodyPr wrap="square" lIns="25400" tIns="25400" rIns="25400" bIns="25400" anchor="t">
+          <a:bodyPr wrap="square" lIns="25400" rIns="25400" tIns="25400" bIns="25400" anchor="t">
             <a:spAutoFit/>
           </a:bodyPr>
           <a:lstStyle/>
@@ -17609,7 +17544,7 @@
           <a:noFill/>
         </p:spPr>
         <p:txBody>
-          <a:bodyPr wrap="square" lIns="25400" tIns="25400" rIns="25400" bIns="25400" anchor="t">
+          <a:bodyPr wrap="square" lIns="25400" rIns="25400" tIns="25400" bIns="25400" anchor="t">
             <a:spAutoFit/>
           </a:bodyPr>
           <a:lstStyle/>
@@ -17643,7 +17578,7 @@
 </file>
 
 <file path=ppt/slides/slide7.xml><?xml version="1.0" encoding="utf-8"?>
-<p:sld xmlns:a="http://schemas.openxmlformats.org/drawingml/2006/main" xmlns:r="http://schemas.openxmlformats.org/officeDocument/2006/relationships" xmlns:p="http://schemas.openxmlformats.org/presentationml/2006/main">
+<p:sld xmlns:a="http://schemas.openxmlformats.org/drawingml/2006/main" xmlns:p="http://schemas.openxmlformats.org/presentationml/2006/main" xmlns:r="http://schemas.openxmlformats.org/officeDocument/2006/relationships">
   <p:cSld>
     <p:spTree>
       <p:nvGrpSpPr>
@@ -17651,14 +17586,7 @@
         <p:cNvGrpSpPr/>
         <p:nvPr/>
       </p:nvGrpSpPr>
-      <p:grpSpPr>
-        <a:xfrm>
-          <a:off x="0" y="0"/>
-          <a:ext cx="0" cy="0"/>
-          <a:chOff x="0" y="0"/>
-          <a:chExt cx="0" cy="0"/>
-        </a:xfrm>
-      </p:grpSpPr>
+      <p:grpSpPr/>
       <p:sp>
         <p:nvSpPr>
           <p:cNvPr id="2" name="Rectangle 1"/>
@@ -17700,7 +17628,6 @@
           <a:lstStyle/>
           <a:p>
             <a:pPr algn="ctr"/>
-            <a:endParaRPr/>
           </a:p>
         </p:txBody>
       </p:sp>
@@ -17721,7 +17648,7 @@
           <a:noFill/>
         </p:spPr>
         <p:txBody>
-          <a:bodyPr wrap="square" lIns="25400" tIns="25400" rIns="25400" bIns="25400" anchor="t">
+          <a:bodyPr wrap="square" lIns="25400" rIns="25400" tIns="25400" bIns="25400" anchor="t">
             <a:spAutoFit/>
           </a:bodyPr>
           <a:lstStyle/>
@@ -17763,7 +17690,7 @@
           <a:noFill/>
         </p:spPr>
         <p:txBody>
-          <a:bodyPr wrap="square" lIns="25400" tIns="25400" rIns="25400" bIns="25400" anchor="t">
+          <a:bodyPr wrap="square" lIns="25400" rIns="25400" tIns="25400" bIns="25400" anchor="t">
             <a:spAutoFit/>
           </a:bodyPr>
           <a:lstStyle/>
@@ -17831,7 +17758,6 @@
           <a:lstStyle/>
           <a:p>
             <a:pPr algn="ctr"/>
-            <a:endParaRPr/>
           </a:p>
         </p:txBody>
       </p:sp>
@@ -17872,7 +17798,7 @@
           </a:fontRef>
         </p:style>
         <p:txBody>
-          <a:bodyPr wrap="none" lIns="0" tIns="0" rIns="0" bIns="0" rtlCol="0" anchor="ctr"/>
+          <a:bodyPr rtlCol="0" anchor="ctr" wrap="none" lIns="0" rIns="0" tIns="0" bIns="0"/>
           <a:lstStyle/>
           <a:p>
             <a:pPr algn="ctr"/>
@@ -17905,7 +17831,7 @@
           <a:noFill/>
         </p:spPr>
         <p:txBody>
-          <a:bodyPr wrap="square" lIns="25400" tIns="25400" rIns="25400" bIns="25400" anchor="ctr">
+          <a:bodyPr wrap="square" lIns="25400" rIns="25400" tIns="25400" bIns="25400" anchor="ctr">
             <a:spAutoFit/>
           </a:bodyPr>
           <a:lstStyle/>
@@ -17947,7 +17873,7 @@
           <a:noFill/>
         </p:spPr>
         <p:txBody>
-          <a:bodyPr wrap="square" lIns="25400" tIns="25400" rIns="25400" bIns="25400" anchor="t">
+          <a:bodyPr wrap="square" lIns="25400" rIns="25400" tIns="25400" bIns="25400" anchor="t">
             <a:spAutoFit/>
           </a:bodyPr>
           <a:lstStyle/>
@@ -18110,7 +18036,6 @@
           <a:lstStyle/>
           <a:p>
             <a:pPr algn="ctr"/>
-            <a:endParaRPr/>
           </a:p>
         </p:txBody>
       </p:sp>
@@ -18151,7 +18076,7 @@
           </a:fontRef>
         </p:style>
         <p:txBody>
-          <a:bodyPr wrap="none" lIns="0" tIns="0" rIns="0" bIns="0" rtlCol="0" anchor="ctr"/>
+          <a:bodyPr rtlCol="0" anchor="ctr" wrap="none" lIns="0" rIns="0" tIns="0" bIns="0"/>
           <a:lstStyle/>
           <a:p>
             <a:pPr algn="ctr"/>
@@ -18184,7 +18109,7 @@
           <a:noFill/>
         </p:spPr>
         <p:txBody>
-          <a:bodyPr wrap="square" lIns="25400" tIns="25400" rIns="25400" bIns="25400" anchor="ctr">
+          <a:bodyPr wrap="square" lIns="25400" rIns="25400" tIns="25400" bIns="25400" anchor="ctr">
             <a:spAutoFit/>
           </a:bodyPr>
           <a:lstStyle/>
@@ -18226,7 +18151,7 @@
           <a:noFill/>
         </p:spPr>
         <p:txBody>
-          <a:bodyPr wrap="square" lIns="25400" tIns="25400" rIns="25400" bIns="25400" anchor="t">
+          <a:bodyPr wrap="square" lIns="25400" rIns="25400" tIns="25400" bIns="25400" anchor="t">
             <a:spAutoFit/>
           </a:bodyPr>
           <a:lstStyle/>
@@ -18265,7 +18190,7 @@
                 </a:solidFill>
                 <a:latin typeface="Calibri"/>
               </a:rPr>
-              <a:t>Chuyển trạng thái ready→running</a:t>
+              <a:t>Đề nghị nhận kho (Kho phân</a:t>
             </a:r>
           </a:p>
           <a:p>
@@ -18284,26 +18209,26 @@
                 </a:solidFill>
                 <a:latin typeface="Calibri"/>
               </a:rPr>
+              <a:t>   xưởng ← Kho công ty)</a:t>
+            </a:r>
+          </a:p>
+          <a:p>
+            <a:pPr algn="l">
+              <a:lnSpc>
+                <a:spcPct val="106000"/>
+              </a:lnSpc>
+              <a:spcAft>
+                <a:spcPts val="200"/>
+              </a:spcAft>
+            </a:pPr>
+            <a:r>
+              <a:rPr sz="1300" b="0" i="0">
+                <a:solidFill>
+                  <a:srgbClr val="222A3A"/>
+                </a:solidFill>
+                <a:latin typeface="Calibri"/>
+              </a:rPr>
               <a:t>Consume / produce / actual</a:t>
-            </a:r>
-          </a:p>
-          <a:p>
-            <a:pPr algn="l">
-              <a:lnSpc>
-                <a:spcPct val="106000"/>
-              </a:lnSpc>
-              <a:spcAft>
-                <a:spcPts val="200"/>
-              </a:spcAft>
-            </a:pPr>
-            <a:r>
-              <a:rPr sz="1300" b="0" i="0">
-                <a:solidFill>
-                  <a:srgbClr val="222A3A"/>
-                </a:solidFill>
-                <a:latin typeface="Calibri"/>
-              </a:rPr>
-              <a:t>Chạy phase ISA-88</a:t>
             </a:r>
           </a:p>
           <a:p>
@@ -18355,7 +18280,7 @@
 </file>
 
 <file path=ppt/slides/slide8.xml><?xml version="1.0" encoding="utf-8"?>
-<p:sld xmlns:a="http://schemas.openxmlformats.org/drawingml/2006/main" xmlns:r="http://schemas.openxmlformats.org/officeDocument/2006/relationships" xmlns:p="http://schemas.openxmlformats.org/presentationml/2006/main">
+<p:sld xmlns:a="http://schemas.openxmlformats.org/drawingml/2006/main" xmlns:p="http://schemas.openxmlformats.org/presentationml/2006/main" xmlns:r="http://schemas.openxmlformats.org/officeDocument/2006/relationships">
   <p:cSld>
     <p:spTree>
       <p:nvGrpSpPr>
@@ -18363,14 +18288,7 @@
         <p:cNvGrpSpPr/>
         <p:nvPr/>
       </p:nvGrpSpPr>
-      <p:grpSpPr>
-        <a:xfrm>
-          <a:off x="0" y="0"/>
-          <a:ext cx="0" cy="0"/>
-          <a:chOff x="0" y="0"/>
-          <a:chExt cx="0" cy="0"/>
-        </a:xfrm>
-      </p:grpSpPr>
+      <p:grpSpPr/>
       <p:sp>
         <p:nvSpPr>
           <p:cNvPr id="2" name="Rectangle 1"/>
@@ -18412,7 +18330,6 @@
           <a:lstStyle/>
           <a:p>
             <a:pPr algn="ctr"/>
-            <a:endParaRPr/>
           </a:p>
         </p:txBody>
       </p:sp>
@@ -18433,7 +18350,7 @@
           <a:noFill/>
         </p:spPr>
         <p:txBody>
-          <a:bodyPr wrap="square" lIns="25400" tIns="25400" rIns="25400" bIns="25400" anchor="t">
+          <a:bodyPr wrap="square" lIns="25400" rIns="25400" tIns="25400" bIns="25400" anchor="t">
             <a:spAutoFit/>
           </a:bodyPr>
           <a:lstStyle/>
@@ -18475,7 +18392,7 @@
           <a:noFill/>
         </p:spPr>
         <p:txBody>
-          <a:bodyPr wrap="square" lIns="25400" tIns="25400" rIns="25400" bIns="25400" anchor="t">
+          <a:bodyPr wrap="square" lIns="25400" rIns="25400" tIns="25400" bIns="25400" anchor="t">
             <a:spAutoFit/>
           </a:bodyPr>
           <a:lstStyle/>
@@ -18543,7 +18460,6 @@
           <a:lstStyle/>
           <a:p>
             <a:pPr algn="ctr"/>
-            <a:endParaRPr/>
           </a:p>
         </p:txBody>
       </p:sp>
@@ -18584,7 +18500,7 @@
           </a:fontRef>
         </p:style>
         <p:txBody>
-          <a:bodyPr wrap="none" lIns="0" tIns="0" rIns="0" bIns="0" rtlCol="0" anchor="ctr"/>
+          <a:bodyPr rtlCol="0" anchor="ctr" wrap="none" lIns="0" rIns="0" tIns="0" bIns="0"/>
           <a:lstStyle/>
           <a:p>
             <a:pPr algn="ctr"/>
@@ -18617,7 +18533,7 @@
           <a:noFill/>
         </p:spPr>
         <p:txBody>
-          <a:bodyPr wrap="square" lIns="25400" tIns="25400" rIns="25400" bIns="25400" anchor="ctr">
+          <a:bodyPr wrap="square" lIns="25400" rIns="25400" tIns="25400" bIns="25400" anchor="ctr">
             <a:spAutoFit/>
           </a:bodyPr>
           <a:lstStyle/>
@@ -18659,7 +18575,7 @@
           <a:noFill/>
         </p:spPr>
         <p:txBody>
-          <a:bodyPr wrap="square" lIns="25400" tIns="25400" rIns="25400" bIns="25400" anchor="t">
+          <a:bodyPr wrap="square" lIns="25400" rIns="25400" tIns="25400" bIns="25400" anchor="t">
             <a:spAutoFit/>
           </a:bodyPr>
           <a:lstStyle/>
@@ -18822,7 +18738,6 @@
           <a:lstStyle/>
           <a:p>
             <a:pPr algn="ctr"/>
-            <a:endParaRPr/>
           </a:p>
         </p:txBody>
       </p:sp>
@@ -18863,7 +18778,7 @@
           </a:fontRef>
         </p:style>
         <p:txBody>
-          <a:bodyPr wrap="none" lIns="0" tIns="0" rIns="0" bIns="0" rtlCol="0" anchor="ctr"/>
+          <a:bodyPr rtlCol="0" anchor="ctr" wrap="none" lIns="0" rIns="0" tIns="0" bIns="0"/>
           <a:lstStyle/>
           <a:p>
             <a:pPr algn="ctr"/>
@@ -18896,7 +18811,7 @@
           <a:noFill/>
         </p:spPr>
         <p:txBody>
-          <a:bodyPr wrap="square" lIns="25400" tIns="25400" rIns="25400" bIns="25400" anchor="ctr">
+          <a:bodyPr wrap="square" lIns="25400" rIns="25400" tIns="25400" bIns="25400" anchor="ctr">
             <a:spAutoFit/>
           </a:bodyPr>
           <a:lstStyle/>
@@ -18938,7 +18853,7 @@
           <a:noFill/>
         </p:spPr>
         <p:txBody>
-          <a:bodyPr wrap="square" lIns="25400" tIns="25400" rIns="25400" bIns="25400" anchor="t">
+          <a:bodyPr wrap="square" lIns="25400" rIns="25400" tIns="25400" bIns="25400" anchor="t">
             <a:spAutoFit/>
           </a:bodyPr>
           <a:lstStyle/>
@@ -19067,7 +18982,7 @@
 </file>
 
 <file path=ppt/slides/slide9.xml><?xml version="1.0" encoding="utf-8"?>
-<p:sld xmlns:a="http://schemas.openxmlformats.org/drawingml/2006/main" xmlns:r="http://schemas.openxmlformats.org/officeDocument/2006/relationships" xmlns:p="http://schemas.openxmlformats.org/presentationml/2006/main">
+<p:sld xmlns:a="http://schemas.openxmlformats.org/drawingml/2006/main" xmlns:p="http://schemas.openxmlformats.org/presentationml/2006/main" xmlns:r="http://schemas.openxmlformats.org/officeDocument/2006/relationships">
   <p:cSld>
     <p:spTree>
       <p:nvGrpSpPr>
@@ -19075,14 +18990,7 @@
         <p:cNvGrpSpPr/>
         <p:nvPr/>
       </p:nvGrpSpPr>
-      <p:grpSpPr>
-        <a:xfrm>
-          <a:off x="0" y="0"/>
-          <a:ext cx="0" cy="0"/>
-          <a:chOff x="0" y="0"/>
-          <a:chExt cx="0" cy="0"/>
-        </a:xfrm>
-      </p:grpSpPr>
+      <p:grpSpPr/>
       <p:sp>
         <p:nvSpPr>
           <p:cNvPr id="2" name="Rectangle 1"/>
@@ -19124,7 +19032,6 @@
           <a:lstStyle/>
           <a:p>
             <a:pPr algn="ctr"/>
-            <a:endParaRPr/>
           </a:p>
         </p:txBody>
       </p:sp>
@@ -19145,7 +19052,7 @@
           <a:noFill/>
         </p:spPr>
         <p:txBody>
-          <a:bodyPr wrap="square" lIns="25400" tIns="25400" rIns="25400" bIns="25400" anchor="t">
+          <a:bodyPr wrap="square" lIns="25400" rIns="25400" tIns="25400" bIns="25400" anchor="t">
             <a:spAutoFit/>
           </a:bodyPr>
           <a:lstStyle/>
@@ -19187,7 +19094,7 @@
           <a:noFill/>
         </p:spPr>
         <p:txBody>
-          <a:bodyPr wrap="square" lIns="25400" tIns="25400" rIns="25400" bIns="25400" anchor="t">
+          <a:bodyPr wrap="square" lIns="25400" rIns="25400" tIns="25400" bIns="25400" anchor="t">
             <a:spAutoFit/>
           </a:bodyPr>
           <a:lstStyle/>
@@ -19255,7 +19162,6 @@
           <a:lstStyle/>
           <a:p>
             <a:pPr algn="ctr"/>
-            <a:endParaRPr/>
           </a:p>
         </p:txBody>
       </p:sp>
@@ -19296,7 +19202,7 @@
           </a:fontRef>
         </p:style>
         <p:txBody>
-          <a:bodyPr wrap="none" lIns="0" tIns="0" rIns="0" bIns="0" rtlCol="0" anchor="ctr"/>
+          <a:bodyPr rtlCol="0" anchor="ctr" wrap="none" lIns="0" rIns="0" tIns="0" bIns="0"/>
           <a:lstStyle/>
           <a:p>
             <a:pPr algn="ctr"/>
@@ -19329,7 +19235,7 @@
           <a:noFill/>
         </p:spPr>
         <p:txBody>
-          <a:bodyPr wrap="square" lIns="25400" tIns="25400" rIns="25400" bIns="25400" anchor="ctr">
+          <a:bodyPr wrap="square" lIns="25400" rIns="25400" tIns="25400" bIns="25400" anchor="ctr">
             <a:spAutoFit/>
           </a:bodyPr>
           <a:lstStyle/>
@@ -19371,7 +19277,7 @@
           <a:noFill/>
         </p:spPr>
         <p:txBody>
-          <a:bodyPr wrap="square" lIns="25400" tIns="25400" rIns="25400" bIns="25400" anchor="t">
+          <a:bodyPr wrap="square" lIns="25400" rIns="25400" tIns="25400" bIns="25400" anchor="t">
             <a:spAutoFit/>
           </a:bodyPr>
           <a:lstStyle/>
@@ -19534,7 +19440,6 @@
           <a:lstStyle/>
           <a:p>
             <a:pPr algn="ctr"/>
-            <a:endParaRPr/>
           </a:p>
         </p:txBody>
       </p:sp>
@@ -19575,7 +19480,7 @@
           </a:fontRef>
         </p:style>
         <p:txBody>
-          <a:bodyPr wrap="none" lIns="0" tIns="0" rIns="0" bIns="0" rtlCol="0" anchor="ctr"/>
+          <a:bodyPr rtlCol="0" anchor="ctr" wrap="none" lIns="0" rIns="0" tIns="0" bIns="0"/>
           <a:lstStyle/>
           <a:p>
             <a:pPr algn="ctr"/>
@@ -19608,7 +19513,7 @@
           <a:noFill/>
         </p:spPr>
         <p:txBody>
-          <a:bodyPr wrap="square" lIns="25400" tIns="25400" rIns="25400" bIns="25400" anchor="ctr">
+          <a:bodyPr wrap="square" lIns="25400" rIns="25400" tIns="25400" bIns="25400" anchor="ctr">
             <a:spAutoFit/>
           </a:bodyPr>
           <a:lstStyle/>
@@ -19628,7 +19533,7 @@
                 </a:solidFill>
                 <a:latin typeface="Calibri"/>
               </a:rPr>
-              <a:t>Thủ kho NVL</a:t>
+              <a:t>Thủ kho NVL (Kho công ty)</a:t>
             </a:r>
           </a:p>
         </p:txBody>
@@ -19650,7 +19555,7 @@
           <a:noFill/>
         </p:spPr>
         <p:txBody>
-          <a:bodyPr wrap="square" lIns="25400" tIns="25400" rIns="25400" bIns="25400" anchor="t">
+          <a:bodyPr wrap="square" lIns="25400" rIns="25400" tIns="25400" bIns="25400" anchor="t">
             <a:spAutoFit/>
           </a:bodyPr>
           <a:lstStyle/>
@@ -19664,7 +19569,7 @@
               </a:spcAft>
             </a:pPr>
             <a:r>
-              <a:rPr sz="1300" b="0" i="0">
+              <a:rPr sz="1250" b="0" i="0">
                 <a:solidFill>
                   <a:srgbClr val="222A3A"/>
                 </a:solidFill>
@@ -19683,12 +19588,50 @@
               </a:spcAft>
             </a:pPr>
             <a:r>
-              <a:rPr sz="1300" b="0" i="0">
+              <a:rPr sz="1250" b="0" i="0">
                 <a:solidFill>
                   <a:srgbClr val="222A3A"/>
                 </a:solidFill>
                 <a:latin typeface="Calibri"/>
               </a:rPr>
+              <a:t>Duyệt đề nghị nhận kho (FIFO)</a:t>
+            </a:r>
+          </a:p>
+          <a:p>
+            <a:pPr algn="l">
+              <a:lnSpc>
+                <a:spcPct val="106000"/>
+              </a:lnSpc>
+              <a:spcAft>
+                <a:spcPts val="200"/>
+              </a:spcAft>
+            </a:pPr>
+            <a:r>
+              <a:rPr sz="1250" b="0" i="0">
+                <a:solidFill>
+                  <a:srgbClr val="222A3A"/>
+                </a:solidFill>
+                <a:latin typeface="Calibri"/>
+              </a:rPr>
+              <a:t>Kiểm kê định kỳ</a:t>
+            </a:r>
+          </a:p>
+          <a:p>
+            <a:pPr algn="l">
+              <a:lnSpc>
+                <a:spcPct val="106000"/>
+              </a:lnSpc>
+              <a:spcAft>
+                <a:spcPts val="200"/>
+              </a:spcAft>
+            </a:pPr>
+            <a:r>
+              <a:rPr sz="1250" b="0" i="0">
+                <a:solidFill>
+                  <a:srgbClr val="222A3A"/>
+                </a:solidFill>
+                <a:latin typeface="Calibri"/>
+              </a:rPr>
               <a:t>Tồn · thẻ kho · hạn dùng</a:t>
             </a:r>
           </a:p>
@@ -19702,13 +19645,13 @@
               </a:spcAft>
             </a:pPr>
             <a:r>
-              <a:rPr sz="1300" b="0" i="0">
+              <a:rPr sz="1250" b="0" i="0">
                 <a:solidFill>
                   <a:srgbClr val="222A3A"/>
                 </a:solidFill>
                 <a:latin typeface="Calibri"/>
               </a:rPr>
-              <a:t>Đóng pallet thành phẩm (WMS)</a:t>
+              <a:t>Chặn server nếu thao tác</a:t>
             </a:r>
           </a:p>
           <a:p>
@@ -19721,13 +19664,13 @@
               </a:spcAft>
             </a:pPr>
             <a:r>
-              <a:rPr sz="1300" b="0" i="0">
+              <a:rPr sz="1250" b="0" i="0">
                 <a:solidFill>
                   <a:srgbClr val="222A3A"/>
                 </a:solidFill>
                 <a:latin typeface="Calibri"/>
               </a:rPr>
-              <a:t>Putaway / ship + in tem</a:t>
+              <a:t>   sang Kho phân xưởng</a:t>
             </a:r>
           </a:p>
           <a:p>
@@ -19740,13 +19683,13 @@
               </a:spcAft>
             </a:pPr>
             <a:r>
-              <a:rPr sz="1300" b="0" i="0">
+              <a:rPr sz="1250" b="0" i="0">
                 <a:solidFill>
                   <a:srgbClr val="222A3A"/>
                 </a:solidFill>
                 <a:latin typeface="Calibri"/>
               </a:rPr>
-              <a:t>Ghi biến động bao bì</a:t>
+              <a:t>(Kho phân xưởng: tài khoản</a:t>
             </a:r>
           </a:p>
           <a:p>
@@ -19759,13 +19702,13 @@
               </a:spcAft>
             </a:pPr>
             <a:r>
-              <a:rPr sz="1300" b="0" i="0">
+              <a:rPr sz="1250" b="0" i="0">
                 <a:solidFill>
                   <a:srgbClr val="222A3A"/>
                 </a:solidFill>
                 <a:latin typeface="Calibri"/>
               </a:rPr>
-              <a:t>Phạm vi: khu vực kho</a:t>
+              <a:t>   thukho_px, đối xứng)</a:t>
             </a:r>
           </a:p>
         </p:txBody>

--- a/docs/MES-HuongDanSuDung.pptx
+++ b/docs/MES-HuongDanSuDung.pptx
@@ -3485,7 +3485,7 @@
                 </a:solidFill>
                 <a:latin typeface="Calibri"/>
               </a:rPr>
-              <a:t>Sách Hướng dẫn Sử dụng  ·  Phiên bản 0.1.0-mvp  ·  Tài liệu hướng dẫn nội bộ</a:t>
+              <a:t>Sách Hướng dẫn Sử dụng  ·  Phiên bản 0.1.0-mvp  ·  Cập nhật 25/07/2026</a:t>
             </a:r>
           </a:p>
         </p:txBody>
@@ -6949,7 +6949,7 @@
                 </a:solidFill>
                 <a:latin typeface="Calibri"/>
               </a:rPr>
-              <a:t>Đóng pallet, putaway, in tem</a:t>
+              <a:t>Nhập kho theo lô, cất vị trí, in tem</a:t>
             </a:r>
           </a:p>
         </p:txBody>
